--- a/Slides/DSAI_Team_6_Final_Presentation.pptx
+++ b/Slides/DSAI_Team_6_Final_Presentation.pptx
@@ -274,7 +274,7 @@
       </p15:sldGuideLst>
     </p:ext>
     <p:ext uri="GoogleSlidesCustomDataVersion2">
-      <go:slidesCustomData xmlns:go="http://customooxmlschemas.google.com/" r:id="rId24" roundtripDataSignature="AMtx7mi1GqU57ZUPNQsQgVLRz0cYYw+g3w=="/>
+      <go:slidesCustomData xmlns:go="http://customooxmlschemas.google.com/" r:id="rId24" roundtripDataSignature="AMtx7mjuVvWHhJWY24NiPco3IKlAg1n+Eg=="/>
     </p:ext>
   </p:extLst>
 </p:presentation>
@@ -810,7 +810,7 @@
   <p:cSld>
     <p:spTree>
       <p:nvGrpSpPr>
-        <p:cNvPr id="334" name="Shape 334"/>
+        <p:cNvPr id="336" name="Shape 336"/>
         <p:cNvGrpSpPr/>
         <p:nvPr/>
       </p:nvGrpSpPr>
@@ -824,7 +824,7 @@
       </p:grpSpPr>
       <p:sp>
         <p:nvSpPr>
-          <p:cNvPr id="335" name="Google Shape;335;p10:notes"/>
+          <p:cNvPr id="337" name="Google Shape;337;p10:notes"/>
           <p:cNvSpPr txBox="1"/>
           <p:nvPr>
             <p:ph idx="1" type="body"/>
@@ -863,7 +863,7 @@
       </p:sp>
       <p:sp>
         <p:nvSpPr>
-          <p:cNvPr id="336" name="Google Shape;336;p10:notes"/>
+          <p:cNvPr id="338" name="Google Shape;338;p10:notes"/>
           <p:cNvSpPr/>
           <p:nvPr>
             <p:ph idx="2" type="sldImg"/>
@@ -909,7 +909,7 @@
   <p:cSld>
     <p:spTree>
       <p:nvGrpSpPr>
-        <p:cNvPr id="344" name="Shape 344"/>
+        <p:cNvPr id="346" name="Shape 346"/>
         <p:cNvGrpSpPr/>
         <p:nvPr/>
       </p:nvGrpSpPr>
@@ -923,7 +923,7 @@
       </p:grpSpPr>
       <p:sp>
         <p:nvSpPr>
-          <p:cNvPr id="345" name="Google Shape;345;p11:notes"/>
+          <p:cNvPr id="347" name="Google Shape;347;p11:notes"/>
           <p:cNvSpPr txBox="1"/>
           <p:nvPr>
             <p:ph idx="1" type="body"/>
@@ -962,7 +962,7 @@
       </p:sp>
       <p:sp>
         <p:nvSpPr>
-          <p:cNvPr id="346" name="Google Shape;346;p11:notes"/>
+          <p:cNvPr id="348" name="Google Shape;348;p11:notes"/>
           <p:cNvSpPr/>
           <p:nvPr>
             <p:ph idx="2" type="sldImg"/>
@@ -1008,7 +1008,7 @@
   <p:cSld>
     <p:spTree>
       <p:nvGrpSpPr>
-        <p:cNvPr id="366" name="Shape 366"/>
+        <p:cNvPr id="368" name="Shape 368"/>
         <p:cNvGrpSpPr/>
         <p:nvPr/>
       </p:nvGrpSpPr>
@@ -1022,7 +1022,7 @@
       </p:grpSpPr>
       <p:sp>
         <p:nvSpPr>
-          <p:cNvPr id="367" name="Google Shape;367;p12:notes"/>
+          <p:cNvPr id="369" name="Google Shape;369;p12:notes"/>
           <p:cNvSpPr txBox="1"/>
           <p:nvPr>
             <p:ph idx="1" type="body"/>
@@ -1061,7 +1061,7 @@
       </p:sp>
       <p:sp>
         <p:nvSpPr>
-          <p:cNvPr id="368" name="Google Shape;368;p12:notes"/>
+          <p:cNvPr id="370" name="Google Shape;370;p12:notes"/>
           <p:cNvSpPr/>
           <p:nvPr>
             <p:ph idx="2" type="sldImg"/>
@@ -1107,7 +1107,7 @@
   <p:cSld>
     <p:spTree>
       <p:nvGrpSpPr>
-        <p:cNvPr id="387" name="Shape 387"/>
+        <p:cNvPr id="389" name="Shape 389"/>
         <p:cNvGrpSpPr/>
         <p:nvPr/>
       </p:nvGrpSpPr>
@@ -1121,7 +1121,7 @@
       </p:grpSpPr>
       <p:sp>
         <p:nvSpPr>
-          <p:cNvPr id="388" name="Google Shape;388;p13:notes"/>
+          <p:cNvPr id="390" name="Google Shape;390;p13:notes"/>
           <p:cNvSpPr txBox="1"/>
           <p:nvPr>
             <p:ph idx="1" type="body"/>
@@ -1160,7 +1160,7 @@
       </p:sp>
       <p:sp>
         <p:nvSpPr>
-          <p:cNvPr id="389" name="Google Shape;389;p13:notes"/>
+          <p:cNvPr id="391" name="Google Shape;391;p13:notes"/>
           <p:cNvSpPr/>
           <p:nvPr>
             <p:ph idx="2" type="sldImg"/>
@@ -1206,7 +1206,7 @@
   <p:cSld>
     <p:spTree>
       <p:nvGrpSpPr>
-        <p:cNvPr id="417" name="Shape 417"/>
+        <p:cNvPr id="419" name="Shape 419"/>
         <p:cNvGrpSpPr/>
         <p:nvPr/>
       </p:nvGrpSpPr>
@@ -1220,7 +1220,7 @@
       </p:grpSpPr>
       <p:sp>
         <p:nvSpPr>
-          <p:cNvPr id="418" name="Google Shape;418;p14:notes"/>
+          <p:cNvPr id="420" name="Google Shape;420;p14:notes"/>
           <p:cNvSpPr txBox="1"/>
           <p:nvPr>
             <p:ph idx="1" type="body"/>
@@ -1259,7 +1259,7 @@
       </p:sp>
       <p:sp>
         <p:nvSpPr>
-          <p:cNvPr id="419" name="Google Shape;419;p14:notes"/>
+          <p:cNvPr id="421" name="Google Shape;421;p14:notes"/>
           <p:cNvSpPr/>
           <p:nvPr>
             <p:ph idx="2" type="sldImg"/>
@@ -1305,7 +1305,7 @@
   <p:cSld>
     <p:spTree>
       <p:nvGrpSpPr>
-        <p:cNvPr id="439" name="Shape 439"/>
+        <p:cNvPr id="441" name="Shape 441"/>
         <p:cNvGrpSpPr/>
         <p:nvPr/>
       </p:nvGrpSpPr>
@@ -1319,7 +1319,7 @@
       </p:grpSpPr>
       <p:sp>
         <p:nvSpPr>
-          <p:cNvPr id="440" name="Google Shape;440;p15:notes"/>
+          <p:cNvPr id="442" name="Google Shape;442;p15:notes"/>
           <p:cNvSpPr txBox="1"/>
           <p:nvPr>
             <p:ph idx="1" type="body"/>
@@ -1358,7 +1358,7 @@
       </p:sp>
       <p:sp>
         <p:nvSpPr>
-          <p:cNvPr id="441" name="Google Shape;441;p15:notes"/>
+          <p:cNvPr id="443" name="Google Shape;443;p15:notes"/>
           <p:cNvSpPr/>
           <p:nvPr>
             <p:ph idx="2" type="sldImg"/>
@@ -1404,7 +1404,7 @@
   <p:cSld>
     <p:spTree>
       <p:nvGrpSpPr>
-        <p:cNvPr id="470" name="Shape 470"/>
+        <p:cNvPr id="472" name="Shape 472"/>
         <p:cNvGrpSpPr/>
         <p:nvPr/>
       </p:nvGrpSpPr>
@@ -1418,7 +1418,7 @@
       </p:grpSpPr>
       <p:sp>
         <p:nvSpPr>
-          <p:cNvPr id="471" name="Google Shape;471;p16:notes"/>
+          <p:cNvPr id="473" name="Google Shape;473;p16:notes"/>
           <p:cNvSpPr txBox="1"/>
           <p:nvPr>
             <p:ph idx="1" type="body"/>
@@ -1457,7 +1457,7 @@
       </p:sp>
       <p:sp>
         <p:nvSpPr>
-          <p:cNvPr id="472" name="Google Shape;472;p16:notes"/>
+          <p:cNvPr id="474" name="Google Shape;474;p16:notes"/>
           <p:cNvSpPr/>
           <p:nvPr>
             <p:ph idx="2" type="sldImg"/>
@@ -1503,7 +1503,7 @@
   <p:cSld>
     <p:spTree>
       <p:nvGrpSpPr>
-        <p:cNvPr id="515" name="Shape 515"/>
+        <p:cNvPr id="517" name="Shape 517"/>
         <p:cNvGrpSpPr/>
         <p:nvPr/>
       </p:nvGrpSpPr>
@@ -1517,7 +1517,7 @@
       </p:grpSpPr>
       <p:sp>
         <p:nvSpPr>
-          <p:cNvPr id="516" name="Google Shape;516;p17:notes"/>
+          <p:cNvPr id="518" name="Google Shape;518;p17:notes"/>
           <p:cNvSpPr txBox="1"/>
           <p:nvPr>
             <p:ph idx="1" type="body"/>
@@ -1556,7 +1556,7 @@
       </p:sp>
       <p:sp>
         <p:nvSpPr>
-          <p:cNvPr id="517" name="Google Shape;517;p17:notes"/>
+          <p:cNvPr id="519" name="Google Shape;519;p17:notes"/>
           <p:cNvSpPr/>
           <p:nvPr>
             <p:ph idx="2" type="sldImg"/>
@@ -1602,7 +1602,7 @@
   <p:cSld>
     <p:spTree>
       <p:nvGrpSpPr>
-        <p:cNvPr id="536" name="Shape 536"/>
+        <p:cNvPr id="538" name="Shape 538"/>
         <p:cNvGrpSpPr/>
         <p:nvPr/>
       </p:nvGrpSpPr>
@@ -1616,7 +1616,7 @@
       </p:grpSpPr>
       <p:sp>
         <p:nvSpPr>
-          <p:cNvPr id="537" name="Google Shape;537;p18:notes"/>
+          <p:cNvPr id="539" name="Google Shape;539;p18:notes"/>
           <p:cNvSpPr txBox="1"/>
           <p:nvPr>
             <p:ph idx="1" type="body"/>
@@ -1655,7 +1655,7 @@
       </p:sp>
       <p:sp>
         <p:nvSpPr>
-          <p:cNvPr id="538" name="Google Shape;538;p18:notes"/>
+          <p:cNvPr id="540" name="Google Shape;540;p18:notes"/>
           <p:cNvSpPr/>
           <p:nvPr>
             <p:ph idx="2" type="sldImg"/>
@@ -1701,7 +1701,7 @@
   <p:cSld>
     <p:spTree>
       <p:nvGrpSpPr>
-        <p:cNvPr id="92" name="Shape 92"/>
+        <p:cNvPr id="93" name="Shape 93"/>
         <p:cNvGrpSpPr/>
         <p:nvPr/>
       </p:nvGrpSpPr>
@@ -1715,7 +1715,7 @@
       </p:grpSpPr>
       <p:sp>
         <p:nvSpPr>
-          <p:cNvPr id="93" name="Google Shape;93;p2:notes"/>
+          <p:cNvPr id="94" name="Google Shape;94;p2:notes"/>
           <p:cNvSpPr txBox="1"/>
           <p:nvPr>
             <p:ph idx="1" type="body"/>
@@ -1754,7 +1754,7 @@
       </p:sp>
       <p:sp>
         <p:nvSpPr>
-          <p:cNvPr id="94" name="Google Shape;94;p2:notes"/>
+          <p:cNvPr id="95" name="Google Shape;95;p2:notes"/>
           <p:cNvSpPr/>
           <p:nvPr>
             <p:ph idx="2" type="sldImg"/>
@@ -1800,7 +1800,7 @@
   <p:cSld>
     <p:spTree>
       <p:nvGrpSpPr>
-        <p:cNvPr id="124" name="Shape 124"/>
+        <p:cNvPr id="126" name="Shape 126"/>
         <p:cNvGrpSpPr/>
         <p:nvPr/>
       </p:nvGrpSpPr>
@@ -1814,7 +1814,7 @@
       </p:grpSpPr>
       <p:sp>
         <p:nvSpPr>
-          <p:cNvPr id="125" name="Google Shape;125;p3:notes"/>
+          <p:cNvPr id="127" name="Google Shape;127;p3:notes"/>
           <p:cNvSpPr txBox="1"/>
           <p:nvPr>
             <p:ph idx="1" type="body"/>
@@ -1853,7 +1853,7 @@
       </p:sp>
       <p:sp>
         <p:nvSpPr>
-          <p:cNvPr id="126" name="Google Shape;126;p3:notes"/>
+          <p:cNvPr id="128" name="Google Shape;128;p3:notes"/>
           <p:cNvSpPr/>
           <p:nvPr>
             <p:ph idx="2" type="sldImg"/>
@@ -1899,7 +1899,7 @@
   <p:cSld>
     <p:spTree>
       <p:nvGrpSpPr>
-        <p:cNvPr id="175" name="Shape 175"/>
+        <p:cNvPr id="177" name="Shape 177"/>
         <p:cNvGrpSpPr/>
         <p:nvPr/>
       </p:nvGrpSpPr>
@@ -1913,7 +1913,7 @@
       </p:grpSpPr>
       <p:sp>
         <p:nvSpPr>
-          <p:cNvPr id="176" name="Google Shape;176;p4:notes"/>
+          <p:cNvPr id="178" name="Google Shape;178;p4:notes"/>
           <p:cNvSpPr txBox="1"/>
           <p:nvPr>
             <p:ph idx="1" type="body"/>
@@ -1952,7 +1952,7 @@
       </p:sp>
       <p:sp>
         <p:nvSpPr>
-          <p:cNvPr id="177" name="Google Shape;177;p4:notes"/>
+          <p:cNvPr id="179" name="Google Shape;179;p4:notes"/>
           <p:cNvSpPr/>
           <p:nvPr>
             <p:ph idx="2" type="sldImg"/>
@@ -1998,7 +1998,7 @@
   <p:cSld>
     <p:spTree>
       <p:nvGrpSpPr>
-        <p:cNvPr id="201" name="Shape 201"/>
+        <p:cNvPr id="203" name="Shape 203"/>
         <p:cNvGrpSpPr/>
         <p:nvPr/>
       </p:nvGrpSpPr>
@@ -2012,7 +2012,7 @@
       </p:grpSpPr>
       <p:sp>
         <p:nvSpPr>
-          <p:cNvPr id="202" name="Google Shape;202;p5:notes"/>
+          <p:cNvPr id="204" name="Google Shape;204;p5:notes"/>
           <p:cNvSpPr txBox="1"/>
           <p:nvPr>
             <p:ph idx="1" type="body"/>
@@ -2051,7 +2051,7 @@
       </p:sp>
       <p:sp>
         <p:nvSpPr>
-          <p:cNvPr id="203" name="Google Shape;203;p5:notes"/>
+          <p:cNvPr id="205" name="Google Shape;205;p5:notes"/>
           <p:cNvSpPr/>
           <p:nvPr>
             <p:ph idx="2" type="sldImg"/>
@@ -2097,7 +2097,7 @@
   <p:cSld>
     <p:spTree>
       <p:nvGrpSpPr>
-        <p:cNvPr id="230" name="Shape 230"/>
+        <p:cNvPr id="232" name="Shape 232"/>
         <p:cNvGrpSpPr/>
         <p:nvPr/>
       </p:nvGrpSpPr>
@@ -2111,7 +2111,7 @@
       </p:grpSpPr>
       <p:sp>
         <p:nvSpPr>
-          <p:cNvPr id="231" name="Google Shape;231;p6:notes"/>
+          <p:cNvPr id="233" name="Google Shape;233;p6:notes"/>
           <p:cNvSpPr txBox="1"/>
           <p:nvPr>
             <p:ph idx="1" type="body"/>
@@ -2150,7 +2150,7 @@
       </p:sp>
       <p:sp>
         <p:nvSpPr>
-          <p:cNvPr id="232" name="Google Shape;232;p6:notes"/>
+          <p:cNvPr id="234" name="Google Shape;234;p6:notes"/>
           <p:cNvSpPr/>
           <p:nvPr>
             <p:ph idx="2" type="sldImg"/>
@@ -2196,7 +2196,7 @@
   <p:cSld>
     <p:spTree>
       <p:nvGrpSpPr>
-        <p:cNvPr id="260" name="Shape 260"/>
+        <p:cNvPr id="262" name="Shape 262"/>
         <p:cNvGrpSpPr/>
         <p:nvPr/>
       </p:nvGrpSpPr>
@@ -2210,7 +2210,7 @@
       </p:grpSpPr>
       <p:sp>
         <p:nvSpPr>
-          <p:cNvPr id="261" name="Google Shape;261;p7:notes"/>
+          <p:cNvPr id="263" name="Google Shape;263;p7:notes"/>
           <p:cNvSpPr txBox="1"/>
           <p:nvPr>
             <p:ph idx="1" type="body"/>
@@ -2249,7 +2249,7 @@
       </p:sp>
       <p:sp>
         <p:nvSpPr>
-          <p:cNvPr id="262" name="Google Shape;262;p7:notes"/>
+          <p:cNvPr id="264" name="Google Shape;264;p7:notes"/>
           <p:cNvSpPr/>
           <p:nvPr>
             <p:ph idx="2" type="sldImg"/>
@@ -2295,7 +2295,7 @@
   <p:cSld>
     <p:spTree>
       <p:nvGrpSpPr>
-        <p:cNvPr id="281" name="Shape 281"/>
+        <p:cNvPr id="283" name="Shape 283"/>
         <p:cNvGrpSpPr/>
         <p:nvPr/>
       </p:nvGrpSpPr>
@@ -2309,7 +2309,7 @@
       </p:grpSpPr>
       <p:sp>
         <p:nvSpPr>
-          <p:cNvPr id="282" name="Google Shape;282;p8:notes"/>
+          <p:cNvPr id="284" name="Google Shape;284;p8:notes"/>
           <p:cNvSpPr txBox="1"/>
           <p:nvPr>
             <p:ph idx="1" type="body"/>
@@ -2348,7 +2348,7 @@
       </p:sp>
       <p:sp>
         <p:nvSpPr>
-          <p:cNvPr id="283" name="Google Shape;283;p8:notes"/>
+          <p:cNvPr id="285" name="Google Shape;285;p8:notes"/>
           <p:cNvSpPr/>
           <p:nvPr>
             <p:ph idx="2" type="sldImg"/>
@@ -2394,7 +2394,7 @@
   <p:cSld>
     <p:spTree>
       <p:nvGrpSpPr>
-        <p:cNvPr id="313" name="Shape 313"/>
+        <p:cNvPr id="315" name="Shape 315"/>
         <p:cNvGrpSpPr/>
         <p:nvPr/>
       </p:nvGrpSpPr>
@@ -2408,7 +2408,7 @@
       </p:grpSpPr>
       <p:sp>
         <p:nvSpPr>
-          <p:cNvPr id="314" name="Google Shape;314;p9:notes"/>
+          <p:cNvPr id="316" name="Google Shape;316;p9:notes"/>
           <p:cNvSpPr txBox="1"/>
           <p:nvPr>
             <p:ph idx="1" type="body"/>
@@ -2447,7 +2447,7 @@
       </p:sp>
       <p:sp>
         <p:nvSpPr>
-          <p:cNvPr id="315" name="Google Shape;315;p9:notes"/>
+          <p:cNvPr id="317" name="Google Shape;317;p9:notes"/>
           <p:cNvSpPr/>
           <p:nvPr>
             <p:ph idx="2" type="sldImg"/>
@@ -12677,79 +12677,212 @@
       </p:sp>
       <p:sp>
         <p:nvSpPr>
-          <p:cNvPr id="92" name="TextBox 91"/>
-          <p:cNvSpPr txBox="1"/>
-          <p:nvPr/>
-        </p:nvSpPr>
-        <p:spPr>
-          <a:xfrm>
-            <a:off x="5029200" y="5257800"/>
-            <a:ext cx="7022592" cy="1417320"/>
+          <p:cNvPr id="92" name="Google Shape;92;p1"/>
+          <p:cNvSpPr/>
+          <p:nvPr/>
+        </p:nvSpPr>
+        <p:spPr>
+          <a:xfrm>
+            <a:off x="408600" y="4326840"/>
+            <a:ext cx="6400500" cy="928200"/>
           </a:xfrm>
           <a:prstGeom prst="rect">
             <a:avLst/>
           </a:prstGeom>
           <a:noFill/>
-        </p:spPr>
-        <p:txBody>
-          <a:bodyPr wrap="none">
-            <a:spAutoFit/>
-          </a:bodyPr>
-          <a:lstStyle/>
-          <a:p>
-            <a:pPr algn="l"/>
-            <a:r>
-              <a:rPr sz="1100" b="0">
+          <a:ln>
+            <a:noFill/>
+          </a:ln>
+        </p:spPr>
+        <p:txBody>
+          <a:bodyPr anchorCtr="0" anchor="t" bIns="45700" lIns="91425" spcFirstLastPara="1" rIns="91425" wrap="square" tIns="45700">
+            <a:noAutofit/>
+          </a:bodyPr>
+          <a:lstStyle/>
+          <a:p>
+            <a:pPr indent="0" lvl="0" marL="0" marR="0" rtl="0" algn="l">
+              <a:lnSpc>
+                <a:spcPct val="100000"/>
+              </a:lnSpc>
+              <a:spcBef>
+                <a:spcPts val="0"/>
+              </a:spcBef>
+              <a:spcAft>
+                <a:spcPts val="0"/>
+              </a:spcAft>
+              <a:buClr>
+                <a:srgbClr val="CADCFC"/>
+              </a:buClr>
+              <a:buSzPts val="1100"/>
+              <a:buFont typeface="Arial"/>
+              <a:buNone/>
+            </a:pPr>
+            <a:r>
+              <a:rPr lang="en-US" sz="1100" strike="noStrike">
                 <a:solidFill>
-                  <a:srgbClr val="707070"/>
+                  <a:srgbClr val="CADCFC"/>
                 </a:solidFill>
+                <a:latin typeface="Calibri"/>
+                <a:ea typeface="Calibri"/>
+                <a:cs typeface="Calibri"/>
+                <a:sym typeface="Calibri"/>
               </a:rPr>
               <a:t>Akbar Ali — 23f1002997</a:t>
             </a:r>
-          </a:p>
-          <a:p>
-            <a:pPr algn="l"/>
-            <a:r>
-              <a:rPr sz="1100" b="0">
+            <a:endParaRPr sz="1100" strike="noStrike">
+              <a:latin typeface="Calibri"/>
+              <a:ea typeface="Calibri"/>
+              <a:cs typeface="Calibri"/>
+              <a:sym typeface="Calibri"/>
+            </a:endParaRPr>
+          </a:p>
+          <a:p>
+            <a:pPr indent="0" lvl="0" marL="0" marR="0" rtl="0" algn="l">
+              <a:lnSpc>
+                <a:spcPct val="100000"/>
+              </a:lnSpc>
+              <a:spcBef>
+                <a:spcPts val="0"/>
+              </a:spcBef>
+              <a:spcAft>
+                <a:spcPts val="0"/>
+              </a:spcAft>
+              <a:buClr>
+                <a:srgbClr val="CADCFC"/>
+              </a:buClr>
+              <a:buSzPts val="1100"/>
+              <a:buFont typeface="Arial"/>
+              <a:buNone/>
+            </a:pPr>
+            <a:r>
+              <a:rPr lang="en-US" sz="1100" strike="noStrike">
                 <a:solidFill>
-                  <a:srgbClr val="707070"/>
+                  <a:srgbClr val="CADCFC"/>
                 </a:solidFill>
+                <a:latin typeface="Calibri"/>
+                <a:ea typeface="Calibri"/>
+                <a:cs typeface="Calibri"/>
+                <a:sym typeface="Calibri"/>
               </a:rPr>
               <a:t>Gurram Sai Sri Ram Hruthik — 22f3001648</a:t>
             </a:r>
-          </a:p>
-          <a:p>
-            <a:pPr algn="l"/>
-            <a:r>
-              <a:rPr sz="1100" b="0">
+            <a:endParaRPr sz="1100" strike="noStrike">
+              <a:latin typeface="Calibri"/>
+              <a:ea typeface="Calibri"/>
+              <a:cs typeface="Calibri"/>
+              <a:sym typeface="Calibri"/>
+            </a:endParaRPr>
+          </a:p>
+          <a:p>
+            <a:pPr indent="0" lvl="0" marL="0" marR="0" rtl="0" algn="l">
+              <a:lnSpc>
+                <a:spcPct val="100000"/>
+              </a:lnSpc>
+              <a:spcBef>
+                <a:spcPts val="0"/>
+              </a:spcBef>
+              <a:spcAft>
+                <a:spcPts val="0"/>
+              </a:spcAft>
+              <a:buClr>
+                <a:srgbClr val="CADCFC"/>
+              </a:buClr>
+              <a:buSzPts val="1100"/>
+              <a:buFont typeface="Arial"/>
+              <a:buNone/>
+            </a:pPr>
+            <a:r>
+              <a:rPr lang="en-US" sz="1100" strike="noStrike">
                 <a:solidFill>
-                  <a:srgbClr val="707070"/>
+                  <a:srgbClr val="CADCFC"/>
                 </a:solidFill>
+                <a:latin typeface="Calibri"/>
+                <a:ea typeface="Calibri"/>
+                <a:cs typeface="Calibri"/>
+                <a:sym typeface="Calibri"/>
               </a:rPr>
               <a:t>NandanReddy Parnapalli — 22f3002857</a:t>
             </a:r>
-          </a:p>
-          <a:p>
-            <a:pPr algn="l"/>
-            <a:r>
-              <a:rPr sz="1100" b="0">
+            <a:endParaRPr sz="1100" strike="noStrike">
+              <a:latin typeface="Calibri"/>
+              <a:ea typeface="Calibri"/>
+              <a:cs typeface="Calibri"/>
+              <a:sym typeface="Calibri"/>
+            </a:endParaRPr>
+          </a:p>
+          <a:p>
+            <a:pPr indent="0" lvl="0" marL="0" marR="0" rtl="0" algn="l">
+              <a:lnSpc>
+                <a:spcPct val="100000"/>
+              </a:lnSpc>
+              <a:spcBef>
+                <a:spcPts val="0"/>
+              </a:spcBef>
+              <a:spcAft>
+                <a:spcPts val="0"/>
+              </a:spcAft>
+              <a:buClr>
+                <a:srgbClr val="CADCFC"/>
+              </a:buClr>
+              <a:buSzPts val="1100"/>
+              <a:buFont typeface="Arial"/>
+              <a:buNone/>
+            </a:pPr>
+            <a:r>
+              <a:rPr lang="en-US" sz="1100" strike="noStrike">
                 <a:solidFill>
-                  <a:srgbClr val="707070"/>
+                  <a:srgbClr val="CADCFC"/>
                 </a:solidFill>
+                <a:latin typeface="Calibri"/>
+                <a:ea typeface="Calibri"/>
+                <a:cs typeface="Calibri"/>
+                <a:sym typeface="Calibri"/>
               </a:rPr>
               <a:t>Shubham Gattani — 21f3002082</a:t>
             </a:r>
-          </a:p>
-          <a:p>
-            <a:pPr algn="l"/>
-            <a:r>
-              <a:rPr sz="1100" b="0">
+            <a:endParaRPr sz="1100" strike="noStrike">
+              <a:latin typeface="Calibri"/>
+              <a:ea typeface="Calibri"/>
+              <a:cs typeface="Calibri"/>
+              <a:sym typeface="Calibri"/>
+            </a:endParaRPr>
+          </a:p>
+          <a:p>
+            <a:pPr indent="0" lvl="0" marL="0" marR="0" rtl="0" algn="l">
+              <a:lnSpc>
+                <a:spcPct val="100000"/>
+              </a:lnSpc>
+              <a:spcBef>
+                <a:spcPts val="0"/>
+              </a:spcBef>
+              <a:spcAft>
+                <a:spcPts val="0"/>
+              </a:spcAft>
+              <a:buClr>
+                <a:srgbClr val="CADCFC"/>
+              </a:buClr>
+              <a:buSzPts val="1100"/>
+              <a:buFont typeface="Arial"/>
+              <a:buNone/>
+            </a:pPr>
+            <a:r>
+              <a:rPr lang="en-US" sz="1100" strike="noStrike">
                 <a:solidFill>
-                  <a:srgbClr val="707070"/>
+                  <a:srgbClr val="CADCFC"/>
                 </a:solidFill>
+                <a:latin typeface="Calibri"/>
+                <a:ea typeface="Calibri"/>
+                <a:cs typeface="Calibri"/>
+                <a:sym typeface="Calibri"/>
               </a:rPr>
               <a:t>Shubhashish Biswas — 21f1001460</a:t>
             </a:r>
+            <a:endParaRPr sz="1100" strike="noStrike">
+              <a:latin typeface="Calibri"/>
+              <a:ea typeface="Calibri"/>
+              <a:cs typeface="Calibri"/>
+              <a:sym typeface="Calibri"/>
+            </a:endParaRPr>
           </a:p>
         </p:txBody>
       </p:sp>
@@ -12766,7 +12899,7 @@
   <p:cSld>
     <p:spTree>
       <p:nvGrpSpPr>
-        <p:cNvPr id="337" name="Shape 337"/>
+        <p:cNvPr id="339" name="Shape 339"/>
         <p:cNvGrpSpPr/>
         <p:nvPr/>
       </p:nvGrpSpPr>
@@ -12780,7 +12913,7 @@
       </p:grpSpPr>
       <p:sp>
         <p:nvSpPr>
-          <p:cNvPr id="338" name="Google Shape;338;p10"/>
+          <p:cNvPr id="340" name="Google Shape;340;p10"/>
           <p:cNvSpPr/>
           <p:nvPr/>
         </p:nvSpPr>
@@ -12844,7 +12977,7 @@
       </p:sp>
       <p:sp>
         <p:nvSpPr>
-          <p:cNvPr id="339" name="Google Shape;339;p10"/>
+          <p:cNvPr id="341" name="Google Shape;341;p10"/>
           <p:cNvSpPr/>
           <p:nvPr/>
         </p:nvSpPr>
@@ -12908,7 +13041,7 @@
       </p:sp>
       <p:sp>
         <p:nvSpPr>
-          <p:cNvPr id="340" name="Google Shape;340;p10"/>
+          <p:cNvPr id="342" name="Google Shape;342;p10"/>
           <p:cNvSpPr txBox="1"/>
           <p:nvPr/>
         </p:nvSpPr>
@@ -12958,7 +13091,7 @@
       </p:sp>
       <p:sp>
         <p:nvSpPr>
-          <p:cNvPr id="341" name="Google Shape;341;p10"/>
+          <p:cNvPr id="343" name="Google Shape;343;p10"/>
           <p:cNvSpPr txBox="1"/>
           <p:nvPr/>
         </p:nvSpPr>
@@ -13008,7 +13141,7 @@
       </p:sp>
       <p:sp>
         <p:nvSpPr>
-          <p:cNvPr id="342" name="Google Shape;342;p10"/>
+          <p:cNvPr id="344" name="Google Shape;344;p10"/>
           <p:cNvSpPr txBox="1"/>
           <p:nvPr/>
         </p:nvSpPr>
@@ -13058,7 +13191,7 @@
       </p:sp>
       <p:pic>
         <p:nvPicPr>
-          <p:cNvPr descr="all_experiments.png" id="343" name="Google Shape;343;p10"/>
+          <p:cNvPr descr="all_experiments.png" id="345" name="Google Shape;345;p10"/>
           <p:cNvPicPr preferRelativeResize="0"/>
           <p:nvPr/>
         </p:nvPicPr>
@@ -13096,7 +13229,7 @@
   <p:cSld>
     <p:spTree>
       <p:nvGrpSpPr>
-        <p:cNvPr id="347" name="Shape 347"/>
+        <p:cNvPr id="349" name="Shape 349"/>
         <p:cNvGrpSpPr/>
         <p:nvPr/>
       </p:nvGrpSpPr>
@@ -13110,7 +13243,7 @@
       </p:grpSpPr>
       <p:sp>
         <p:nvSpPr>
-          <p:cNvPr id="348" name="Google Shape;348;p11"/>
+          <p:cNvPr id="350" name="Google Shape;350;p11"/>
           <p:cNvSpPr/>
           <p:nvPr/>
         </p:nvSpPr>
@@ -13174,7 +13307,7 @@
       </p:sp>
       <p:sp>
         <p:nvSpPr>
-          <p:cNvPr id="349" name="Google Shape;349;p11"/>
+          <p:cNvPr id="351" name="Google Shape;351;p11"/>
           <p:cNvSpPr/>
           <p:nvPr/>
         </p:nvSpPr>
@@ -13238,7 +13371,7 @@
       </p:sp>
       <p:sp>
         <p:nvSpPr>
-          <p:cNvPr id="350" name="Google Shape;350;p11"/>
+          <p:cNvPr id="352" name="Google Shape;352;p11"/>
           <p:cNvSpPr txBox="1"/>
           <p:nvPr/>
         </p:nvSpPr>
@@ -13288,7 +13421,7 @@
       </p:sp>
       <p:sp>
         <p:nvSpPr>
-          <p:cNvPr id="351" name="Google Shape;351;p11"/>
+          <p:cNvPr id="353" name="Google Shape;353;p11"/>
           <p:cNvSpPr txBox="1"/>
           <p:nvPr/>
         </p:nvSpPr>
@@ -13338,7 +13471,7 @@
       </p:sp>
       <p:sp>
         <p:nvSpPr>
-          <p:cNvPr id="352" name="Google Shape;352;p11"/>
+          <p:cNvPr id="354" name="Google Shape;354;p11"/>
           <p:cNvSpPr txBox="1"/>
           <p:nvPr/>
         </p:nvSpPr>
@@ -13386,36 +13519,9 @@
           </a:p>
         </p:txBody>
       </p:sp>
-      <p:pic>
-        <p:nvPicPr>
-          <p:cNvPr descr="category.png" id="353" name="Google Shape;353;p11"/>
-          <p:cNvPicPr preferRelativeResize="0"/>
-          <p:nvPr/>
-        </p:nvPicPr>
-        <p:blipFill rotWithShape="1">
-          <a:blip r:embed="rId3">
-            <a:alphaModFix/>
-          </a:blip>
-          <a:srcRect b="0" l="0" r="0" t="0"/>
-          <a:stretch/>
-        </p:blipFill>
-        <p:spPr>
-          <a:xfrm>
-            <a:off x="822960" y="1143000"/>
-            <a:ext cx="10543032" cy="3931920"/>
-          </a:xfrm>
-          <a:prstGeom prst="rect">
-            <a:avLst/>
-          </a:prstGeom>
-          <a:noFill/>
-          <a:ln>
-            <a:noFill/>
-          </a:ln>
-        </p:spPr>
-      </p:pic>
-      <p:sp>
-        <p:nvSpPr>
-          <p:cNvPr id="354" name="Google Shape;354;p11"/>
+      <p:sp>
+        <p:nvSpPr>
+          <p:cNvPr id="356" name="Google Shape;356;p11"/>
           <p:cNvSpPr/>
           <p:nvPr/>
         </p:nvSpPr>
@@ -13479,7 +13585,7 @@
       </p:sp>
       <p:sp>
         <p:nvSpPr>
-          <p:cNvPr id="355" name="Google Shape;355;p11"/>
+          <p:cNvPr id="357" name="Google Shape;357;p11"/>
           <p:cNvSpPr/>
           <p:nvPr/>
         </p:nvSpPr>
@@ -13543,7 +13649,7 @@
       </p:sp>
       <p:sp>
         <p:nvSpPr>
-          <p:cNvPr id="356" name="Google Shape;356;p11"/>
+          <p:cNvPr id="358" name="Google Shape;358;p11"/>
           <p:cNvSpPr txBox="1"/>
           <p:nvPr/>
         </p:nvSpPr>
@@ -13593,7 +13699,7 @@
       </p:sp>
       <p:sp>
         <p:nvSpPr>
-          <p:cNvPr id="357" name="Google Shape;357;p11"/>
+          <p:cNvPr id="359" name="Google Shape;359;p11"/>
           <p:cNvSpPr txBox="1"/>
           <p:nvPr/>
         </p:nvSpPr>
@@ -13667,7 +13773,7 @@
       </p:sp>
       <p:sp>
         <p:nvSpPr>
-          <p:cNvPr id="358" name="Google Shape;358;p11"/>
+          <p:cNvPr id="360" name="Google Shape;360;p11"/>
           <p:cNvSpPr/>
           <p:nvPr/>
         </p:nvSpPr>
@@ -13731,7 +13837,7 @@
       </p:sp>
       <p:sp>
         <p:nvSpPr>
-          <p:cNvPr id="359" name="Google Shape;359;p11"/>
+          <p:cNvPr id="361" name="Google Shape;361;p11"/>
           <p:cNvSpPr/>
           <p:nvPr/>
         </p:nvSpPr>
@@ -13795,7 +13901,7 @@
       </p:sp>
       <p:sp>
         <p:nvSpPr>
-          <p:cNvPr id="360" name="Google Shape;360;p11"/>
+          <p:cNvPr id="362" name="Google Shape;362;p11"/>
           <p:cNvSpPr txBox="1"/>
           <p:nvPr/>
         </p:nvSpPr>
@@ -13845,7 +13951,7 @@
       </p:sp>
       <p:sp>
         <p:nvSpPr>
-          <p:cNvPr id="361" name="Google Shape;361;p11"/>
+          <p:cNvPr id="363" name="Google Shape;363;p11"/>
           <p:cNvSpPr txBox="1"/>
           <p:nvPr/>
         </p:nvSpPr>
@@ -13919,7 +14025,7 @@
       </p:sp>
       <p:sp>
         <p:nvSpPr>
-          <p:cNvPr id="362" name="Google Shape;362;p11"/>
+          <p:cNvPr id="364" name="Google Shape;364;p11"/>
           <p:cNvSpPr/>
           <p:nvPr/>
         </p:nvSpPr>
@@ -13983,7 +14089,7 @@
       </p:sp>
       <p:sp>
         <p:nvSpPr>
-          <p:cNvPr id="363" name="Google Shape;363;p11"/>
+          <p:cNvPr id="365" name="Google Shape;365;p11"/>
           <p:cNvSpPr/>
           <p:nvPr/>
         </p:nvSpPr>
@@ -14047,7 +14153,7 @@
       </p:sp>
       <p:sp>
         <p:nvSpPr>
-          <p:cNvPr id="364" name="Google Shape;364;p11"/>
+          <p:cNvPr id="366" name="Google Shape;366;p11"/>
           <p:cNvSpPr txBox="1"/>
           <p:nvPr/>
         </p:nvSpPr>
@@ -14097,7 +14203,7 @@
       </p:sp>
       <p:sp>
         <p:nvSpPr>
-          <p:cNvPr id="365" name="Google Shape;365;p11"/>
+          <p:cNvPr id="367" name="Google Shape;367;p11"/>
           <p:cNvSpPr txBox="1"/>
           <p:nvPr/>
         </p:nvSpPr>
@@ -14169,6 +14275,30 @@
           </a:p>
         </p:txBody>
       </p:sp>
+      <p:pic>
+        <p:nvPicPr>
+          <p:cNvPr id="368" name="Picture 367" descr="category_fixed.png"/>
+          <p:cNvPicPr>
+            <a:picLocks noChangeAspect="1"/>
+          </p:cNvPicPr>
+          <p:nvPr/>
+        </p:nvPicPr>
+        <p:blipFill>
+          <a:blip r:embed="rId4"/>
+          <a:stretch>
+            <a:fillRect/>
+          </a:stretch>
+        </p:blipFill>
+        <p:spPr>
+          <a:xfrm>
+            <a:off x="822960" y="1143000"/>
+            <a:ext cx="10543032" cy="3931920"/>
+          </a:xfrm>
+          <a:prstGeom prst="rect">
+            <a:avLst/>
+          </a:prstGeom>
+        </p:spPr>
+      </p:pic>
     </p:spTree>
   </p:cSld>
   <p:clrMapOvr>
@@ -14182,7 +14312,7 @@
   <p:cSld>
     <p:spTree>
       <p:nvGrpSpPr>
-        <p:cNvPr id="369" name="Shape 369"/>
+        <p:cNvPr id="371" name="Shape 371"/>
         <p:cNvGrpSpPr/>
         <p:nvPr/>
       </p:nvGrpSpPr>
@@ -14196,7 +14326,7 @@
       </p:grpSpPr>
       <p:sp>
         <p:nvSpPr>
-          <p:cNvPr id="370" name="Google Shape;370;p12"/>
+          <p:cNvPr id="372" name="Google Shape;372;p12"/>
           <p:cNvSpPr/>
           <p:nvPr/>
         </p:nvSpPr>
@@ -14260,7 +14390,7 @@
       </p:sp>
       <p:sp>
         <p:nvSpPr>
-          <p:cNvPr id="371" name="Google Shape;371;p12"/>
+          <p:cNvPr id="373" name="Google Shape;373;p12"/>
           <p:cNvSpPr/>
           <p:nvPr/>
         </p:nvSpPr>
@@ -14324,7 +14454,7 @@
       </p:sp>
       <p:sp>
         <p:nvSpPr>
-          <p:cNvPr id="372" name="Google Shape;372;p12"/>
+          <p:cNvPr id="374" name="Google Shape;374;p12"/>
           <p:cNvSpPr txBox="1"/>
           <p:nvPr/>
         </p:nvSpPr>
@@ -14374,7 +14504,7 @@
       </p:sp>
       <p:sp>
         <p:nvSpPr>
-          <p:cNvPr id="373" name="Google Shape;373;p12"/>
+          <p:cNvPr id="375" name="Google Shape;375;p12"/>
           <p:cNvSpPr txBox="1"/>
           <p:nvPr/>
         </p:nvSpPr>
@@ -14424,7 +14554,7 @@
       </p:sp>
       <p:sp>
         <p:nvSpPr>
-          <p:cNvPr id="374" name="Google Shape;374;p12"/>
+          <p:cNvPr id="376" name="Google Shape;376;p12"/>
           <p:cNvSpPr txBox="1"/>
           <p:nvPr/>
         </p:nvSpPr>
@@ -14474,7 +14604,7 @@
       </p:sp>
       <p:pic>
         <p:nvPicPr>
-          <p:cNvPr descr="scatter.png" id="375" name="Google Shape;375;p12"/>
+          <p:cNvPr descr="scatter.png" id="377" name="Google Shape;377;p12"/>
           <p:cNvPicPr preferRelativeResize="0"/>
           <p:nvPr/>
         </p:nvPicPr>
@@ -14501,7 +14631,7 @@
       </p:pic>
       <p:sp>
         <p:nvSpPr>
-          <p:cNvPr id="376" name="Google Shape;376;p12"/>
+          <p:cNvPr id="378" name="Google Shape;378;p12"/>
           <p:cNvSpPr/>
           <p:nvPr/>
         </p:nvSpPr>
@@ -14565,7 +14695,7 @@
       </p:sp>
       <p:sp>
         <p:nvSpPr>
-          <p:cNvPr id="377" name="Google Shape;377;p12"/>
+          <p:cNvPr id="379" name="Google Shape;379;p12"/>
           <p:cNvSpPr/>
           <p:nvPr/>
         </p:nvSpPr>
@@ -14629,7 +14759,7 @@
       </p:sp>
       <p:sp>
         <p:nvSpPr>
-          <p:cNvPr id="378" name="Google Shape;378;p12"/>
+          <p:cNvPr id="380" name="Google Shape;380;p12"/>
           <p:cNvSpPr txBox="1"/>
           <p:nvPr/>
         </p:nvSpPr>
@@ -14679,7 +14809,7 @@
       </p:sp>
       <p:sp>
         <p:nvSpPr>
-          <p:cNvPr id="379" name="Google Shape;379;p12"/>
+          <p:cNvPr id="381" name="Google Shape;381;p12"/>
           <p:cNvSpPr txBox="1"/>
           <p:nvPr/>
         </p:nvSpPr>
@@ -14872,7 +15002,7 @@
       </p:sp>
       <p:sp>
         <p:nvSpPr>
-          <p:cNvPr id="380" name="Google Shape;380;p12"/>
+          <p:cNvPr id="382" name="Google Shape;382;p12"/>
           <p:cNvSpPr/>
           <p:nvPr/>
         </p:nvSpPr>
@@ -14936,7 +15066,7 @@
       </p:sp>
       <p:sp>
         <p:nvSpPr>
-          <p:cNvPr id="381" name="Google Shape;381;p12"/>
+          <p:cNvPr id="383" name="Google Shape;383;p12"/>
           <p:cNvSpPr/>
           <p:nvPr/>
         </p:nvSpPr>
@@ -15000,7 +15130,7 @@
       </p:sp>
       <p:sp>
         <p:nvSpPr>
-          <p:cNvPr id="382" name="Google Shape;382;p12"/>
+          <p:cNvPr id="384" name="Google Shape;384;p12"/>
           <p:cNvSpPr txBox="1"/>
           <p:nvPr/>
         </p:nvSpPr>
@@ -15050,7 +15180,7 @@
       </p:sp>
       <p:sp>
         <p:nvSpPr>
-          <p:cNvPr id="383" name="Google Shape;383;p12"/>
+          <p:cNvPr id="385" name="Google Shape;385;p12"/>
           <p:cNvSpPr txBox="1"/>
           <p:nvPr/>
         </p:nvSpPr>
@@ -15100,7 +15230,7 @@
       </p:sp>
       <p:sp>
         <p:nvSpPr>
-          <p:cNvPr id="384" name="Google Shape;384;p12"/>
+          <p:cNvPr id="386" name="Google Shape;386;p12"/>
           <p:cNvSpPr/>
           <p:nvPr/>
         </p:nvSpPr>
@@ -15164,7 +15294,7 @@
       </p:sp>
       <p:sp>
         <p:nvSpPr>
-          <p:cNvPr id="385" name="Google Shape;385;p12"/>
+          <p:cNvPr id="387" name="Google Shape;387;p12"/>
           <p:cNvSpPr/>
           <p:nvPr/>
         </p:nvSpPr>
@@ -15228,7 +15358,7 @@
       </p:sp>
       <p:sp>
         <p:nvSpPr>
-          <p:cNvPr id="386" name="Google Shape;386;p12"/>
+          <p:cNvPr id="388" name="Google Shape;388;p12"/>
           <p:cNvSpPr txBox="1"/>
           <p:nvPr/>
         </p:nvSpPr>
@@ -15289,7 +15419,7 @@
   <p:cSld>
     <p:spTree>
       <p:nvGrpSpPr>
-        <p:cNvPr id="390" name="Shape 390"/>
+        <p:cNvPr id="392" name="Shape 392"/>
         <p:cNvGrpSpPr/>
         <p:nvPr/>
       </p:nvGrpSpPr>
@@ -15303,7 +15433,7 @@
       </p:grpSpPr>
       <p:sp>
         <p:nvSpPr>
-          <p:cNvPr id="391" name="Google Shape;391;p13"/>
+          <p:cNvPr id="393" name="Google Shape;393;p13"/>
           <p:cNvSpPr/>
           <p:nvPr/>
         </p:nvSpPr>
@@ -15367,7 +15497,7 @@
       </p:sp>
       <p:sp>
         <p:nvSpPr>
-          <p:cNvPr id="392" name="Google Shape;392;p13"/>
+          <p:cNvPr id="394" name="Google Shape;394;p13"/>
           <p:cNvSpPr/>
           <p:nvPr/>
         </p:nvSpPr>
@@ -15431,7 +15561,7 @@
       </p:sp>
       <p:sp>
         <p:nvSpPr>
-          <p:cNvPr id="393" name="Google Shape;393;p13"/>
+          <p:cNvPr id="395" name="Google Shape;395;p13"/>
           <p:cNvSpPr txBox="1"/>
           <p:nvPr/>
         </p:nvSpPr>
@@ -15481,7 +15611,7 @@
       </p:sp>
       <p:sp>
         <p:nvSpPr>
-          <p:cNvPr id="394" name="Google Shape;394;p13"/>
+          <p:cNvPr id="396" name="Google Shape;396;p13"/>
           <p:cNvSpPr txBox="1"/>
           <p:nvPr/>
         </p:nvSpPr>
@@ -15531,7 +15661,7 @@
       </p:sp>
       <p:sp>
         <p:nvSpPr>
-          <p:cNvPr id="395" name="Google Shape;395;p13"/>
+          <p:cNvPr id="397" name="Google Shape;397;p13"/>
           <p:cNvSpPr txBox="1"/>
           <p:nvPr/>
         </p:nvSpPr>
@@ -15581,7 +15711,7 @@
       </p:sp>
       <p:sp>
         <p:nvSpPr>
-          <p:cNvPr id="396" name="Google Shape;396;p13"/>
+          <p:cNvPr id="398" name="Google Shape;398;p13"/>
           <p:cNvSpPr/>
           <p:nvPr/>
         </p:nvSpPr>
@@ -15645,7 +15775,7 @@
       </p:sp>
       <p:sp>
         <p:nvSpPr>
-          <p:cNvPr id="397" name="Google Shape;397;p13"/>
+          <p:cNvPr id="399" name="Google Shape;399;p13"/>
           <p:cNvSpPr txBox="1"/>
           <p:nvPr/>
         </p:nvSpPr>
@@ -15695,7 +15825,7 @@
       </p:sp>
       <p:sp>
         <p:nvSpPr>
-          <p:cNvPr id="398" name="Google Shape;398;p13"/>
+          <p:cNvPr id="400" name="Google Shape;400;p13"/>
           <p:cNvSpPr txBox="1"/>
           <p:nvPr/>
         </p:nvSpPr>
@@ -15745,7 +15875,7 @@
       </p:sp>
       <p:sp>
         <p:nvSpPr>
-          <p:cNvPr id="399" name="Google Shape;399;p13"/>
+          <p:cNvPr id="401" name="Google Shape;401;p13"/>
           <p:cNvSpPr txBox="1"/>
           <p:nvPr/>
         </p:nvSpPr>
@@ -15795,7 +15925,7 @@
       </p:sp>
       <p:sp>
         <p:nvSpPr>
-          <p:cNvPr id="400" name="Google Shape;400;p13"/>
+          <p:cNvPr id="402" name="Google Shape;402;p13"/>
           <p:cNvSpPr txBox="1"/>
           <p:nvPr/>
         </p:nvSpPr>
@@ -15845,7 +15975,7 @@
       </p:sp>
       <p:sp>
         <p:nvSpPr>
-          <p:cNvPr id="401" name="Google Shape;401;p13"/>
+          <p:cNvPr id="403" name="Google Shape;403;p13"/>
           <p:cNvSpPr/>
           <p:nvPr/>
         </p:nvSpPr>
@@ -15909,7 +16039,7 @@
       </p:sp>
       <p:sp>
         <p:nvSpPr>
-          <p:cNvPr id="402" name="Google Shape;402;p13"/>
+          <p:cNvPr id="404" name="Google Shape;404;p13"/>
           <p:cNvSpPr/>
           <p:nvPr/>
         </p:nvSpPr>
@@ -15973,7 +16103,7 @@
       </p:sp>
       <p:sp>
         <p:nvSpPr>
-          <p:cNvPr id="403" name="Google Shape;403;p13"/>
+          <p:cNvPr id="405" name="Google Shape;405;p13"/>
           <p:cNvSpPr txBox="1"/>
           <p:nvPr/>
         </p:nvSpPr>
@@ -16023,7 +16153,7 @@
       </p:sp>
       <p:sp>
         <p:nvSpPr>
-          <p:cNvPr id="404" name="Google Shape;404;p13"/>
+          <p:cNvPr id="406" name="Google Shape;406;p13"/>
           <p:cNvSpPr txBox="1"/>
           <p:nvPr/>
         </p:nvSpPr>
@@ -16073,7 +16203,7 @@
       </p:sp>
       <p:sp>
         <p:nvSpPr>
-          <p:cNvPr id="405" name="Google Shape;405;p13"/>
+          <p:cNvPr id="407" name="Google Shape;407;p13"/>
           <p:cNvSpPr/>
           <p:nvPr/>
         </p:nvSpPr>
@@ -16137,7 +16267,7 @@
       </p:sp>
       <p:sp>
         <p:nvSpPr>
-          <p:cNvPr id="406" name="Google Shape;406;p13"/>
+          <p:cNvPr id="408" name="Google Shape;408;p13"/>
           <p:cNvSpPr/>
           <p:nvPr/>
         </p:nvSpPr>
@@ -16201,14 +16331,14 @@
       </p:sp>
       <p:sp>
         <p:nvSpPr>
-          <p:cNvPr id="407" name="Google Shape;407;p13"/>
+          <p:cNvPr id="409" name="Google Shape;409;p13"/>
           <p:cNvSpPr txBox="1"/>
           <p:nvPr/>
         </p:nvSpPr>
         <p:spPr>
           <a:xfrm>
-            <a:off x="7909560" y="1335024"/>
-            <a:ext cx="3730752" cy="384048"/>
+            <a:off x="7909549" y="1335025"/>
+            <a:ext cx="3933000" cy="292500"/>
           </a:xfrm>
           <a:prstGeom prst="rect">
             <a:avLst/>
@@ -16243,7 +16373,19 @@
                 <a:cs typeface="Calibri"/>
                 <a:sym typeface="Calibri"/>
               </a:rPr>
-              <a:t>Our Solution: Fact Database</a:t>
+              <a:t>Our Solution: Fact Database / N</a:t>
+            </a:r>
+            <a:r>
+              <a:rPr b="1" lang="en-US" sz="1300">
+                <a:solidFill>
+                  <a:srgbClr val="007048"/>
+                </a:solidFill>
+                <a:latin typeface="Calibri"/>
+                <a:ea typeface="Calibri"/>
+                <a:cs typeface="Calibri"/>
+                <a:sym typeface="Calibri"/>
+              </a:rPr>
+              <a:t>umeric Fidelity Layer</a:t>
             </a:r>
             <a:endParaRPr/>
           </a:p>
@@ -16251,7 +16393,7 @@
       </p:sp>
       <p:sp>
         <p:nvSpPr>
-          <p:cNvPr id="408" name="Google Shape;408;p13"/>
+          <p:cNvPr id="410" name="Google Shape;410;p13"/>
           <p:cNvSpPr/>
           <p:nvPr/>
         </p:nvSpPr>
@@ -16315,7 +16457,7 @@
       </p:sp>
       <p:sp>
         <p:nvSpPr>
-          <p:cNvPr id="409" name="Google Shape;409;p13"/>
+          <p:cNvPr id="411" name="Google Shape;411;p13"/>
           <p:cNvSpPr txBox="1"/>
           <p:nvPr/>
         </p:nvSpPr>
@@ -16365,7 +16507,7 @@
       </p:sp>
       <p:sp>
         <p:nvSpPr>
-          <p:cNvPr id="410" name="Google Shape;410;p13"/>
+          <p:cNvPr id="412" name="Google Shape;412;p13"/>
           <p:cNvSpPr txBox="1"/>
           <p:nvPr/>
         </p:nvSpPr>
@@ -16415,7 +16557,7 @@
       </p:sp>
       <p:sp>
         <p:nvSpPr>
-          <p:cNvPr id="411" name="Google Shape;411;p13"/>
+          <p:cNvPr id="413" name="Google Shape;413;p13"/>
           <p:cNvSpPr txBox="1"/>
           <p:nvPr/>
         </p:nvSpPr>
@@ -16465,7 +16607,7 @@
       </p:sp>
       <p:sp>
         <p:nvSpPr>
-          <p:cNvPr id="412" name="Google Shape;412;p13"/>
+          <p:cNvPr id="414" name="Google Shape;414;p13"/>
           <p:cNvSpPr txBox="1"/>
           <p:nvPr/>
         </p:nvSpPr>
@@ -16515,7 +16657,7 @@
       </p:sp>
       <p:sp>
         <p:nvSpPr>
-          <p:cNvPr id="413" name="Google Shape;413;p13"/>
+          <p:cNvPr id="415" name="Google Shape;415;p13"/>
           <p:cNvSpPr/>
           <p:nvPr/>
         </p:nvSpPr>
@@ -16579,7 +16721,7 @@
       </p:sp>
       <p:sp>
         <p:nvSpPr>
-          <p:cNvPr id="414" name="Google Shape;414;p13"/>
+          <p:cNvPr id="416" name="Google Shape;416;p13"/>
           <p:cNvSpPr/>
           <p:nvPr/>
         </p:nvSpPr>
@@ -16643,7 +16785,7 @@
       </p:sp>
       <p:sp>
         <p:nvSpPr>
-          <p:cNvPr id="415" name="Google Shape;415;p13"/>
+          <p:cNvPr id="417" name="Google Shape;417;p13"/>
           <p:cNvSpPr txBox="1"/>
           <p:nvPr/>
         </p:nvSpPr>
@@ -16693,7 +16835,7 @@
       </p:sp>
       <p:sp>
         <p:nvSpPr>
-          <p:cNvPr id="416" name="Google Shape;416;p13"/>
+          <p:cNvPr id="418" name="Google Shape;418;p13"/>
           <p:cNvSpPr txBox="1"/>
           <p:nvPr/>
         </p:nvSpPr>
@@ -16778,7 +16920,7 @@
   <p:cSld>
     <p:spTree>
       <p:nvGrpSpPr>
-        <p:cNvPr id="420" name="Shape 420"/>
+        <p:cNvPr id="422" name="Shape 422"/>
         <p:cNvGrpSpPr/>
         <p:nvPr/>
       </p:nvGrpSpPr>
@@ -16792,7 +16934,7 @@
       </p:grpSpPr>
       <p:sp>
         <p:nvSpPr>
-          <p:cNvPr id="421" name="Google Shape;421;p14"/>
+          <p:cNvPr id="423" name="Google Shape;423;p14"/>
           <p:cNvSpPr/>
           <p:nvPr/>
         </p:nvSpPr>
@@ -16856,7 +16998,7 @@
       </p:sp>
       <p:sp>
         <p:nvSpPr>
-          <p:cNvPr id="422" name="Google Shape;422;p14"/>
+          <p:cNvPr id="424" name="Google Shape;424;p14"/>
           <p:cNvSpPr/>
           <p:nvPr/>
         </p:nvSpPr>
@@ -16920,7 +17062,7 @@
       </p:sp>
       <p:sp>
         <p:nvSpPr>
-          <p:cNvPr id="423" name="Google Shape;423;p14"/>
+          <p:cNvPr id="425" name="Google Shape;425;p14"/>
           <p:cNvSpPr txBox="1"/>
           <p:nvPr/>
         </p:nvSpPr>
@@ -16970,7 +17112,7 @@
       </p:sp>
       <p:sp>
         <p:nvSpPr>
-          <p:cNvPr id="424" name="Google Shape;424;p14"/>
+          <p:cNvPr id="426" name="Google Shape;426;p14"/>
           <p:cNvSpPr txBox="1"/>
           <p:nvPr/>
         </p:nvSpPr>
@@ -17020,7 +17162,7 @@
       </p:sp>
       <p:sp>
         <p:nvSpPr>
-          <p:cNvPr id="425" name="Google Shape;425;p14"/>
+          <p:cNvPr id="427" name="Google Shape;427;p14"/>
           <p:cNvSpPr txBox="1"/>
           <p:nvPr/>
         </p:nvSpPr>
@@ -17070,7 +17212,7 @@
       </p:sp>
       <p:pic>
         <p:nvPicPr>
-          <p:cNvPr descr="pipeline.png" id="426" name="Google Shape;426;p14"/>
+          <p:cNvPr descr="pipeline.png" id="428" name="Google Shape;428;p14"/>
           <p:cNvPicPr preferRelativeResize="0"/>
           <p:nvPr/>
         </p:nvPicPr>
@@ -17097,7 +17239,7 @@
       </p:pic>
       <p:sp>
         <p:nvSpPr>
-          <p:cNvPr id="427" name="Google Shape;427;p14"/>
+          <p:cNvPr id="429" name="Google Shape;429;p14"/>
           <p:cNvSpPr/>
           <p:nvPr/>
         </p:nvSpPr>
@@ -17161,7 +17303,7 @@
       </p:sp>
       <p:sp>
         <p:nvSpPr>
-          <p:cNvPr id="428" name="Google Shape;428;p14"/>
+          <p:cNvPr id="430" name="Google Shape;430;p14"/>
           <p:cNvSpPr/>
           <p:nvPr/>
         </p:nvSpPr>
@@ -17225,7 +17367,7 @@
       </p:sp>
       <p:sp>
         <p:nvSpPr>
-          <p:cNvPr id="429" name="Google Shape;429;p14"/>
+          <p:cNvPr id="431" name="Google Shape;431;p14"/>
           <p:cNvSpPr txBox="1"/>
           <p:nvPr/>
         </p:nvSpPr>
@@ -17275,7 +17417,7 @@
       </p:sp>
       <p:sp>
         <p:nvSpPr>
-          <p:cNvPr id="430" name="Google Shape;430;p14"/>
+          <p:cNvPr id="432" name="Google Shape;432;p14"/>
           <p:cNvSpPr txBox="1"/>
           <p:nvPr/>
         </p:nvSpPr>
@@ -17349,7 +17491,7 @@
       </p:sp>
       <p:sp>
         <p:nvSpPr>
-          <p:cNvPr id="431" name="Google Shape;431;p14"/>
+          <p:cNvPr id="433" name="Google Shape;433;p14"/>
           <p:cNvSpPr/>
           <p:nvPr/>
         </p:nvSpPr>
@@ -17413,7 +17555,7 @@
       </p:sp>
       <p:sp>
         <p:nvSpPr>
-          <p:cNvPr id="432" name="Google Shape;432;p14"/>
+          <p:cNvPr id="434" name="Google Shape;434;p14"/>
           <p:cNvSpPr/>
           <p:nvPr/>
         </p:nvSpPr>
@@ -17477,7 +17619,7 @@
       </p:sp>
       <p:sp>
         <p:nvSpPr>
-          <p:cNvPr id="433" name="Google Shape;433;p14"/>
+          <p:cNvPr id="435" name="Google Shape;435;p14"/>
           <p:cNvSpPr txBox="1"/>
           <p:nvPr/>
         </p:nvSpPr>
@@ -17527,7 +17669,7 @@
       </p:sp>
       <p:sp>
         <p:nvSpPr>
-          <p:cNvPr id="434" name="Google Shape;434;p14"/>
+          <p:cNvPr id="436" name="Google Shape;436;p14"/>
           <p:cNvSpPr txBox="1"/>
           <p:nvPr/>
         </p:nvSpPr>
@@ -17625,7 +17767,7 @@
       </p:sp>
       <p:sp>
         <p:nvSpPr>
-          <p:cNvPr id="435" name="Google Shape;435;p14"/>
+          <p:cNvPr id="437" name="Google Shape;437;p14"/>
           <p:cNvSpPr/>
           <p:nvPr/>
         </p:nvSpPr>
@@ -17689,7 +17831,7 @@
       </p:sp>
       <p:sp>
         <p:nvSpPr>
-          <p:cNvPr id="436" name="Google Shape;436;p14"/>
+          <p:cNvPr id="438" name="Google Shape;438;p14"/>
           <p:cNvSpPr/>
           <p:nvPr/>
         </p:nvSpPr>
@@ -17753,7 +17895,7 @@
       </p:sp>
       <p:sp>
         <p:nvSpPr>
-          <p:cNvPr id="437" name="Google Shape;437;p14"/>
+          <p:cNvPr id="439" name="Google Shape;439;p14"/>
           <p:cNvSpPr txBox="1"/>
           <p:nvPr/>
         </p:nvSpPr>
@@ -17803,7 +17945,7 @@
       </p:sp>
       <p:sp>
         <p:nvSpPr>
-          <p:cNvPr id="438" name="Google Shape;438;p14"/>
+          <p:cNvPr id="440" name="Google Shape;440;p14"/>
           <p:cNvSpPr txBox="1"/>
           <p:nvPr/>
         </p:nvSpPr>
@@ -17912,7 +18054,7 @@
   <p:cSld>
     <p:spTree>
       <p:nvGrpSpPr>
-        <p:cNvPr id="442" name="Shape 442"/>
+        <p:cNvPr id="444" name="Shape 444"/>
         <p:cNvGrpSpPr/>
         <p:nvPr/>
       </p:nvGrpSpPr>
@@ -17926,7 +18068,7 @@
       </p:grpSpPr>
       <p:sp>
         <p:nvSpPr>
-          <p:cNvPr id="443" name="Google Shape;443;p15"/>
+          <p:cNvPr id="445" name="Google Shape;445;p15"/>
           <p:cNvSpPr/>
           <p:nvPr/>
         </p:nvSpPr>
@@ -17990,7 +18132,7 @@
       </p:sp>
       <p:sp>
         <p:nvSpPr>
-          <p:cNvPr id="444" name="Google Shape;444;p15"/>
+          <p:cNvPr id="446" name="Google Shape;446;p15"/>
           <p:cNvSpPr/>
           <p:nvPr/>
         </p:nvSpPr>
@@ -18054,7 +18196,7 @@
       </p:sp>
       <p:sp>
         <p:nvSpPr>
-          <p:cNvPr id="445" name="Google Shape;445;p15"/>
+          <p:cNvPr id="447" name="Google Shape;447;p15"/>
           <p:cNvSpPr txBox="1"/>
           <p:nvPr/>
         </p:nvSpPr>
@@ -18104,14 +18246,14 @@
       </p:sp>
       <p:sp>
         <p:nvSpPr>
-          <p:cNvPr id="446" name="Google Shape;446;p15"/>
+          <p:cNvPr id="448" name="Google Shape;448;p15"/>
           <p:cNvSpPr txBox="1"/>
           <p:nvPr/>
         </p:nvSpPr>
         <p:spPr>
           <a:xfrm>
             <a:off x="457200" y="658368"/>
-            <a:ext cx="9628632" cy="320040"/>
+            <a:ext cx="9628500" cy="261600"/>
           </a:xfrm>
           <a:prstGeom prst="rect">
             <a:avLst/>
@@ -18146,7 +18288,19 @@
                 <a:cs typeface="Calibri"/>
                 <a:sym typeface="Calibri"/>
               </a:rPr>
-              <a:t>Pipeline A (vector RAG path) · 50 questions · gpt-4o-mini</a:t>
+              <a:t>Pipeline A (vector RAG path) · 50 questions · gpt-</a:t>
+            </a:r>
+            <a:r>
+              <a:rPr lang="en-US" sz="1100">
+                <a:solidFill>
+                  <a:srgbClr val="B0C4DE"/>
+                </a:solidFill>
+                <a:latin typeface="Calibri"/>
+                <a:ea typeface="Calibri"/>
+                <a:cs typeface="Calibri"/>
+                <a:sym typeface="Calibri"/>
+              </a:rPr>
+              <a:t>5.6-luna</a:t>
             </a:r>
             <a:endParaRPr/>
           </a:p>
@@ -18154,7 +18308,7 @@
       </p:sp>
       <p:sp>
         <p:nvSpPr>
-          <p:cNvPr id="447" name="Google Shape;447;p15"/>
+          <p:cNvPr id="449" name="Google Shape;449;p15"/>
           <p:cNvSpPr txBox="1"/>
           <p:nvPr/>
         </p:nvSpPr>
@@ -18204,7 +18358,7 @@
       </p:sp>
       <p:pic>
         <p:nvPicPr>
-          <p:cNvPr descr="ragas.png" id="448" name="Google Shape;448;p15"/>
+          <p:cNvPr descr="ragas.png" id="450" name="Google Shape;450;p15"/>
           <p:cNvPicPr preferRelativeResize="0"/>
           <p:nvPr/>
         </p:nvPicPr>
@@ -18231,7 +18385,7 @@
       </p:pic>
       <p:sp>
         <p:nvSpPr>
-          <p:cNvPr id="449" name="Google Shape;449;p15"/>
+          <p:cNvPr id="451" name="Google Shape;451;p15"/>
           <p:cNvSpPr/>
           <p:nvPr/>
         </p:nvSpPr>
@@ -18295,7 +18449,7 @@
       </p:sp>
       <p:sp>
         <p:nvSpPr>
-          <p:cNvPr id="450" name="Google Shape;450;p15"/>
+          <p:cNvPr id="452" name="Google Shape;452;p15"/>
           <p:cNvSpPr/>
           <p:nvPr/>
         </p:nvSpPr>
@@ -18359,7 +18513,7 @@
       </p:sp>
       <p:sp>
         <p:nvSpPr>
-          <p:cNvPr id="451" name="Google Shape;451;p15"/>
+          <p:cNvPr id="453" name="Google Shape;453;p15"/>
           <p:cNvSpPr txBox="1"/>
           <p:nvPr/>
         </p:nvSpPr>
@@ -18409,7 +18563,7 @@
       </p:sp>
       <p:sp>
         <p:nvSpPr>
-          <p:cNvPr id="452" name="Google Shape;452;p15"/>
+          <p:cNvPr id="454" name="Google Shape;454;p15"/>
           <p:cNvSpPr txBox="1"/>
           <p:nvPr/>
         </p:nvSpPr>
@@ -18459,7 +18613,7 @@
       </p:sp>
       <p:sp>
         <p:nvSpPr>
-          <p:cNvPr id="453" name="Google Shape;453;p15"/>
+          <p:cNvPr id="455" name="Google Shape;455;p15"/>
           <p:cNvSpPr txBox="1"/>
           <p:nvPr/>
         </p:nvSpPr>
@@ -18533,7 +18687,7 @@
       </p:sp>
       <p:sp>
         <p:nvSpPr>
-          <p:cNvPr id="454" name="Google Shape;454;p15"/>
+          <p:cNvPr id="456" name="Google Shape;456;p15"/>
           <p:cNvSpPr/>
           <p:nvPr/>
         </p:nvSpPr>
@@ -18597,7 +18751,7 @@
       </p:sp>
       <p:sp>
         <p:nvSpPr>
-          <p:cNvPr id="455" name="Google Shape;455;p15"/>
+          <p:cNvPr id="457" name="Google Shape;457;p15"/>
           <p:cNvSpPr/>
           <p:nvPr/>
         </p:nvSpPr>
@@ -18661,7 +18815,7 @@
       </p:sp>
       <p:sp>
         <p:nvSpPr>
-          <p:cNvPr id="456" name="Google Shape;456;p15"/>
+          <p:cNvPr id="458" name="Google Shape;458;p15"/>
           <p:cNvSpPr txBox="1"/>
           <p:nvPr/>
         </p:nvSpPr>
@@ -18711,7 +18865,7 @@
       </p:sp>
       <p:sp>
         <p:nvSpPr>
-          <p:cNvPr id="457" name="Google Shape;457;p15"/>
+          <p:cNvPr id="459" name="Google Shape;459;p15"/>
           <p:cNvSpPr txBox="1"/>
           <p:nvPr/>
         </p:nvSpPr>
@@ -18761,7 +18915,7 @@
       </p:sp>
       <p:sp>
         <p:nvSpPr>
-          <p:cNvPr id="458" name="Google Shape;458;p15"/>
+          <p:cNvPr id="460" name="Google Shape;460;p15"/>
           <p:cNvSpPr txBox="1"/>
           <p:nvPr/>
         </p:nvSpPr>
@@ -18835,7 +18989,7 @@
       </p:sp>
       <p:sp>
         <p:nvSpPr>
-          <p:cNvPr id="459" name="Google Shape;459;p15"/>
+          <p:cNvPr id="461" name="Google Shape;461;p15"/>
           <p:cNvSpPr/>
           <p:nvPr/>
         </p:nvSpPr>
@@ -18899,7 +19053,7 @@
       </p:sp>
       <p:sp>
         <p:nvSpPr>
-          <p:cNvPr id="460" name="Google Shape;460;p15"/>
+          <p:cNvPr id="462" name="Google Shape;462;p15"/>
           <p:cNvSpPr/>
           <p:nvPr/>
         </p:nvSpPr>
@@ -18963,7 +19117,7 @@
       </p:sp>
       <p:sp>
         <p:nvSpPr>
-          <p:cNvPr id="461" name="Google Shape;461;p15"/>
+          <p:cNvPr id="463" name="Google Shape;463;p15"/>
           <p:cNvSpPr txBox="1"/>
           <p:nvPr/>
         </p:nvSpPr>
@@ -19013,7 +19167,7 @@
       </p:sp>
       <p:sp>
         <p:nvSpPr>
-          <p:cNvPr id="462" name="Google Shape;462;p15"/>
+          <p:cNvPr id="464" name="Google Shape;464;p15"/>
           <p:cNvSpPr txBox="1"/>
           <p:nvPr/>
         </p:nvSpPr>
@@ -19063,7 +19217,7 @@
       </p:sp>
       <p:sp>
         <p:nvSpPr>
-          <p:cNvPr id="463" name="Google Shape;463;p15"/>
+          <p:cNvPr id="465" name="Google Shape;465;p15"/>
           <p:cNvSpPr txBox="1"/>
           <p:nvPr/>
         </p:nvSpPr>
@@ -19137,7 +19291,7 @@
       </p:sp>
       <p:sp>
         <p:nvSpPr>
-          <p:cNvPr id="464" name="Google Shape;464;p15"/>
+          <p:cNvPr id="466" name="Google Shape;466;p15"/>
           <p:cNvSpPr/>
           <p:nvPr/>
         </p:nvSpPr>
@@ -19201,7 +19355,7 @@
       </p:sp>
       <p:sp>
         <p:nvSpPr>
-          <p:cNvPr id="465" name="Google Shape;465;p15"/>
+          <p:cNvPr id="467" name="Google Shape;467;p15"/>
           <p:cNvSpPr/>
           <p:nvPr/>
         </p:nvSpPr>
@@ -19265,7 +19419,7 @@
       </p:sp>
       <p:sp>
         <p:nvSpPr>
-          <p:cNvPr id="466" name="Google Shape;466;p15"/>
+          <p:cNvPr id="468" name="Google Shape;468;p15"/>
           <p:cNvSpPr txBox="1"/>
           <p:nvPr/>
         </p:nvSpPr>
@@ -19315,7 +19469,7 @@
       </p:sp>
       <p:sp>
         <p:nvSpPr>
-          <p:cNvPr id="467" name="Google Shape;467;p15"/>
+          <p:cNvPr id="469" name="Google Shape;469;p15"/>
           <p:cNvSpPr txBox="1"/>
           <p:nvPr/>
         </p:nvSpPr>
@@ -19365,7 +19519,7 @@
       </p:sp>
       <p:sp>
         <p:nvSpPr>
-          <p:cNvPr id="468" name="Google Shape;468;p15"/>
+          <p:cNvPr id="470" name="Google Shape;470;p15"/>
           <p:cNvSpPr txBox="1"/>
           <p:nvPr/>
         </p:nvSpPr>
@@ -19439,7 +19593,7 @@
       </p:sp>
       <p:sp>
         <p:nvSpPr>
-          <p:cNvPr id="469" name="Google Shape;469;p15"/>
+          <p:cNvPr id="471" name="Google Shape;471;p15"/>
           <p:cNvSpPr txBox="1"/>
           <p:nvPr/>
         </p:nvSpPr>
@@ -19500,7 +19654,7 @@
   <p:cSld>
     <p:spTree>
       <p:nvGrpSpPr>
-        <p:cNvPr id="473" name="Shape 473"/>
+        <p:cNvPr id="475" name="Shape 475"/>
         <p:cNvGrpSpPr/>
         <p:nvPr/>
       </p:nvGrpSpPr>
@@ -19514,7 +19668,7 @@
       </p:grpSpPr>
       <p:sp>
         <p:nvSpPr>
-          <p:cNvPr id="474" name="Google Shape;474;p16"/>
+          <p:cNvPr id="476" name="Google Shape;476;p16"/>
           <p:cNvSpPr/>
           <p:nvPr/>
         </p:nvSpPr>
@@ -19578,7 +19732,7 @@
       </p:sp>
       <p:sp>
         <p:nvSpPr>
-          <p:cNvPr id="475" name="Google Shape;475;p16"/>
+          <p:cNvPr id="477" name="Google Shape;477;p16"/>
           <p:cNvSpPr/>
           <p:nvPr/>
         </p:nvSpPr>
@@ -19642,7 +19796,7 @@
       </p:sp>
       <p:sp>
         <p:nvSpPr>
-          <p:cNvPr id="476" name="Google Shape;476;p16"/>
+          <p:cNvPr id="478" name="Google Shape;478;p16"/>
           <p:cNvSpPr txBox="1"/>
           <p:nvPr/>
         </p:nvSpPr>
@@ -19692,7 +19846,7 @@
       </p:sp>
       <p:sp>
         <p:nvSpPr>
-          <p:cNvPr id="477" name="Google Shape;477;p16"/>
+          <p:cNvPr id="479" name="Google Shape;479;p16"/>
           <p:cNvSpPr txBox="1"/>
           <p:nvPr/>
         </p:nvSpPr>
@@ -19742,7 +19896,7 @@
       </p:sp>
       <p:sp>
         <p:nvSpPr>
-          <p:cNvPr id="478" name="Google Shape;478;p16"/>
+          <p:cNvPr id="480" name="Google Shape;480;p16"/>
           <p:cNvSpPr txBox="1"/>
           <p:nvPr/>
         </p:nvSpPr>
@@ -19792,7 +19946,7 @@
       </p:sp>
       <p:sp>
         <p:nvSpPr>
-          <p:cNvPr id="479" name="Google Shape;479;p16"/>
+          <p:cNvPr id="481" name="Google Shape;481;p16"/>
           <p:cNvSpPr/>
           <p:nvPr/>
         </p:nvSpPr>
@@ -19856,7 +20010,7 @@
       </p:sp>
       <p:sp>
         <p:nvSpPr>
-          <p:cNvPr id="480" name="Google Shape;480;p16"/>
+          <p:cNvPr id="482" name="Google Shape;482;p16"/>
           <p:cNvSpPr/>
           <p:nvPr/>
         </p:nvSpPr>
@@ -19920,7 +20074,7 @@
       </p:sp>
       <p:sp>
         <p:nvSpPr>
-          <p:cNvPr id="481" name="Google Shape;481;p16"/>
+          <p:cNvPr id="483" name="Google Shape;483;p16"/>
           <p:cNvSpPr txBox="1"/>
           <p:nvPr/>
         </p:nvSpPr>
@@ -19970,7 +20124,7 @@
       </p:sp>
       <p:sp>
         <p:nvSpPr>
-          <p:cNvPr id="482" name="Google Shape;482;p16"/>
+          <p:cNvPr id="484" name="Google Shape;484;p16"/>
           <p:cNvSpPr txBox="1"/>
           <p:nvPr/>
         </p:nvSpPr>
@@ -20020,7 +20174,7 @@
       </p:sp>
       <p:sp>
         <p:nvSpPr>
-          <p:cNvPr id="483" name="Google Shape;483;p16"/>
+          <p:cNvPr id="485" name="Google Shape;485;p16"/>
           <p:cNvSpPr/>
           <p:nvPr/>
         </p:nvSpPr>
@@ -20084,7 +20238,7 @@
       </p:sp>
       <p:sp>
         <p:nvSpPr>
-          <p:cNvPr id="484" name="Google Shape;484;p16"/>
+          <p:cNvPr id="486" name="Google Shape;486;p16"/>
           <p:cNvSpPr txBox="1"/>
           <p:nvPr/>
         </p:nvSpPr>
@@ -20158,7 +20312,7 @@
       </p:sp>
       <p:sp>
         <p:nvSpPr>
-          <p:cNvPr id="485" name="Google Shape;485;p16"/>
+          <p:cNvPr id="487" name="Google Shape;487;p16"/>
           <p:cNvSpPr/>
           <p:nvPr/>
         </p:nvSpPr>
@@ -20222,7 +20376,7 @@
       </p:sp>
       <p:sp>
         <p:nvSpPr>
-          <p:cNvPr id="486" name="Google Shape;486;p16"/>
+          <p:cNvPr id="488" name="Google Shape;488;p16"/>
           <p:cNvSpPr/>
           <p:nvPr/>
         </p:nvSpPr>
@@ -20286,7 +20440,7 @@
       </p:sp>
       <p:sp>
         <p:nvSpPr>
-          <p:cNvPr id="487" name="Google Shape;487;p16"/>
+          <p:cNvPr id="489" name="Google Shape;489;p16"/>
           <p:cNvSpPr txBox="1"/>
           <p:nvPr/>
         </p:nvSpPr>
@@ -20336,7 +20490,7 @@
       </p:sp>
       <p:sp>
         <p:nvSpPr>
-          <p:cNvPr id="488" name="Google Shape;488;p16"/>
+          <p:cNvPr id="490" name="Google Shape;490;p16"/>
           <p:cNvSpPr txBox="1"/>
           <p:nvPr/>
         </p:nvSpPr>
@@ -20386,7 +20540,7 @@
       </p:sp>
       <p:sp>
         <p:nvSpPr>
-          <p:cNvPr id="489" name="Google Shape;489;p16"/>
+          <p:cNvPr id="491" name="Google Shape;491;p16"/>
           <p:cNvSpPr/>
           <p:nvPr/>
         </p:nvSpPr>
@@ -20450,7 +20604,7 @@
       </p:sp>
       <p:sp>
         <p:nvSpPr>
-          <p:cNvPr id="490" name="Google Shape;490;p16"/>
+          <p:cNvPr id="492" name="Google Shape;492;p16"/>
           <p:cNvSpPr txBox="1"/>
           <p:nvPr/>
         </p:nvSpPr>
@@ -20524,7 +20678,7 @@
       </p:sp>
       <p:sp>
         <p:nvSpPr>
-          <p:cNvPr id="491" name="Google Shape;491;p16"/>
+          <p:cNvPr id="493" name="Google Shape;493;p16"/>
           <p:cNvSpPr/>
           <p:nvPr/>
         </p:nvSpPr>
@@ -20588,7 +20742,7 @@
       </p:sp>
       <p:sp>
         <p:nvSpPr>
-          <p:cNvPr id="492" name="Google Shape;492;p16"/>
+          <p:cNvPr id="494" name="Google Shape;494;p16"/>
           <p:cNvSpPr/>
           <p:nvPr/>
         </p:nvSpPr>
@@ -20652,7 +20806,7 @@
       </p:sp>
       <p:sp>
         <p:nvSpPr>
-          <p:cNvPr id="493" name="Google Shape;493;p16"/>
+          <p:cNvPr id="495" name="Google Shape;495;p16"/>
           <p:cNvSpPr txBox="1"/>
           <p:nvPr/>
         </p:nvSpPr>
@@ -20702,7 +20856,7 @@
       </p:sp>
       <p:sp>
         <p:nvSpPr>
-          <p:cNvPr id="494" name="Google Shape;494;p16"/>
+          <p:cNvPr id="496" name="Google Shape;496;p16"/>
           <p:cNvSpPr txBox="1"/>
           <p:nvPr/>
         </p:nvSpPr>
@@ -20752,7 +20906,7 @@
       </p:sp>
       <p:sp>
         <p:nvSpPr>
-          <p:cNvPr id="495" name="Google Shape;495;p16"/>
+          <p:cNvPr id="497" name="Google Shape;497;p16"/>
           <p:cNvSpPr/>
           <p:nvPr/>
         </p:nvSpPr>
@@ -20816,7 +20970,7 @@
       </p:sp>
       <p:sp>
         <p:nvSpPr>
-          <p:cNvPr id="496" name="Google Shape;496;p16"/>
+          <p:cNvPr id="498" name="Google Shape;498;p16"/>
           <p:cNvSpPr txBox="1"/>
           <p:nvPr/>
         </p:nvSpPr>
@@ -20890,14 +21044,14 @@
       </p:sp>
       <p:sp>
         <p:nvSpPr>
-          <p:cNvPr id="497" name="Google Shape;497;p16"/>
+          <p:cNvPr id="499" name="Google Shape;499;p16"/>
           <p:cNvSpPr/>
           <p:nvPr/>
         </p:nvSpPr>
         <p:spPr>
           <a:xfrm>
-            <a:off x="8823960" y="1188720"/>
-            <a:ext cx="2606040" cy="2743200"/>
+            <a:off x="8823949" y="1188725"/>
+            <a:ext cx="2907900" cy="2743200"/>
           </a:xfrm>
           <a:prstGeom prst="rect">
             <a:avLst/>
@@ -20954,14 +21108,14 @@
       </p:sp>
       <p:sp>
         <p:nvSpPr>
-          <p:cNvPr id="498" name="Google Shape;498;p16"/>
+          <p:cNvPr id="500" name="Google Shape;500;p16"/>
           <p:cNvSpPr/>
           <p:nvPr/>
         </p:nvSpPr>
         <p:spPr>
           <a:xfrm>
-            <a:off x="8823960" y="1188720"/>
-            <a:ext cx="2606040" cy="45720"/>
+            <a:off x="8823949" y="1188728"/>
+            <a:ext cx="2907900" cy="45600"/>
           </a:xfrm>
           <a:prstGeom prst="rect">
             <a:avLst/>
@@ -21018,7 +21172,7 @@
       </p:sp>
       <p:sp>
         <p:nvSpPr>
-          <p:cNvPr id="499" name="Google Shape;499;p16"/>
+          <p:cNvPr id="501" name="Google Shape;501;p16"/>
           <p:cNvSpPr txBox="1"/>
           <p:nvPr/>
         </p:nvSpPr>
@@ -21068,7 +21222,7 @@
       </p:sp>
       <p:sp>
         <p:nvSpPr>
-          <p:cNvPr id="500" name="Google Shape;500;p16"/>
+          <p:cNvPr id="502" name="Google Shape;502;p16"/>
           <p:cNvSpPr txBox="1"/>
           <p:nvPr/>
         </p:nvSpPr>
@@ -21118,7 +21272,7 @@
       </p:sp>
       <p:sp>
         <p:nvSpPr>
-          <p:cNvPr id="501" name="Google Shape;501;p16"/>
+          <p:cNvPr id="503" name="Google Shape;503;p16"/>
           <p:cNvSpPr/>
           <p:nvPr/>
         </p:nvSpPr>
@@ -21182,7 +21336,7 @@
       </p:sp>
       <p:sp>
         <p:nvSpPr>
-          <p:cNvPr id="502" name="Google Shape;502;p16"/>
+          <p:cNvPr id="504" name="Google Shape;504;p16"/>
           <p:cNvSpPr txBox="1"/>
           <p:nvPr/>
         </p:nvSpPr>
@@ -21256,7 +21410,7 @@
       </p:sp>
       <p:sp>
         <p:nvSpPr>
-          <p:cNvPr id="503" name="Google Shape;503;p16"/>
+          <p:cNvPr id="505" name="Google Shape;505;p16"/>
           <p:cNvSpPr/>
           <p:nvPr/>
         </p:nvSpPr>
@@ -21320,7 +21474,7 @@
       </p:sp>
       <p:sp>
         <p:nvSpPr>
-          <p:cNvPr id="504" name="Google Shape;504;p16"/>
+          <p:cNvPr id="506" name="Google Shape;506;p16"/>
           <p:cNvSpPr txBox="1"/>
           <p:nvPr/>
         </p:nvSpPr>
@@ -21370,7 +21524,7 @@
       </p:sp>
       <p:sp>
         <p:nvSpPr>
-          <p:cNvPr id="505" name="Google Shape;505;p16"/>
+          <p:cNvPr id="507" name="Google Shape;507;p16"/>
           <p:cNvSpPr txBox="1"/>
           <p:nvPr/>
         </p:nvSpPr>
@@ -21420,7 +21574,7 @@
       </p:sp>
       <p:sp>
         <p:nvSpPr>
-          <p:cNvPr id="506" name="Google Shape;506;p16"/>
+          <p:cNvPr id="508" name="Google Shape;508;p16"/>
           <p:cNvSpPr/>
           <p:nvPr/>
         </p:nvSpPr>
@@ -21484,7 +21638,7 @@
       </p:sp>
       <p:sp>
         <p:nvSpPr>
-          <p:cNvPr id="507" name="Google Shape;507;p16"/>
+          <p:cNvPr id="509" name="Google Shape;509;p16"/>
           <p:cNvSpPr txBox="1"/>
           <p:nvPr/>
         </p:nvSpPr>
@@ -21534,7 +21688,7 @@
       </p:sp>
       <p:sp>
         <p:nvSpPr>
-          <p:cNvPr id="508" name="Google Shape;508;p16"/>
+          <p:cNvPr id="510" name="Google Shape;510;p16"/>
           <p:cNvSpPr txBox="1"/>
           <p:nvPr/>
         </p:nvSpPr>
@@ -21608,7 +21762,7 @@
       </p:sp>
       <p:sp>
         <p:nvSpPr>
-          <p:cNvPr id="509" name="Google Shape;509;p16"/>
+          <p:cNvPr id="511" name="Google Shape;511;p16"/>
           <p:cNvSpPr/>
           <p:nvPr/>
         </p:nvSpPr>
@@ -21672,7 +21826,7 @@
       </p:sp>
       <p:sp>
         <p:nvSpPr>
-          <p:cNvPr id="510" name="Google Shape;510;p16"/>
+          <p:cNvPr id="512" name="Google Shape;512;p16"/>
           <p:cNvSpPr txBox="1"/>
           <p:nvPr/>
         </p:nvSpPr>
@@ -21722,7 +21876,7 @@
       </p:sp>
       <p:sp>
         <p:nvSpPr>
-          <p:cNvPr id="511" name="Google Shape;511;p16"/>
+          <p:cNvPr id="513" name="Google Shape;513;p16"/>
           <p:cNvSpPr txBox="1"/>
           <p:nvPr/>
         </p:nvSpPr>
@@ -21796,7 +21950,7 @@
       </p:sp>
       <p:sp>
         <p:nvSpPr>
-          <p:cNvPr id="512" name="Google Shape;512;p16"/>
+          <p:cNvPr id="514" name="Google Shape;514;p16"/>
           <p:cNvSpPr/>
           <p:nvPr/>
         </p:nvSpPr>
@@ -21860,7 +22014,7 @@
       </p:sp>
       <p:sp>
         <p:nvSpPr>
-          <p:cNvPr id="513" name="Google Shape;513;p16"/>
+          <p:cNvPr id="515" name="Google Shape;515;p16"/>
           <p:cNvSpPr txBox="1"/>
           <p:nvPr/>
         </p:nvSpPr>
@@ -21910,7 +22064,7 @@
       </p:sp>
       <p:sp>
         <p:nvSpPr>
-          <p:cNvPr id="514" name="Google Shape;514;p16"/>
+          <p:cNvPr id="516" name="Google Shape;516;p16"/>
           <p:cNvSpPr txBox="1"/>
           <p:nvPr/>
         </p:nvSpPr>
@@ -21995,7 +22149,7 @@
   <p:cSld>
     <p:spTree>
       <p:nvGrpSpPr>
-        <p:cNvPr id="518" name="Shape 518"/>
+        <p:cNvPr id="520" name="Shape 520"/>
         <p:cNvGrpSpPr/>
         <p:nvPr/>
       </p:nvGrpSpPr>
@@ -22009,7 +22163,7 @@
       </p:grpSpPr>
       <p:sp>
         <p:nvSpPr>
-          <p:cNvPr id="519" name="Google Shape;519;p17"/>
+          <p:cNvPr id="521" name="Google Shape;521;p17"/>
           <p:cNvSpPr/>
           <p:nvPr/>
         </p:nvSpPr>
@@ -22073,7 +22227,7 @@
       </p:sp>
       <p:sp>
         <p:nvSpPr>
-          <p:cNvPr id="520" name="Google Shape;520;p17"/>
+          <p:cNvPr id="522" name="Google Shape;522;p17"/>
           <p:cNvSpPr/>
           <p:nvPr/>
         </p:nvSpPr>
@@ -22137,7 +22291,7 @@
       </p:sp>
       <p:sp>
         <p:nvSpPr>
-          <p:cNvPr id="521" name="Google Shape;521;p17"/>
+          <p:cNvPr id="523" name="Google Shape;523;p17"/>
           <p:cNvSpPr txBox="1"/>
           <p:nvPr/>
         </p:nvSpPr>
@@ -22187,7 +22341,7 @@
       </p:sp>
       <p:sp>
         <p:nvSpPr>
-          <p:cNvPr id="522" name="Google Shape;522;p17"/>
+          <p:cNvPr id="524" name="Google Shape;524;p17"/>
           <p:cNvSpPr txBox="1"/>
           <p:nvPr/>
         </p:nvSpPr>
@@ -22237,7 +22391,7 @@
       </p:sp>
       <p:sp>
         <p:nvSpPr>
-          <p:cNvPr id="523" name="Google Shape;523;p17"/>
+          <p:cNvPr id="525" name="Google Shape;525;p17"/>
           <p:cNvSpPr txBox="1"/>
           <p:nvPr/>
         </p:nvSpPr>
@@ -22287,7 +22441,7 @@
       </p:sp>
       <p:sp>
         <p:nvSpPr>
-          <p:cNvPr id="524" name="Google Shape;524;p17"/>
+          <p:cNvPr id="526" name="Google Shape;526;p17"/>
           <p:cNvSpPr/>
           <p:nvPr/>
         </p:nvSpPr>
@@ -22351,7 +22505,7 @@
       </p:sp>
       <p:sp>
         <p:nvSpPr>
-          <p:cNvPr id="525" name="Google Shape;525;p17"/>
+          <p:cNvPr id="527" name="Google Shape;527;p17"/>
           <p:cNvSpPr/>
           <p:nvPr/>
         </p:nvSpPr>
@@ -22415,7 +22569,7 @@
       </p:sp>
       <p:sp>
         <p:nvSpPr>
-          <p:cNvPr id="526" name="Google Shape;526;p17"/>
+          <p:cNvPr id="528" name="Google Shape;528;p17"/>
           <p:cNvSpPr txBox="1"/>
           <p:nvPr/>
         </p:nvSpPr>
@@ -22465,7 +22619,7 @@
       </p:sp>
       <p:sp>
         <p:nvSpPr>
-          <p:cNvPr id="527" name="Google Shape;527;p17"/>
+          <p:cNvPr id="529" name="Google Shape;529;p17"/>
           <p:cNvSpPr txBox="1"/>
           <p:nvPr/>
         </p:nvSpPr>
@@ -22515,7 +22669,7 @@
       </p:sp>
       <p:sp>
         <p:nvSpPr>
-          <p:cNvPr id="528" name="Google Shape;528;p17"/>
+          <p:cNvPr id="530" name="Google Shape;530;p17"/>
           <p:cNvSpPr/>
           <p:nvPr/>
         </p:nvSpPr>
@@ -22579,7 +22733,7 @@
       </p:sp>
       <p:sp>
         <p:nvSpPr>
-          <p:cNvPr id="529" name="Google Shape;529;p17"/>
+          <p:cNvPr id="531" name="Google Shape;531;p17"/>
           <p:cNvSpPr/>
           <p:nvPr/>
         </p:nvSpPr>
@@ -22643,7 +22797,7 @@
       </p:sp>
       <p:sp>
         <p:nvSpPr>
-          <p:cNvPr id="530" name="Google Shape;530;p17"/>
+          <p:cNvPr id="532" name="Google Shape;532;p17"/>
           <p:cNvSpPr txBox="1"/>
           <p:nvPr/>
         </p:nvSpPr>
@@ -22693,7 +22847,7 @@
       </p:sp>
       <p:sp>
         <p:nvSpPr>
-          <p:cNvPr id="531" name="Google Shape;531;p17"/>
+          <p:cNvPr id="533" name="Google Shape;533;p17"/>
           <p:cNvSpPr txBox="1"/>
           <p:nvPr/>
         </p:nvSpPr>
@@ -22743,7 +22897,7 @@
       </p:sp>
       <p:sp>
         <p:nvSpPr>
-          <p:cNvPr id="532" name="Google Shape;532;p17"/>
+          <p:cNvPr id="534" name="Google Shape;534;p17"/>
           <p:cNvSpPr/>
           <p:nvPr/>
         </p:nvSpPr>
@@ -22807,7 +22961,7 @@
       </p:sp>
       <p:sp>
         <p:nvSpPr>
-          <p:cNvPr id="533" name="Google Shape;533;p17"/>
+          <p:cNvPr id="535" name="Google Shape;535;p17"/>
           <p:cNvSpPr/>
           <p:nvPr/>
         </p:nvSpPr>
@@ -22871,7 +23025,7 @@
       </p:sp>
       <p:sp>
         <p:nvSpPr>
-          <p:cNvPr id="534" name="Google Shape;534;p17"/>
+          <p:cNvPr id="536" name="Google Shape;536;p17"/>
           <p:cNvSpPr txBox="1"/>
           <p:nvPr/>
         </p:nvSpPr>
@@ -22921,7 +23075,7 @@
       </p:sp>
       <p:sp>
         <p:nvSpPr>
-          <p:cNvPr id="535" name="Google Shape;535;p17"/>
+          <p:cNvPr id="537" name="Google Shape;537;p17"/>
           <p:cNvSpPr txBox="1"/>
           <p:nvPr/>
         </p:nvSpPr>
@@ -22982,7 +23136,7 @@
   <p:cSld>
     <p:spTree>
       <p:nvGrpSpPr>
-        <p:cNvPr id="539" name="Shape 539"/>
+        <p:cNvPr id="541" name="Shape 541"/>
         <p:cNvGrpSpPr/>
         <p:nvPr/>
       </p:nvGrpSpPr>
@@ -22996,7 +23150,7 @@
       </p:grpSpPr>
       <p:sp>
         <p:nvSpPr>
-          <p:cNvPr id="540" name="Google Shape;540;p18"/>
+          <p:cNvPr id="542" name="Google Shape;542;p18"/>
           <p:cNvSpPr/>
           <p:nvPr/>
         </p:nvSpPr>
@@ -23060,7 +23214,7 @@
       </p:sp>
       <p:sp>
         <p:nvSpPr>
-          <p:cNvPr id="541" name="Google Shape;541;p18"/>
+          <p:cNvPr id="543" name="Google Shape;543;p18"/>
           <p:cNvSpPr/>
           <p:nvPr/>
         </p:nvSpPr>
@@ -23124,7 +23278,7 @@
       </p:sp>
       <p:sp>
         <p:nvSpPr>
-          <p:cNvPr id="542" name="Google Shape;542;p18"/>
+          <p:cNvPr id="544" name="Google Shape;544;p18"/>
           <p:cNvSpPr txBox="1"/>
           <p:nvPr/>
         </p:nvSpPr>
@@ -23174,7 +23328,7 @@
       </p:sp>
       <p:sp>
         <p:nvSpPr>
-          <p:cNvPr id="543" name="Google Shape;543;p18"/>
+          <p:cNvPr id="545" name="Google Shape;545;p18"/>
           <p:cNvSpPr/>
           <p:nvPr/>
         </p:nvSpPr>
@@ -23238,7 +23392,7 @@
       </p:sp>
       <p:sp>
         <p:nvSpPr>
-          <p:cNvPr id="544" name="Google Shape;544;p18"/>
+          <p:cNvPr id="546" name="Google Shape;546;p18"/>
           <p:cNvSpPr txBox="1"/>
           <p:nvPr/>
         </p:nvSpPr>
@@ -23288,7 +23442,7 @@
       </p:sp>
       <p:sp>
         <p:nvSpPr>
-          <p:cNvPr id="545" name="Google Shape;545;p18"/>
+          <p:cNvPr id="547" name="Google Shape;547;p18"/>
           <p:cNvSpPr txBox="1"/>
           <p:nvPr/>
         </p:nvSpPr>
@@ -23338,7 +23492,7 @@
       </p:sp>
       <p:sp>
         <p:nvSpPr>
-          <p:cNvPr id="546" name="Google Shape;546;p18"/>
+          <p:cNvPr id="548" name="Google Shape;548;p18"/>
           <p:cNvSpPr txBox="1"/>
           <p:nvPr/>
         </p:nvSpPr>
@@ -23411,7 +23565,7 @@
   <p:cSld>
     <p:spTree>
       <p:nvGrpSpPr>
-        <p:cNvPr id="95" name="Shape 95"/>
+        <p:cNvPr id="96" name="Shape 96"/>
         <p:cNvGrpSpPr/>
         <p:nvPr/>
       </p:nvGrpSpPr>
@@ -23425,7 +23579,7 @@
       </p:grpSpPr>
       <p:sp>
         <p:nvSpPr>
-          <p:cNvPr id="96" name="Google Shape;96;p2"/>
+          <p:cNvPr id="97" name="Google Shape;97;p2"/>
           <p:cNvSpPr/>
           <p:nvPr/>
         </p:nvSpPr>
@@ -23489,7 +23643,7 @@
       </p:sp>
       <p:sp>
         <p:nvSpPr>
-          <p:cNvPr id="97" name="Google Shape;97;p2"/>
+          <p:cNvPr id="98" name="Google Shape;98;p2"/>
           <p:cNvSpPr/>
           <p:nvPr/>
         </p:nvSpPr>
@@ -23553,7 +23707,7 @@
       </p:sp>
       <p:sp>
         <p:nvSpPr>
-          <p:cNvPr id="98" name="Google Shape;98;p2"/>
+          <p:cNvPr id="99" name="Google Shape;99;p2"/>
           <p:cNvSpPr txBox="1"/>
           <p:nvPr/>
         </p:nvSpPr>
@@ -23603,7 +23757,7 @@
       </p:sp>
       <p:sp>
         <p:nvSpPr>
-          <p:cNvPr id="99" name="Google Shape;99;p2"/>
+          <p:cNvPr id="100" name="Google Shape;100;p2"/>
           <p:cNvSpPr txBox="1"/>
           <p:nvPr/>
         </p:nvSpPr>
@@ -23653,7 +23807,7 @@
       </p:sp>
       <p:sp>
         <p:nvSpPr>
-          <p:cNvPr id="100" name="Google Shape;100;p2"/>
+          <p:cNvPr id="101" name="Google Shape;101;p2"/>
           <p:cNvSpPr txBox="1"/>
           <p:nvPr/>
         </p:nvSpPr>
@@ -23703,7 +23857,7 @@
       </p:sp>
       <p:sp>
         <p:nvSpPr>
-          <p:cNvPr id="101" name="Google Shape;101;p2"/>
+          <p:cNvPr id="102" name="Google Shape;102;p2"/>
           <p:cNvSpPr/>
           <p:nvPr/>
         </p:nvSpPr>
@@ -23767,7 +23921,7 @@
       </p:sp>
       <p:sp>
         <p:nvSpPr>
-          <p:cNvPr id="102" name="Google Shape;102;p2"/>
+          <p:cNvPr id="103" name="Google Shape;103;p2"/>
           <p:cNvSpPr txBox="1"/>
           <p:nvPr/>
         </p:nvSpPr>
@@ -23817,7 +23971,7 @@
       </p:sp>
       <p:sp>
         <p:nvSpPr>
-          <p:cNvPr id="103" name="Google Shape;103;p2"/>
+          <p:cNvPr id="104" name="Google Shape;104;p2"/>
           <p:cNvSpPr txBox="1"/>
           <p:nvPr/>
         </p:nvSpPr>
@@ -23867,7 +24021,7 @@
       </p:sp>
       <p:sp>
         <p:nvSpPr>
-          <p:cNvPr id="104" name="Google Shape;104;p2"/>
+          <p:cNvPr id="105" name="Google Shape;105;p2"/>
           <p:cNvSpPr/>
           <p:nvPr/>
         </p:nvSpPr>
@@ -23931,7 +24085,7 @@
       </p:sp>
       <p:sp>
         <p:nvSpPr>
-          <p:cNvPr id="105" name="Google Shape;105;p2"/>
+          <p:cNvPr id="106" name="Google Shape;106;p2"/>
           <p:cNvSpPr/>
           <p:nvPr/>
         </p:nvSpPr>
@@ -23995,7 +24149,7 @@
       </p:sp>
       <p:sp>
         <p:nvSpPr>
-          <p:cNvPr id="106" name="Google Shape;106;p2"/>
+          <p:cNvPr id="107" name="Google Shape;107;p2"/>
           <p:cNvSpPr txBox="1"/>
           <p:nvPr/>
         </p:nvSpPr>
@@ -24045,7 +24199,7 @@
       </p:sp>
       <p:sp>
         <p:nvSpPr>
-          <p:cNvPr id="107" name="Google Shape;107;p2"/>
+          <p:cNvPr id="108" name="Google Shape;108;p2"/>
           <p:cNvSpPr txBox="1"/>
           <p:nvPr/>
         </p:nvSpPr>
@@ -24095,14 +24249,14 @@
       </p:sp>
       <p:sp>
         <p:nvSpPr>
-          <p:cNvPr id="108" name="Google Shape;108;p2"/>
+          <p:cNvPr id="109" name="Google Shape;109;p2"/>
           <p:cNvSpPr/>
           <p:nvPr/>
         </p:nvSpPr>
         <p:spPr>
           <a:xfrm>
-            <a:off x="7827264" y="1161288"/>
-            <a:ext cx="3520440" cy="2606040"/>
+            <a:off x="7827276" y="1161300"/>
+            <a:ext cx="3904500" cy="2606100"/>
           </a:xfrm>
           <a:prstGeom prst="rect">
             <a:avLst/>
@@ -24159,7 +24313,7 @@
       </p:sp>
       <p:sp>
         <p:nvSpPr>
-          <p:cNvPr id="109" name="Google Shape;109;p2"/>
+          <p:cNvPr id="110" name="Google Shape;110;p2"/>
           <p:cNvSpPr/>
           <p:nvPr/>
         </p:nvSpPr>
@@ -24223,7 +24377,7 @@
       </p:sp>
       <p:sp>
         <p:nvSpPr>
-          <p:cNvPr id="110" name="Google Shape;110;p2"/>
+          <p:cNvPr id="111" name="Google Shape;111;p2"/>
           <p:cNvSpPr txBox="1"/>
           <p:nvPr/>
         </p:nvSpPr>
@@ -24273,14 +24427,14 @@
       </p:sp>
       <p:sp>
         <p:nvSpPr>
-          <p:cNvPr id="111" name="Google Shape;111;p2"/>
+          <p:cNvPr id="112" name="Google Shape;112;p2"/>
           <p:cNvSpPr txBox="1"/>
           <p:nvPr/>
         </p:nvSpPr>
         <p:spPr>
           <a:xfrm>
-            <a:off x="7991856" y="1636776"/>
-            <a:ext cx="3264408" cy="2039112"/>
+            <a:off x="7991849" y="1636775"/>
+            <a:ext cx="3602700" cy="1015800"/>
           </a:xfrm>
           <a:prstGeom prst="rect">
             <a:avLst/>
@@ -24323,14 +24477,14 @@
       </p:sp>
       <p:sp>
         <p:nvSpPr>
-          <p:cNvPr id="112" name="Google Shape;112;p2"/>
+          <p:cNvPr id="113" name="Google Shape;113;p2"/>
           <p:cNvSpPr/>
           <p:nvPr/>
         </p:nvSpPr>
         <p:spPr>
           <a:xfrm>
             <a:off x="457200" y="3968496"/>
-            <a:ext cx="3648456" cy="1874519"/>
+            <a:ext cx="3648600" cy="1874400"/>
           </a:xfrm>
           <a:prstGeom prst="rect">
             <a:avLst/>
@@ -24387,7 +24541,7 @@
       </p:sp>
       <p:sp>
         <p:nvSpPr>
-          <p:cNvPr id="113" name="Google Shape;113;p2"/>
+          <p:cNvPr id="114" name="Google Shape;114;p2"/>
           <p:cNvSpPr/>
           <p:nvPr/>
         </p:nvSpPr>
@@ -24451,14 +24605,14 @@
       </p:sp>
       <p:sp>
         <p:nvSpPr>
-          <p:cNvPr id="114" name="Google Shape;114;p2"/>
+          <p:cNvPr id="115" name="Google Shape;115;p2"/>
           <p:cNvSpPr txBox="1"/>
           <p:nvPr/>
         </p:nvSpPr>
         <p:spPr>
           <a:xfrm>
             <a:off x="594360" y="4169664"/>
-            <a:ext cx="3374136" cy="822960"/>
+            <a:ext cx="3374100" cy="677100"/>
           </a:xfrm>
           <a:prstGeom prst="rect">
             <a:avLst/>
@@ -24484,7 +24638,7 @@
               <a:buNone/>
             </a:pPr>
             <a:r>
-              <a:rPr b="1" i="0" lang="en-US" sz="3800" u="none" cap="none" strike="noStrike">
+              <a:rPr b="1" lang="en-US" sz="3800">
                 <a:solidFill>
                   <a:srgbClr val="003087"/>
                 </a:solidFill>
@@ -24493,7 +24647,7 @@
                 <a:cs typeface="Calibri"/>
                 <a:sym typeface="Calibri"/>
               </a:rPr>
-              <a:t>7,300+</a:t>
+              <a:t>207</a:t>
             </a:r>
             <a:endParaRPr/>
           </a:p>
@@ -24501,14 +24655,14 @@
       </p:sp>
       <p:sp>
         <p:nvSpPr>
-          <p:cNvPr id="115" name="Google Shape;115;p2"/>
+          <p:cNvPr id="116" name="Google Shape;116;p2"/>
           <p:cNvSpPr txBox="1"/>
           <p:nvPr/>
         </p:nvSpPr>
         <p:spPr>
           <a:xfrm>
             <a:off x="594360" y="5065776"/>
-            <a:ext cx="3374136" cy="548640"/>
+            <a:ext cx="3374100" cy="292500"/>
           </a:xfrm>
           <a:prstGeom prst="rect">
             <a:avLst/>
@@ -24543,7 +24697,43 @@
                 <a:cs typeface="Calibri"/>
                 <a:sym typeface="Calibri"/>
               </a:rPr>
-              <a:t>document chunks indexed</a:t>
+              <a:t>document</a:t>
+            </a:r>
+            <a:r>
+              <a:rPr lang="en-US" sz="1300">
+                <a:solidFill>
+                  <a:srgbClr val="404040"/>
+                </a:solidFill>
+                <a:latin typeface="Calibri"/>
+                <a:ea typeface="Calibri"/>
+                <a:cs typeface="Calibri"/>
+                <a:sym typeface="Calibri"/>
+              </a:rPr>
+              <a:t>s </a:t>
+            </a:r>
+            <a:r>
+              <a:rPr b="0" i="0" lang="en-US" sz="1300" u="none" cap="none" strike="noStrike">
+                <a:solidFill>
+                  <a:srgbClr val="404040"/>
+                </a:solidFill>
+                <a:latin typeface="Calibri"/>
+                <a:ea typeface="Calibri"/>
+                <a:cs typeface="Calibri"/>
+                <a:sym typeface="Calibri"/>
+              </a:rPr>
+              <a:t>chunk</a:t>
+            </a:r>
+            <a:r>
+              <a:rPr lang="en-US" sz="1300">
+                <a:solidFill>
+                  <a:srgbClr val="404040"/>
+                </a:solidFill>
+                <a:latin typeface="Calibri"/>
+                <a:ea typeface="Calibri"/>
+                <a:cs typeface="Calibri"/>
+                <a:sym typeface="Calibri"/>
+              </a:rPr>
+              <a:t>ed</a:t>
             </a:r>
             <a:endParaRPr/>
           </a:p>
@@ -24551,7 +24741,7 @@
       </p:sp>
       <p:sp>
         <p:nvSpPr>
-          <p:cNvPr id="116" name="Google Shape;116;p2"/>
+          <p:cNvPr id="117" name="Google Shape;117;p2"/>
           <p:cNvSpPr/>
           <p:nvPr/>
         </p:nvSpPr>
@@ -24615,7 +24805,7 @@
       </p:sp>
       <p:sp>
         <p:nvSpPr>
-          <p:cNvPr id="117" name="Google Shape;117;p2"/>
+          <p:cNvPr id="118" name="Google Shape;118;p2"/>
           <p:cNvSpPr/>
           <p:nvPr/>
         </p:nvSpPr>
@@ -24679,7 +24869,7 @@
       </p:sp>
       <p:sp>
         <p:nvSpPr>
-          <p:cNvPr id="118" name="Google Shape;118;p2"/>
+          <p:cNvPr id="119" name="Google Shape;119;p2"/>
           <p:cNvSpPr txBox="1"/>
           <p:nvPr/>
         </p:nvSpPr>
@@ -24729,14 +24919,14 @@
       </p:sp>
       <p:sp>
         <p:nvSpPr>
-          <p:cNvPr id="119" name="Google Shape;119;p2"/>
+          <p:cNvPr id="120" name="Google Shape;120;p2"/>
           <p:cNvSpPr txBox="1"/>
           <p:nvPr/>
         </p:nvSpPr>
         <p:spPr>
           <a:xfrm>
             <a:off x="4407408" y="5065776"/>
-            <a:ext cx="3374136" cy="548640"/>
+            <a:ext cx="3374100" cy="292500"/>
           </a:xfrm>
           <a:prstGeom prst="rect">
             <a:avLst/>
@@ -24771,7 +24961,19 @@
                 <a:cs typeface="Calibri"/>
                 <a:sym typeface="Calibri"/>
               </a:rPr>
-              <a:t>hand-crafted test questions</a:t>
+              <a:t>hand-crafted test questions t</a:t>
+            </a:r>
+            <a:r>
+              <a:rPr lang="en-US" sz="1300">
+                <a:solidFill>
+                  <a:srgbClr val="404040"/>
+                </a:solidFill>
+                <a:latin typeface="Calibri"/>
+                <a:ea typeface="Calibri"/>
+                <a:cs typeface="Calibri"/>
+                <a:sym typeface="Calibri"/>
+              </a:rPr>
+              <a:t>o validate</a:t>
             </a:r>
             <a:endParaRPr/>
           </a:p>
@@ -24779,7 +24981,7 @@
       </p:sp>
       <p:sp>
         <p:nvSpPr>
-          <p:cNvPr id="120" name="Google Shape;120;p2"/>
+          <p:cNvPr id="121" name="Google Shape;121;p2"/>
           <p:cNvSpPr/>
           <p:nvPr/>
         </p:nvSpPr>
@@ -24843,7 +25045,7 @@
       </p:sp>
       <p:sp>
         <p:nvSpPr>
-          <p:cNvPr id="121" name="Google Shape;121;p2"/>
+          <p:cNvPr id="122" name="Google Shape;122;p2"/>
           <p:cNvSpPr/>
           <p:nvPr/>
         </p:nvSpPr>
@@ -24907,7 +25109,7 @@
       </p:sp>
       <p:sp>
         <p:nvSpPr>
-          <p:cNvPr id="122" name="Google Shape;122;p2"/>
+          <p:cNvPr id="123" name="Google Shape;123;p2"/>
           <p:cNvSpPr txBox="1"/>
           <p:nvPr/>
         </p:nvSpPr>
@@ -24957,7 +25159,7 @@
       </p:sp>
       <p:sp>
         <p:nvSpPr>
-          <p:cNvPr id="123" name="Google Shape;123;p2"/>
+          <p:cNvPr id="124" name="Google Shape;124;p2"/>
           <p:cNvSpPr txBox="1"/>
           <p:nvPr/>
         </p:nvSpPr>
@@ -25002,6 +25204,70 @@
               <a:t>all Infosys quarters covered</a:t>
             </a:r>
             <a:endParaRPr/>
+          </a:p>
+        </p:txBody>
+      </p:sp>
+      <p:sp>
+        <p:nvSpPr>
+          <p:cNvPr id="125" name="Google Shape;125;p2"/>
+          <p:cNvSpPr/>
+          <p:nvPr/>
+        </p:nvSpPr>
+        <p:spPr>
+          <a:xfrm>
+            <a:off x="457075" y="1161300"/>
+            <a:ext cx="63900" cy="2606100"/>
+          </a:xfrm>
+          <a:prstGeom prst="rect">
+            <a:avLst/>
+          </a:prstGeom>
+          <a:solidFill>
+            <a:srgbClr val="003087"/>
+          </a:solidFill>
+          <a:ln cap="flat" cmpd="sng" w="9525">
+            <a:solidFill>
+              <a:srgbClr val="4A7DBA"/>
+            </a:solidFill>
+            <a:prstDash val="solid"/>
+            <a:round/>
+            <a:headEnd len="sm" w="sm" type="none"/>
+            <a:tailEnd len="sm" w="sm" type="none"/>
+          </a:ln>
+          <a:effectLst>
+            <a:outerShdw blurRad="40000" rotWithShape="0" dir="5400000" dist="23000">
+              <a:srgbClr val="000000">
+                <a:alpha val="34900"/>
+              </a:srgbClr>
+            </a:outerShdw>
+          </a:effectLst>
+        </p:spPr>
+        <p:txBody>
+          <a:bodyPr anchorCtr="0" anchor="ctr" bIns="45700" lIns="91425" spcFirstLastPara="1" rIns="91425" wrap="square" tIns="45700">
+            <a:noAutofit/>
+          </a:bodyPr>
+          <a:lstStyle/>
+          <a:p>
+            <a:pPr indent="0" lvl="0" marL="0" marR="0" rtl="0" algn="ctr">
+              <a:spcBef>
+                <a:spcPts val="0"/>
+              </a:spcBef>
+              <a:spcAft>
+                <a:spcPts val="0"/>
+              </a:spcAft>
+              <a:buNone/>
+            </a:pPr>
+            <a:r>
+              <a:t/>
+            </a:r>
+            <a:endParaRPr b="0" i="0" sz="1800" u="none" cap="none" strike="noStrike">
+              <a:solidFill>
+                <a:schemeClr val="dk1"/>
+              </a:solidFill>
+              <a:latin typeface="Calibri"/>
+              <a:ea typeface="Calibri"/>
+              <a:cs typeface="Calibri"/>
+              <a:sym typeface="Calibri"/>
+            </a:endParaRPr>
           </a:p>
         </p:txBody>
       </p:sp>
@@ -25018,7 +25284,7 @@
   <p:cSld>
     <p:spTree>
       <p:nvGrpSpPr>
-        <p:cNvPr id="127" name="Shape 127"/>
+        <p:cNvPr id="129" name="Shape 129"/>
         <p:cNvGrpSpPr/>
         <p:nvPr/>
       </p:nvGrpSpPr>
@@ -25032,7 +25298,7 @@
       </p:grpSpPr>
       <p:sp>
         <p:nvSpPr>
-          <p:cNvPr id="128" name="Google Shape;128;p3"/>
+          <p:cNvPr id="130" name="Google Shape;130;p3"/>
           <p:cNvSpPr/>
           <p:nvPr/>
         </p:nvSpPr>
@@ -25096,7 +25362,7 @@
       </p:sp>
       <p:sp>
         <p:nvSpPr>
-          <p:cNvPr id="129" name="Google Shape;129;p3"/>
+          <p:cNvPr id="131" name="Google Shape;131;p3"/>
           <p:cNvSpPr/>
           <p:nvPr/>
         </p:nvSpPr>
@@ -25160,7 +25426,7 @@
       </p:sp>
       <p:sp>
         <p:nvSpPr>
-          <p:cNvPr id="130" name="Google Shape;130;p3"/>
+          <p:cNvPr id="132" name="Google Shape;132;p3"/>
           <p:cNvSpPr txBox="1"/>
           <p:nvPr/>
         </p:nvSpPr>
@@ -25210,7 +25476,7 @@
       </p:sp>
       <p:sp>
         <p:nvSpPr>
-          <p:cNvPr id="131" name="Google Shape;131;p3"/>
+          <p:cNvPr id="133" name="Google Shape;133;p3"/>
           <p:cNvSpPr txBox="1"/>
           <p:nvPr/>
         </p:nvSpPr>
@@ -25260,7 +25526,7 @@
       </p:sp>
       <p:sp>
         <p:nvSpPr>
-          <p:cNvPr id="132" name="Google Shape;132;p3"/>
+          <p:cNvPr id="134" name="Google Shape;134;p3"/>
           <p:cNvSpPr txBox="1"/>
           <p:nvPr/>
         </p:nvSpPr>
@@ -25310,14 +25576,14 @@
       </p:sp>
       <p:sp>
         <p:nvSpPr>
-          <p:cNvPr id="133" name="Google Shape;133;p3"/>
+          <p:cNvPr id="135" name="Google Shape;135;p3"/>
           <p:cNvSpPr/>
           <p:nvPr/>
         </p:nvSpPr>
         <p:spPr>
           <a:xfrm>
-            <a:off x="457200" y="1124712"/>
-            <a:ext cx="2084831" cy="4617720"/>
+            <a:off x="594363" y="1321839"/>
+            <a:ext cx="2084700" cy="4617600"/>
           </a:xfrm>
           <a:prstGeom prst="rect">
             <a:avLst/>
@@ -25374,14 +25640,14 @@
       </p:sp>
       <p:sp>
         <p:nvSpPr>
-          <p:cNvPr id="134" name="Google Shape;134;p3"/>
+          <p:cNvPr id="136" name="Google Shape;136;p3"/>
           <p:cNvSpPr/>
           <p:nvPr/>
         </p:nvSpPr>
         <p:spPr>
           <a:xfrm>
-            <a:off x="457200" y="1124712"/>
-            <a:ext cx="2084831" cy="128016"/>
+            <a:off x="594363" y="1238837"/>
+            <a:ext cx="2084700" cy="128100"/>
           </a:xfrm>
           <a:prstGeom prst="rect">
             <a:avLst/>
@@ -25438,14 +25704,14 @@
       </p:sp>
       <p:sp>
         <p:nvSpPr>
-          <p:cNvPr id="135" name="Google Shape;135;p3"/>
+          <p:cNvPr id="137" name="Google Shape;137;p3"/>
           <p:cNvSpPr txBox="1"/>
           <p:nvPr/>
         </p:nvSpPr>
         <p:spPr>
           <a:xfrm>
-            <a:off x="566928" y="1307592"/>
-            <a:ext cx="1865375" cy="621792"/>
+            <a:off x="704090" y="1421717"/>
+            <a:ext cx="1865400" cy="492600"/>
           </a:xfrm>
           <a:prstGeom prst="rect">
             <a:avLst/>
@@ -25512,14 +25778,14 @@
       </p:sp>
       <p:sp>
         <p:nvSpPr>
-          <p:cNvPr id="136" name="Google Shape;136;p3"/>
+          <p:cNvPr id="138" name="Google Shape;138;p3"/>
           <p:cNvSpPr/>
           <p:nvPr/>
         </p:nvSpPr>
         <p:spPr>
           <a:xfrm>
-            <a:off x="594360" y="1984248"/>
-            <a:ext cx="1810511" cy="27432"/>
+            <a:off x="731523" y="2098373"/>
+            <a:ext cx="1810500" cy="27300"/>
           </a:xfrm>
           <a:prstGeom prst="rect">
             <a:avLst/>
@@ -25576,14 +25842,14 @@
       </p:sp>
       <p:sp>
         <p:nvSpPr>
-          <p:cNvPr id="137" name="Google Shape;137;p3"/>
+          <p:cNvPr id="139" name="Google Shape;139;p3"/>
           <p:cNvSpPr txBox="1"/>
           <p:nvPr/>
         </p:nvSpPr>
         <p:spPr>
           <a:xfrm>
-            <a:off x="548640" y="2075688"/>
-            <a:ext cx="1901951" cy="1005840"/>
+            <a:off x="685803" y="2272815"/>
+            <a:ext cx="1902000" cy="677100"/>
           </a:xfrm>
           <a:prstGeom prst="rect">
             <a:avLst/>
@@ -25609,7 +25875,7 @@
               <a:buNone/>
             </a:pPr>
             <a:r>
-              <a:rPr b="1" i="0" lang="en-US" sz="3800" u="none" cap="none" strike="noStrike">
+              <a:rPr b="1" lang="en-US" sz="3800">
                 <a:solidFill>
                   <a:srgbClr val="003087"/>
                 </a:solidFill>
@@ -25618,7 +25884,7 @@
                 <a:cs typeface="Calibri"/>
                 <a:sym typeface="Calibri"/>
               </a:rPr>
-              <a:t>7,004</a:t>
+              <a:t>180</a:t>
             </a:r>
             <a:endParaRPr/>
           </a:p>
@@ -25626,14 +25892,14 @@
       </p:sp>
       <p:sp>
         <p:nvSpPr>
-          <p:cNvPr id="138" name="Google Shape;138;p3"/>
+          <p:cNvPr id="140" name="Google Shape;140;p3"/>
           <p:cNvSpPr txBox="1"/>
           <p:nvPr/>
         </p:nvSpPr>
         <p:spPr>
           <a:xfrm>
-            <a:off x="548640" y="3099816"/>
-            <a:ext cx="1901951" cy="713232"/>
+            <a:off x="685803" y="3296943"/>
+            <a:ext cx="1902000" cy="276900"/>
           </a:xfrm>
           <a:prstGeom prst="rect">
             <a:avLst/>
@@ -25659,7 +25925,7 @@
               <a:buNone/>
             </a:pPr>
             <a:r>
-              <a:rPr b="0" i="0" lang="en-US" sz="1200" u="none" cap="none" strike="noStrike">
+              <a:rPr lang="en-US" sz="1200">
                 <a:solidFill>
                   <a:srgbClr val="003087"/>
                 </a:solidFill>
@@ -25668,46 +25934,22 @@
                 <a:cs typeface="Calibri"/>
                 <a:sym typeface="Calibri"/>
               </a:rPr>
-              <a:t>chunks</a:t>
+              <a:t>NSE filings</a:t>
             </a:r>
             <a:endParaRPr/>
           </a:p>
-          <a:p>
-            <a:pPr indent="0" lvl="0" marL="0" marR="0" rtl="0" algn="ctr">
-              <a:spcBef>
-                <a:spcPts val="0"/>
-              </a:spcBef>
-              <a:spcAft>
-                <a:spcPts val="0"/>
-              </a:spcAft>
-              <a:buNone/>
-            </a:pPr>
-            <a:r>
-              <a:rPr b="0" i="0" lang="en-US" sz="1200" u="none" cap="none" strike="noStrike">
-                <a:solidFill>
-                  <a:srgbClr val="003087"/>
-                </a:solidFill>
-                <a:latin typeface="Calibri"/>
-                <a:ea typeface="Calibri"/>
-                <a:cs typeface="Calibri"/>
-                <a:sym typeface="Calibri"/>
-              </a:rPr>
-              <a:t>from 4,001 PDFs</a:t>
-            </a:r>
-            <a:endParaRPr/>
-          </a:p>
-        </p:txBody>
-      </p:sp>
-      <p:sp>
-        <p:nvSpPr>
-          <p:cNvPr id="139" name="Google Shape;139;p3"/>
+        </p:txBody>
+      </p:sp>
+      <p:sp>
+        <p:nvSpPr>
+          <p:cNvPr id="141" name="Google Shape;141;p3"/>
           <p:cNvSpPr/>
           <p:nvPr/>
         </p:nvSpPr>
         <p:spPr>
           <a:xfrm>
-            <a:off x="594360" y="3886200"/>
-            <a:ext cx="1810511" cy="27432"/>
+            <a:off x="731523" y="4000325"/>
+            <a:ext cx="1810500" cy="27300"/>
           </a:xfrm>
           <a:prstGeom prst="rect">
             <a:avLst/>
@@ -25764,14 +26006,14 @@
       </p:sp>
       <p:sp>
         <p:nvSpPr>
-          <p:cNvPr id="140" name="Google Shape;140;p3"/>
+          <p:cNvPr id="142" name="Google Shape;142;p3"/>
           <p:cNvSpPr txBox="1"/>
           <p:nvPr/>
         </p:nvSpPr>
         <p:spPr>
           <a:xfrm>
-            <a:off x="566928" y="3995928"/>
-            <a:ext cx="1865375" cy="1572768"/>
+            <a:off x="704090" y="4110053"/>
+            <a:ext cx="1865400" cy="600300"/>
           </a:xfrm>
           <a:prstGeom prst="rect">
             <a:avLst/>
@@ -25862,14 +26104,14 @@
       </p:sp>
       <p:sp>
         <p:nvSpPr>
-          <p:cNvPr id="141" name="Google Shape;141;p3"/>
+          <p:cNvPr id="143" name="Google Shape;143;p3"/>
           <p:cNvSpPr/>
           <p:nvPr/>
         </p:nvSpPr>
         <p:spPr>
           <a:xfrm>
-            <a:off x="2642615" y="1124712"/>
-            <a:ext cx="2084831" cy="4617720"/>
+            <a:off x="2779778" y="1321839"/>
+            <a:ext cx="2084700" cy="4617600"/>
           </a:xfrm>
           <a:prstGeom prst="rect">
             <a:avLst/>
@@ -25926,14 +26168,14 @@
       </p:sp>
       <p:sp>
         <p:nvSpPr>
-          <p:cNvPr id="142" name="Google Shape;142;p3"/>
+          <p:cNvPr id="144" name="Google Shape;144;p3"/>
           <p:cNvSpPr/>
           <p:nvPr/>
         </p:nvSpPr>
         <p:spPr>
           <a:xfrm>
-            <a:off x="2642615" y="1124712"/>
-            <a:ext cx="2084831" cy="128016"/>
+            <a:off x="2779778" y="1238837"/>
+            <a:ext cx="2084700" cy="128100"/>
           </a:xfrm>
           <a:prstGeom prst="rect">
             <a:avLst/>
@@ -25990,14 +26232,14 @@
       </p:sp>
       <p:sp>
         <p:nvSpPr>
-          <p:cNvPr id="143" name="Google Shape;143;p3"/>
+          <p:cNvPr id="145" name="Google Shape;145;p3"/>
           <p:cNvSpPr txBox="1"/>
           <p:nvPr/>
         </p:nvSpPr>
         <p:spPr>
           <a:xfrm>
-            <a:off x="2752343" y="1307592"/>
-            <a:ext cx="1865375" cy="621792"/>
+            <a:off x="2889506" y="1421717"/>
+            <a:ext cx="1865400" cy="492600"/>
           </a:xfrm>
           <a:prstGeom prst="rect">
             <a:avLst/>
@@ -26064,14 +26306,14 @@
       </p:sp>
       <p:sp>
         <p:nvSpPr>
-          <p:cNvPr id="144" name="Google Shape;144;p3"/>
+          <p:cNvPr id="146" name="Google Shape;146;p3"/>
           <p:cNvSpPr/>
           <p:nvPr/>
         </p:nvSpPr>
         <p:spPr>
           <a:xfrm>
-            <a:off x="2779775" y="1984248"/>
-            <a:ext cx="1810511" cy="27432"/>
+            <a:off x="2916938" y="2098373"/>
+            <a:ext cx="1810500" cy="27300"/>
           </a:xfrm>
           <a:prstGeom prst="rect">
             <a:avLst/>
@@ -26128,14 +26370,14 @@
       </p:sp>
       <p:sp>
         <p:nvSpPr>
-          <p:cNvPr id="145" name="Google Shape;145;p3"/>
+          <p:cNvPr id="147" name="Google Shape;147;p3"/>
           <p:cNvSpPr txBox="1"/>
           <p:nvPr/>
         </p:nvSpPr>
         <p:spPr>
           <a:xfrm>
-            <a:off x="2734055" y="2075688"/>
-            <a:ext cx="1901951" cy="1005840"/>
+            <a:off x="2871218" y="2272815"/>
+            <a:ext cx="1902000" cy="800400"/>
           </a:xfrm>
           <a:prstGeom prst="rect">
             <a:avLst/>
@@ -26161,7 +26403,7 @@
               <a:buNone/>
             </a:pPr>
             <a:r>
-              <a:rPr b="1" i="0" lang="en-US" sz="4600" u="none" cap="none" strike="noStrike">
+              <a:rPr b="1" lang="en-US" sz="4600">
                 <a:solidFill>
                   <a:srgbClr val="007048"/>
                 </a:solidFill>
@@ -26170,7 +26412,7 @@
                 <a:cs typeface="Calibri"/>
                 <a:sym typeface="Calibri"/>
               </a:rPr>
-              <a:t>270</a:t>
+              <a:t>16</a:t>
             </a:r>
             <a:endParaRPr/>
           </a:p>
@@ -26178,14 +26420,14 @@
       </p:sp>
       <p:sp>
         <p:nvSpPr>
-          <p:cNvPr id="146" name="Google Shape;146;p3"/>
+          <p:cNvPr id="148" name="Google Shape;148;p3"/>
           <p:cNvSpPr txBox="1"/>
           <p:nvPr/>
         </p:nvSpPr>
         <p:spPr>
           <a:xfrm>
-            <a:off x="2734055" y="3099816"/>
-            <a:ext cx="1901951" cy="713232"/>
+            <a:off x="2871218" y="3296943"/>
+            <a:ext cx="1902000" cy="276900"/>
           </a:xfrm>
           <a:prstGeom prst="rect">
             <a:avLst/>
@@ -26228,14 +26470,14 @@
       </p:sp>
       <p:sp>
         <p:nvSpPr>
-          <p:cNvPr id="147" name="Google Shape;147;p3"/>
+          <p:cNvPr id="149" name="Google Shape;149;p3"/>
           <p:cNvSpPr/>
           <p:nvPr/>
         </p:nvSpPr>
         <p:spPr>
           <a:xfrm>
-            <a:off x="2779775" y="3886200"/>
-            <a:ext cx="1810511" cy="27432"/>
+            <a:off x="2916938" y="4000325"/>
+            <a:ext cx="1810500" cy="27300"/>
           </a:xfrm>
           <a:prstGeom prst="rect">
             <a:avLst/>
@@ -26292,14 +26534,14 @@
       </p:sp>
       <p:sp>
         <p:nvSpPr>
-          <p:cNvPr id="148" name="Google Shape;148;p3"/>
+          <p:cNvPr id="150" name="Google Shape;150;p3"/>
           <p:cNvSpPr txBox="1"/>
           <p:nvPr/>
         </p:nvSpPr>
         <p:spPr>
           <a:xfrm>
-            <a:off x="2752343" y="3995928"/>
-            <a:ext cx="1865375" cy="1572768"/>
+            <a:off x="2889506" y="4110053"/>
+            <a:ext cx="1865400" cy="600300"/>
           </a:xfrm>
           <a:prstGeom prst="rect">
             <a:avLst/>
@@ -26390,14 +26632,14 @@
       </p:sp>
       <p:sp>
         <p:nvSpPr>
-          <p:cNvPr id="149" name="Google Shape;149;p3"/>
+          <p:cNvPr id="151" name="Google Shape;151;p3"/>
           <p:cNvSpPr/>
           <p:nvPr/>
         </p:nvSpPr>
         <p:spPr>
           <a:xfrm>
-            <a:off x="4828030" y="1124712"/>
-            <a:ext cx="2084831" cy="4617720"/>
+            <a:off x="4965193" y="1321839"/>
+            <a:ext cx="2084700" cy="4617600"/>
           </a:xfrm>
           <a:prstGeom prst="rect">
             <a:avLst/>
@@ -26454,14 +26696,14 @@
       </p:sp>
       <p:sp>
         <p:nvSpPr>
-          <p:cNvPr id="150" name="Google Shape;150;p3"/>
+          <p:cNvPr id="152" name="Google Shape;152;p3"/>
           <p:cNvSpPr/>
           <p:nvPr/>
         </p:nvSpPr>
         <p:spPr>
           <a:xfrm>
-            <a:off x="4828030" y="1124712"/>
-            <a:ext cx="2084831" cy="128016"/>
+            <a:off x="4965193" y="1238837"/>
+            <a:ext cx="2084700" cy="128100"/>
           </a:xfrm>
           <a:prstGeom prst="rect">
             <a:avLst/>
@@ -26518,14 +26760,14 @@
       </p:sp>
       <p:sp>
         <p:nvSpPr>
-          <p:cNvPr id="151" name="Google Shape;151;p3"/>
+          <p:cNvPr id="153" name="Google Shape;153;p3"/>
           <p:cNvSpPr txBox="1"/>
           <p:nvPr/>
         </p:nvSpPr>
         <p:spPr>
           <a:xfrm>
-            <a:off x="4937758" y="1307592"/>
-            <a:ext cx="1865375" cy="621792"/>
+            <a:off x="5074921" y="1421717"/>
+            <a:ext cx="1865400" cy="292500"/>
           </a:xfrm>
           <a:prstGeom prst="rect">
             <a:avLst/>
@@ -26568,14 +26810,14 @@
       </p:sp>
       <p:sp>
         <p:nvSpPr>
-          <p:cNvPr id="152" name="Google Shape;152;p3"/>
+          <p:cNvPr id="154" name="Google Shape;154;p3"/>
           <p:cNvSpPr/>
           <p:nvPr/>
         </p:nvSpPr>
         <p:spPr>
           <a:xfrm>
-            <a:off x="4965190" y="1984248"/>
-            <a:ext cx="1810511" cy="27432"/>
+            <a:off x="5102353" y="2098373"/>
+            <a:ext cx="1810500" cy="27300"/>
           </a:xfrm>
           <a:prstGeom prst="rect">
             <a:avLst/>
@@ -26632,14 +26874,14 @@
       </p:sp>
       <p:sp>
         <p:nvSpPr>
-          <p:cNvPr id="153" name="Google Shape;153;p3"/>
+          <p:cNvPr id="155" name="Google Shape;155;p3"/>
           <p:cNvSpPr txBox="1"/>
           <p:nvPr/>
         </p:nvSpPr>
         <p:spPr>
           <a:xfrm>
-            <a:off x="4919470" y="2075688"/>
-            <a:ext cx="1901951" cy="1005840"/>
+            <a:off x="5056633" y="2272815"/>
+            <a:ext cx="1902000" cy="800400"/>
           </a:xfrm>
           <a:prstGeom prst="rect">
             <a:avLst/>
@@ -26665,7 +26907,7 @@
               <a:buNone/>
             </a:pPr>
             <a:r>
-              <a:rPr b="1" i="0" lang="en-US" sz="4600" u="none" cap="none" strike="noStrike">
+              <a:rPr b="1" lang="en-US" sz="4600">
                 <a:solidFill>
                   <a:srgbClr val="D08000"/>
                 </a:solidFill>
@@ -26674,7 +26916,7 @@
                 <a:cs typeface="Calibri"/>
                 <a:sym typeface="Calibri"/>
               </a:rPr>
-              <a:t>15</a:t>
+              <a:t>5</a:t>
             </a:r>
             <a:endParaRPr/>
           </a:p>
@@ -26682,14 +26924,14 @@
       </p:sp>
       <p:sp>
         <p:nvSpPr>
-          <p:cNvPr id="154" name="Google Shape;154;p3"/>
+          <p:cNvPr id="156" name="Google Shape;156;p3"/>
           <p:cNvSpPr txBox="1"/>
           <p:nvPr/>
         </p:nvSpPr>
         <p:spPr>
           <a:xfrm>
-            <a:off x="4919470" y="3099816"/>
-            <a:ext cx="1901951" cy="713232"/>
+            <a:off x="5056633" y="3296943"/>
+            <a:ext cx="1902000" cy="461700"/>
           </a:xfrm>
           <a:prstGeom prst="rect">
             <a:avLst/>
@@ -26756,14 +26998,14 @@
       </p:sp>
       <p:sp>
         <p:nvSpPr>
-          <p:cNvPr id="155" name="Google Shape;155;p3"/>
+          <p:cNvPr id="157" name="Google Shape;157;p3"/>
           <p:cNvSpPr/>
           <p:nvPr/>
         </p:nvSpPr>
         <p:spPr>
           <a:xfrm>
-            <a:off x="4965190" y="3886200"/>
-            <a:ext cx="1810511" cy="27432"/>
+            <a:off x="5102353" y="4000325"/>
+            <a:ext cx="1810500" cy="27300"/>
           </a:xfrm>
           <a:prstGeom prst="rect">
             <a:avLst/>
@@ -26820,14 +27062,14 @@
       </p:sp>
       <p:sp>
         <p:nvSpPr>
-          <p:cNvPr id="156" name="Google Shape;156;p3"/>
+          <p:cNvPr id="158" name="Google Shape;158;p3"/>
           <p:cNvSpPr txBox="1"/>
           <p:nvPr/>
         </p:nvSpPr>
         <p:spPr>
           <a:xfrm>
-            <a:off x="4937758" y="3995928"/>
-            <a:ext cx="1865375" cy="1572768"/>
+            <a:off x="5074921" y="4110053"/>
+            <a:ext cx="1865400" cy="430800"/>
           </a:xfrm>
           <a:prstGeom prst="rect">
             <a:avLst/>
@@ -26894,14 +27136,14 @@
       </p:sp>
       <p:sp>
         <p:nvSpPr>
-          <p:cNvPr id="157" name="Google Shape;157;p3"/>
+          <p:cNvPr id="159" name="Google Shape;159;p3"/>
           <p:cNvSpPr/>
           <p:nvPr/>
         </p:nvSpPr>
         <p:spPr>
           <a:xfrm>
-            <a:off x="7013445" y="1124712"/>
-            <a:ext cx="2084831" cy="4617720"/>
+            <a:off x="7150608" y="1321839"/>
+            <a:ext cx="2084700" cy="4617600"/>
           </a:xfrm>
           <a:prstGeom prst="rect">
             <a:avLst/>
@@ -26958,14 +27200,14 @@
       </p:sp>
       <p:sp>
         <p:nvSpPr>
-          <p:cNvPr id="158" name="Google Shape;158;p3"/>
+          <p:cNvPr id="160" name="Google Shape;160;p3"/>
           <p:cNvSpPr/>
           <p:nvPr/>
         </p:nvSpPr>
         <p:spPr>
           <a:xfrm>
-            <a:off x="7013445" y="1124712"/>
-            <a:ext cx="2084831" cy="128016"/>
+            <a:off x="7150608" y="1238837"/>
+            <a:ext cx="2084700" cy="128100"/>
           </a:xfrm>
           <a:prstGeom prst="rect">
             <a:avLst/>
@@ -27022,14 +27264,14 @@
       </p:sp>
       <p:sp>
         <p:nvSpPr>
-          <p:cNvPr id="159" name="Google Shape;159;p3"/>
+          <p:cNvPr id="161" name="Google Shape;161;p3"/>
           <p:cNvSpPr txBox="1"/>
           <p:nvPr/>
         </p:nvSpPr>
         <p:spPr>
           <a:xfrm>
-            <a:off x="7123173" y="1307592"/>
-            <a:ext cx="1865375" cy="621792"/>
+            <a:off x="7260336" y="1421717"/>
+            <a:ext cx="1865400" cy="492600"/>
           </a:xfrm>
           <a:prstGeom prst="rect">
             <a:avLst/>
@@ -27096,14 +27338,14 @@
       </p:sp>
       <p:sp>
         <p:nvSpPr>
-          <p:cNvPr id="160" name="Google Shape;160;p3"/>
+          <p:cNvPr id="162" name="Google Shape;162;p3"/>
           <p:cNvSpPr/>
           <p:nvPr/>
         </p:nvSpPr>
         <p:spPr>
           <a:xfrm>
-            <a:off x="7150605" y="1984248"/>
-            <a:ext cx="1810511" cy="27432"/>
+            <a:off x="7287768" y="2098373"/>
+            <a:ext cx="1810500" cy="27300"/>
           </a:xfrm>
           <a:prstGeom prst="rect">
             <a:avLst/>
@@ -27160,14 +27402,14 @@
       </p:sp>
       <p:sp>
         <p:nvSpPr>
-          <p:cNvPr id="161" name="Google Shape;161;p3"/>
+          <p:cNvPr id="163" name="Google Shape;163;p3"/>
           <p:cNvSpPr txBox="1"/>
           <p:nvPr/>
         </p:nvSpPr>
         <p:spPr>
           <a:xfrm>
-            <a:off x="7104885" y="2075688"/>
-            <a:ext cx="1901951" cy="1005840"/>
+            <a:off x="7242048" y="2272815"/>
+            <a:ext cx="1902000" cy="800400"/>
           </a:xfrm>
           <a:prstGeom prst="rect">
             <a:avLst/>
@@ -27193,7 +27435,7 @@
               <a:buNone/>
             </a:pPr>
             <a:r>
-              <a:rPr b="1" i="0" lang="en-US" sz="4600" u="none" cap="none" strike="noStrike">
+              <a:rPr b="1" lang="en-US" sz="4600">
                 <a:solidFill>
                   <a:srgbClr val="C01020"/>
                 </a:solidFill>
@@ -27202,7 +27444,7 @@
                 <a:cs typeface="Calibri"/>
                 <a:sym typeface="Calibri"/>
               </a:rPr>
-              <a:t>18</a:t>
+              <a:t>6</a:t>
             </a:r>
             <a:endParaRPr/>
           </a:p>
@@ -27210,14 +27452,14 @@
       </p:sp>
       <p:sp>
         <p:nvSpPr>
-          <p:cNvPr id="162" name="Google Shape;162;p3"/>
+          <p:cNvPr id="164" name="Google Shape;164;p3"/>
           <p:cNvSpPr txBox="1"/>
           <p:nvPr/>
         </p:nvSpPr>
         <p:spPr>
           <a:xfrm>
-            <a:off x="7104885" y="3099816"/>
-            <a:ext cx="1901951" cy="713232"/>
+            <a:off x="7242048" y="3296943"/>
+            <a:ext cx="1902000" cy="461700"/>
           </a:xfrm>
           <a:prstGeom prst="rect">
             <a:avLst/>
@@ -27284,14 +27526,14 @@
       </p:sp>
       <p:sp>
         <p:nvSpPr>
-          <p:cNvPr id="163" name="Google Shape;163;p3"/>
+          <p:cNvPr id="165" name="Google Shape;165;p3"/>
           <p:cNvSpPr/>
           <p:nvPr/>
         </p:nvSpPr>
         <p:spPr>
           <a:xfrm>
-            <a:off x="7150605" y="3886200"/>
-            <a:ext cx="1810511" cy="27432"/>
+            <a:off x="7287768" y="4000325"/>
+            <a:ext cx="1810500" cy="27300"/>
           </a:xfrm>
           <a:prstGeom prst="rect">
             <a:avLst/>
@@ -27348,14 +27590,14 @@
       </p:sp>
       <p:sp>
         <p:nvSpPr>
-          <p:cNvPr id="164" name="Google Shape;164;p3"/>
+          <p:cNvPr id="166" name="Google Shape;166;p3"/>
           <p:cNvSpPr txBox="1"/>
           <p:nvPr/>
         </p:nvSpPr>
         <p:spPr>
           <a:xfrm>
-            <a:off x="7123173" y="3995928"/>
-            <a:ext cx="1865375" cy="1572768"/>
+            <a:off x="7260336" y="4110053"/>
+            <a:ext cx="1865400" cy="430800"/>
           </a:xfrm>
           <a:prstGeom prst="rect">
             <a:avLst/>
@@ -27422,14 +27664,14 @@
       </p:sp>
       <p:sp>
         <p:nvSpPr>
-          <p:cNvPr id="165" name="Google Shape;165;p3"/>
+          <p:cNvPr id="167" name="Google Shape;167;p3"/>
           <p:cNvSpPr/>
           <p:nvPr/>
         </p:nvSpPr>
         <p:spPr>
           <a:xfrm>
-            <a:off x="9198860" y="1124712"/>
-            <a:ext cx="2084831" cy="4617720"/>
+            <a:off x="9336023" y="1321839"/>
+            <a:ext cx="2084700" cy="4617600"/>
           </a:xfrm>
           <a:prstGeom prst="rect">
             <a:avLst/>
@@ -27486,14 +27728,14 @@
       </p:sp>
       <p:sp>
         <p:nvSpPr>
-          <p:cNvPr id="166" name="Google Shape;166;p3"/>
+          <p:cNvPr id="168" name="Google Shape;168;p3"/>
           <p:cNvSpPr/>
           <p:nvPr/>
         </p:nvSpPr>
         <p:spPr>
           <a:xfrm>
-            <a:off x="9198860" y="1124712"/>
-            <a:ext cx="2084831" cy="128016"/>
+            <a:off x="9336023" y="1238837"/>
+            <a:ext cx="2084700" cy="128100"/>
           </a:xfrm>
           <a:prstGeom prst="rect">
             <a:avLst/>
@@ -27550,14 +27792,14 @@
       </p:sp>
       <p:sp>
         <p:nvSpPr>
-          <p:cNvPr id="167" name="Google Shape;167;p3"/>
+          <p:cNvPr id="169" name="Google Shape;169;p3"/>
           <p:cNvSpPr txBox="1"/>
           <p:nvPr/>
         </p:nvSpPr>
         <p:spPr>
           <a:xfrm>
-            <a:off x="9308588" y="1307592"/>
-            <a:ext cx="1865375" cy="621792"/>
+            <a:off x="9445751" y="1421717"/>
+            <a:ext cx="1865400" cy="492600"/>
           </a:xfrm>
           <a:prstGeom prst="rect">
             <a:avLst/>
@@ -27624,14 +27866,14 @@
       </p:sp>
       <p:sp>
         <p:nvSpPr>
-          <p:cNvPr id="168" name="Google Shape;168;p3"/>
+          <p:cNvPr id="170" name="Google Shape;170;p3"/>
           <p:cNvSpPr/>
           <p:nvPr/>
         </p:nvSpPr>
         <p:spPr>
           <a:xfrm>
-            <a:off x="9336020" y="1984248"/>
-            <a:ext cx="1810511" cy="27432"/>
+            <a:off x="9473183" y="2098373"/>
+            <a:ext cx="1810500" cy="27300"/>
           </a:xfrm>
           <a:prstGeom prst="rect">
             <a:avLst/>
@@ -27688,14 +27930,14 @@
       </p:sp>
       <p:sp>
         <p:nvSpPr>
-          <p:cNvPr id="169" name="Google Shape;169;p3"/>
+          <p:cNvPr id="171" name="Google Shape;171;p3"/>
           <p:cNvSpPr txBox="1"/>
           <p:nvPr/>
         </p:nvSpPr>
         <p:spPr>
           <a:xfrm>
-            <a:off x="9290300" y="2075688"/>
-            <a:ext cx="1901951" cy="1005840"/>
+            <a:off x="9427463" y="2272815"/>
+            <a:ext cx="1902000" cy="800400"/>
           </a:xfrm>
           <a:prstGeom prst="rect">
             <a:avLst/>
@@ -27738,14 +27980,14 @@
       </p:sp>
       <p:sp>
         <p:nvSpPr>
-          <p:cNvPr id="170" name="Google Shape;170;p3"/>
+          <p:cNvPr id="172" name="Google Shape;172;p3"/>
           <p:cNvSpPr txBox="1"/>
           <p:nvPr/>
         </p:nvSpPr>
         <p:spPr>
           <a:xfrm>
-            <a:off x="9290300" y="3099816"/>
-            <a:ext cx="1901951" cy="713232"/>
+            <a:off x="9427463" y="3296943"/>
+            <a:ext cx="1902000" cy="461700"/>
           </a:xfrm>
           <a:prstGeom prst="rect">
             <a:avLst/>
@@ -27812,14 +28054,14 @@
       </p:sp>
       <p:sp>
         <p:nvSpPr>
-          <p:cNvPr id="171" name="Google Shape;171;p3"/>
+          <p:cNvPr id="173" name="Google Shape;173;p3"/>
           <p:cNvSpPr/>
           <p:nvPr/>
         </p:nvSpPr>
         <p:spPr>
           <a:xfrm>
-            <a:off x="9336020" y="3886200"/>
-            <a:ext cx="1810511" cy="27432"/>
+            <a:off x="9473183" y="4000325"/>
+            <a:ext cx="1810500" cy="27300"/>
           </a:xfrm>
           <a:prstGeom prst="rect">
             <a:avLst/>
@@ -27876,14 +28118,14 @@
       </p:sp>
       <p:sp>
         <p:nvSpPr>
-          <p:cNvPr id="172" name="Google Shape;172;p3"/>
+          <p:cNvPr id="174" name="Google Shape;174;p3"/>
           <p:cNvSpPr txBox="1"/>
           <p:nvPr/>
         </p:nvSpPr>
         <p:spPr>
           <a:xfrm>
-            <a:off x="9308588" y="3995928"/>
-            <a:ext cx="1865375" cy="1572768"/>
+            <a:off x="9445751" y="4110053"/>
+            <a:ext cx="1865400" cy="430800"/>
           </a:xfrm>
           <a:prstGeom prst="rect">
             <a:avLst/>
@@ -27950,14 +28192,14 @@
       </p:sp>
       <p:sp>
         <p:nvSpPr>
-          <p:cNvPr id="173" name="Google Shape;173;p3"/>
+          <p:cNvPr id="175" name="Google Shape;175;p3"/>
           <p:cNvSpPr/>
           <p:nvPr/>
         </p:nvSpPr>
         <p:spPr>
           <a:xfrm>
-            <a:off x="457200" y="6236208"/>
-            <a:ext cx="11274552" cy="411480"/>
+            <a:off x="594363" y="6092877"/>
+            <a:ext cx="10817400" cy="503100"/>
           </a:xfrm>
           <a:prstGeom prst="rect">
             <a:avLst/>
@@ -28014,14 +28256,14 @@
       </p:sp>
       <p:sp>
         <p:nvSpPr>
-          <p:cNvPr id="174" name="Google Shape;174;p3"/>
+          <p:cNvPr id="176" name="Google Shape;176;p3"/>
           <p:cNvSpPr txBox="1"/>
           <p:nvPr/>
         </p:nvSpPr>
         <p:spPr>
           <a:xfrm>
-            <a:off x="731520" y="6291072"/>
-            <a:ext cx="10725912" cy="292608"/>
+            <a:off x="868682" y="6239197"/>
+            <a:ext cx="10725900" cy="276900"/>
           </a:xfrm>
           <a:prstGeom prst="rect">
             <a:avLst/>
@@ -28075,7 +28317,7 @@
   <p:cSld>
     <p:spTree>
       <p:nvGrpSpPr>
-        <p:cNvPr id="178" name="Shape 178"/>
+        <p:cNvPr id="180" name="Shape 180"/>
         <p:cNvGrpSpPr/>
         <p:nvPr/>
       </p:nvGrpSpPr>
@@ -28089,7 +28331,7 @@
       </p:grpSpPr>
       <p:sp>
         <p:nvSpPr>
-          <p:cNvPr id="179" name="Google Shape;179;p4"/>
+          <p:cNvPr id="181" name="Google Shape;181;p4"/>
           <p:cNvSpPr/>
           <p:nvPr/>
         </p:nvSpPr>
@@ -28153,7 +28395,7 @@
       </p:sp>
       <p:sp>
         <p:nvSpPr>
-          <p:cNvPr id="180" name="Google Shape;180;p4"/>
+          <p:cNvPr id="182" name="Google Shape;182;p4"/>
           <p:cNvSpPr/>
           <p:nvPr/>
         </p:nvSpPr>
@@ -28217,7 +28459,7 @@
       </p:sp>
       <p:sp>
         <p:nvSpPr>
-          <p:cNvPr id="181" name="Google Shape;181;p4"/>
+          <p:cNvPr id="183" name="Google Shape;183;p4"/>
           <p:cNvSpPr txBox="1"/>
           <p:nvPr/>
         </p:nvSpPr>
@@ -28267,7 +28509,7 @@
       </p:sp>
       <p:sp>
         <p:nvSpPr>
-          <p:cNvPr id="182" name="Google Shape;182;p4"/>
+          <p:cNvPr id="184" name="Google Shape;184;p4"/>
           <p:cNvSpPr txBox="1"/>
           <p:nvPr/>
         </p:nvSpPr>
@@ -28317,7 +28559,7 @@
       </p:sp>
       <p:sp>
         <p:nvSpPr>
-          <p:cNvPr id="183" name="Google Shape;183;p4"/>
+          <p:cNvPr id="185" name="Google Shape;185;p4"/>
           <p:cNvSpPr txBox="1"/>
           <p:nvPr/>
         </p:nvSpPr>
@@ -28367,7 +28609,7 @@
       </p:sp>
       <p:pic>
         <p:nvPicPr>
-          <p:cNvPr descr="DSAI Lab Project Pipeline.png" id="184" name="Google Shape;184;p4"/>
+          <p:cNvPr descr="DSAI Lab Project Pipeline.png" id="186" name="Google Shape;186;p4"/>
           <p:cNvPicPr preferRelativeResize="0"/>
           <p:nvPr/>
         </p:nvPicPr>
@@ -28394,7 +28636,7 @@
       </p:pic>
       <p:sp>
         <p:nvSpPr>
-          <p:cNvPr id="185" name="Google Shape;185;p4"/>
+          <p:cNvPr id="187" name="Google Shape;187;p4"/>
           <p:cNvSpPr/>
           <p:nvPr/>
         </p:nvSpPr>
@@ -28458,7 +28700,7 @@
       </p:sp>
       <p:sp>
         <p:nvSpPr>
-          <p:cNvPr id="186" name="Google Shape;186;p4"/>
+          <p:cNvPr id="188" name="Google Shape;188;p4"/>
           <p:cNvSpPr txBox="1"/>
           <p:nvPr/>
         </p:nvSpPr>
@@ -28508,7 +28750,7 @@
       </p:sp>
       <p:sp>
         <p:nvSpPr>
-          <p:cNvPr id="187" name="Google Shape;187;p4"/>
+          <p:cNvPr id="189" name="Google Shape;189;p4"/>
           <p:cNvSpPr/>
           <p:nvPr/>
         </p:nvSpPr>
@@ -28572,7 +28814,7 @@
       </p:sp>
       <p:sp>
         <p:nvSpPr>
-          <p:cNvPr id="188" name="Google Shape;188;p4"/>
+          <p:cNvPr id="190" name="Google Shape;190;p4"/>
           <p:cNvSpPr txBox="1"/>
           <p:nvPr/>
         </p:nvSpPr>
@@ -28622,7 +28864,7 @@
       </p:sp>
       <p:sp>
         <p:nvSpPr>
-          <p:cNvPr id="189" name="Google Shape;189;p4"/>
+          <p:cNvPr id="191" name="Google Shape;191;p4"/>
           <p:cNvSpPr txBox="1"/>
           <p:nvPr/>
         </p:nvSpPr>
@@ -28672,7 +28914,7 @@
       </p:sp>
       <p:sp>
         <p:nvSpPr>
-          <p:cNvPr id="190" name="Google Shape;190;p4"/>
+          <p:cNvPr id="192" name="Google Shape;192;p4"/>
           <p:cNvSpPr/>
           <p:nvPr/>
         </p:nvSpPr>
@@ -28736,7 +28978,7 @@
       </p:sp>
       <p:sp>
         <p:nvSpPr>
-          <p:cNvPr id="191" name="Google Shape;191;p4"/>
+          <p:cNvPr id="193" name="Google Shape;193;p4"/>
           <p:cNvSpPr txBox="1"/>
           <p:nvPr/>
         </p:nvSpPr>
@@ -28786,7 +29028,7 @@
       </p:sp>
       <p:sp>
         <p:nvSpPr>
-          <p:cNvPr id="192" name="Google Shape;192;p4"/>
+          <p:cNvPr id="194" name="Google Shape;194;p4"/>
           <p:cNvSpPr txBox="1"/>
           <p:nvPr/>
         </p:nvSpPr>
@@ -28860,7 +29102,7 @@
       </p:sp>
       <p:sp>
         <p:nvSpPr>
-          <p:cNvPr id="193" name="Google Shape;193;p4"/>
+          <p:cNvPr id="195" name="Google Shape;195;p4"/>
           <p:cNvSpPr/>
           <p:nvPr/>
         </p:nvSpPr>
@@ -28924,7 +29166,7 @@
       </p:sp>
       <p:sp>
         <p:nvSpPr>
-          <p:cNvPr id="194" name="Google Shape;194;p4"/>
+          <p:cNvPr id="196" name="Google Shape;196;p4"/>
           <p:cNvSpPr txBox="1"/>
           <p:nvPr/>
         </p:nvSpPr>
@@ -28974,7 +29216,7 @@
       </p:sp>
       <p:sp>
         <p:nvSpPr>
-          <p:cNvPr id="195" name="Google Shape;195;p4"/>
+          <p:cNvPr id="197" name="Google Shape;197;p4"/>
           <p:cNvSpPr txBox="1"/>
           <p:nvPr/>
         </p:nvSpPr>
@@ -29048,7 +29290,7 @@
       </p:sp>
       <p:sp>
         <p:nvSpPr>
-          <p:cNvPr id="196" name="Google Shape;196;p4"/>
+          <p:cNvPr id="198" name="Google Shape;198;p4"/>
           <p:cNvSpPr/>
           <p:nvPr/>
         </p:nvSpPr>
@@ -29112,7 +29354,7 @@
       </p:sp>
       <p:sp>
         <p:nvSpPr>
-          <p:cNvPr id="197" name="Google Shape;197;p4"/>
+          <p:cNvPr id="199" name="Google Shape;199;p4"/>
           <p:cNvSpPr txBox="1"/>
           <p:nvPr/>
         </p:nvSpPr>
@@ -29162,7 +29404,7 @@
       </p:sp>
       <p:sp>
         <p:nvSpPr>
-          <p:cNvPr id="198" name="Google Shape;198;p4"/>
+          <p:cNvPr id="200" name="Google Shape;200;p4"/>
           <p:cNvSpPr txBox="1"/>
           <p:nvPr/>
         </p:nvSpPr>
@@ -29236,7 +29478,7 @@
       </p:sp>
       <p:sp>
         <p:nvSpPr>
-          <p:cNvPr id="199" name="Google Shape;199;p4"/>
+          <p:cNvPr id="201" name="Google Shape;201;p4"/>
           <p:cNvSpPr txBox="1"/>
           <p:nvPr/>
         </p:nvSpPr>
@@ -29286,7 +29528,7 @@
       </p:sp>
       <p:sp>
         <p:nvSpPr>
-          <p:cNvPr id="200" name="Google Shape;200;p4"/>
+          <p:cNvPr id="202" name="Google Shape;202;p4"/>
           <p:cNvSpPr txBox="1"/>
           <p:nvPr/>
         </p:nvSpPr>
@@ -29347,7 +29589,7 @@
   <p:cSld>
     <p:spTree>
       <p:nvGrpSpPr>
-        <p:cNvPr id="204" name="Shape 204"/>
+        <p:cNvPr id="206" name="Shape 206"/>
         <p:cNvGrpSpPr/>
         <p:nvPr/>
       </p:nvGrpSpPr>
@@ -29361,7 +29603,7 @@
       </p:grpSpPr>
       <p:sp>
         <p:nvSpPr>
-          <p:cNvPr id="205" name="Google Shape;205;p5"/>
+          <p:cNvPr id="207" name="Google Shape;207;p5"/>
           <p:cNvSpPr/>
           <p:nvPr/>
         </p:nvSpPr>
@@ -29425,7 +29667,7 @@
       </p:sp>
       <p:sp>
         <p:nvSpPr>
-          <p:cNvPr id="206" name="Google Shape;206;p5"/>
+          <p:cNvPr id="208" name="Google Shape;208;p5"/>
           <p:cNvSpPr/>
           <p:nvPr/>
         </p:nvSpPr>
@@ -29489,7 +29731,7 @@
       </p:sp>
       <p:sp>
         <p:nvSpPr>
-          <p:cNvPr id="207" name="Google Shape;207;p5"/>
+          <p:cNvPr id="209" name="Google Shape;209;p5"/>
           <p:cNvSpPr txBox="1"/>
           <p:nvPr/>
         </p:nvSpPr>
@@ -29539,7 +29781,7 @@
       </p:sp>
       <p:sp>
         <p:nvSpPr>
-          <p:cNvPr id="208" name="Google Shape;208;p5"/>
+          <p:cNvPr id="210" name="Google Shape;210;p5"/>
           <p:cNvSpPr txBox="1"/>
           <p:nvPr/>
         </p:nvSpPr>
@@ -29589,7 +29831,7 @@
       </p:sp>
       <p:sp>
         <p:nvSpPr>
-          <p:cNvPr id="209" name="Google Shape;209;p5"/>
+          <p:cNvPr id="211" name="Google Shape;211;p5"/>
           <p:cNvSpPr txBox="1"/>
           <p:nvPr/>
         </p:nvSpPr>
@@ -29639,7 +29881,7 @@
       </p:sp>
       <p:sp>
         <p:nvSpPr>
-          <p:cNvPr id="210" name="Google Shape;210;p5"/>
+          <p:cNvPr id="212" name="Google Shape;212;p5"/>
           <p:cNvSpPr/>
           <p:nvPr/>
         </p:nvSpPr>
@@ -29703,7 +29945,7 @@
       </p:sp>
       <p:sp>
         <p:nvSpPr>
-          <p:cNvPr id="211" name="Google Shape;211;p5"/>
+          <p:cNvPr id="213" name="Google Shape;213;p5"/>
           <p:cNvSpPr txBox="1"/>
           <p:nvPr/>
         </p:nvSpPr>
@@ -29753,7 +29995,7 @@
       </p:sp>
       <p:sp>
         <p:nvSpPr>
-          <p:cNvPr id="212" name="Google Shape;212;p5"/>
+          <p:cNvPr id="214" name="Google Shape;214;p5"/>
           <p:cNvSpPr txBox="1"/>
           <p:nvPr/>
         </p:nvSpPr>
@@ -29850,7 +30092,7 @@
       </p:sp>
       <p:sp>
         <p:nvSpPr>
-          <p:cNvPr id="213" name="Google Shape;213;p5"/>
+          <p:cNvPr id="215" name="Google Shape;215;p5"/>
           <p:cNvSpPr/>
           <p:nvPr/>
         </p:nvSpPr>
@@ -29914,7 +30156,7 @@
       </p:sp>
       <p:sp>
         <p:nvSpPr>
-          <p:cNvPr id="214" name="Google Shape;214;p5"/>
+          <p:cNvPr id="216" name="Google Shape;216;p5"/>
           <p:cNvSpPr/>
           <p:nvPr/>
         </p:nvSpPr>
@@ -29978,7 +30220,7 @@
       </p:sp>
       <p:sp>
         <p:nvSpPr>
-          <p:cNvPr id="215" name="Google Shape;215;p5"/>
+          <p:cNvPr id="217" name="Google Shape;217;p5"/>
           <p:cNvSpPr txBox="1"/>
           <p:nvPr/>
         </p:nvSpPr>
@@ -30028,7 +30270,7 @@
       </p:sp>
       <p:sp>
         <p:nvSpPr>
-          <p:cNvPr id="216" name="Google Shape;216;p5"/>
+          <p:cNvPr id="218" name="Google Shape;218;p5"/>
           <p:cNvSpPr txBox="1"/>
           <p:nvPr/>
         </p:nvSpPr>
@@ -30149,7 +30391,7 @@
       </p:sp>
       <p:sp>
         <p:nvSpPr>
-          <p:cNvPr id="217" name="Google Shape;217;p5"/>
+          <p:cNvPr id="219" name="Google Shape;219;p5"/>
           <p:cNvSpPr/>
           <p:nvPr/>
         </p:nvSpPr>
@@ -30213,7 +30455,7 @@
       </p:sp>
       <p:sp>
         <p:nvSpPr>
-          <p:cNvPr id="218" name="Google Shape;218;p5"/>
+          <p:cNvPr id="220" name="Google Shape;220;p5"/>
           <p:cNvSpPr txBox="1"/>
           <p:nvPr/>
         </p:nvSpPr>
@@ -30263,7 +30505,7 @@
       </p:sp>
       <p:sp>
         <p:nvSpPr>
-          <p:cNvPr id="219" name="Google Shape;219;p5"/>
+          <p:cNvPr id="221" name="Google Shape;221;p5"/>
           <p:cNvSpPr txBox="1"/>
           <p:nvPr/>
         </p:nvSpPr>
@@ -30313,7 +30555,7 @@
       </p:sp>
       <p:sp>
         <p:nvSpPr>
-          <p:cNvPr id="220" name="Google Shape;220;p5"/>
+          <p:cNvPr id="222" name="Google Shape;222;p5"/>
           <p:cNvSpPr txBox="1"/>
           <p:nvPr/>
         </p:nvSpPr>
@@ -30363,7 +30605,7 @@
       </p:sp>
       <p:sp>
         <p:nvSpPr>
-          <p:cNvPr id="221" name="Google Shape;221;p5"/>
+          <p:cNvPr id="223" name="Google Shape;223;p5"/>
           <p:cNvSpPr/>
           <p:nvPr/>
         </p:nvSpPr>
@@ -30427,14 +30669,14 @@
       </p:sp>
       <p:sp>
         <p:nvSpPr>
-          <p:cNvPr id="222" name="Google Shape;222;p5"/>
+          <p:cNvPr id="224" name="Google Shape;224;p5"/>
           <p:cNvSpPr txBox="1"/>
           <p:nvPr/>
         </p:nvSpPr>
         <p:spPr>
           <a:xfrm>
             <a:off x="6309360" y="3008376"/>
-            <a:ext cx="5193792" cy="530352"/>
+            <a:ext cx="5193900" cy="677100"/>
           </a:xfrm>
           <a:prstGeom prst="rect">
             <a:avLst/>
@@ -30460,7 +30702,7 @@
               <a:buNone/>
             </a:pPr>
             <a:r>
-              <a:rPr b="1" i="0" lang="en-US" sz="3800" u="none" cap="none" strike="noStrike">
+              <a:rPr b="1" lang="en-US" sz="3800">
                 <a:solidFill>
                   <a:srgbClr val="003087"/>
                 </a:solidFill>
@@ -30469,7 +30711,7 @@
                 <a:cs typeface="Calibri"/>
                 <a:sym typeface="Calibri"/>
               </a:rPr>
-              <a:t>5</a:t>
+              <a:t>4</a:t>
             </a:r>
             <a:endParaRPr/>
           </a:p>
@@ -30477,7 +30719,7 @@
       </p:sp>
       <p:sp>
         <p:nvSpPr>
-          <p:cNvPr id="223" name="Google Shape;223;p5"/>
+          <p:cNvPr id="225" name="Google Shape;225;p5"/>
           <p:cNvSpPr txBox="1"/>
           <p:nvPr/>
         </p:nvSpPr>
@@ -30527,7 +30769,7 @@
       </p:sp>
       <p:sp>
         <p:nvSpPr>
-          <p:cNvPr id="224" name="Google Shape;224;p5"/>
+          <p:cNvPr id="226" name="Google Shape;226;p5"/>
           <p:cNvSpPr/>
           <p:nvPr/>
         </p:nvSpPr>
@@ -30591,7 +30833,7 @@
       </p:sp>
       <p:sp>
         <p:nvSpPr>
-          <p:cNvPr id="225" name="Google Shape;225;p5"/>
+          <p:cNvPr id="227" name="Google Shape;227;p5"/>
           <p:cNvSpPr txBox="1"/>
           <p:nvPr/>
         </p:nvSpPr>
@@ -30641,7 +30883,7 @@
       </p:sp>
       <p:sp>
         <p:nvSpPr>
-          <p:cNvPr id="226" name="Google Shape;226;p5"/>
+          <p:cNvPr id="228" name="Google Shape;228;p5"/>
           <p:cNvSpPr txBox="1"/>
           <p:nvPr/>
         </p:nvSpPr>
@@ -30691,7 +30933,7 @@
       </p:sp>
       <p:sp>
         <p:nvSpPr>
-          <p:cNvPr id="227" name="Google Shape;227;p5"/>
+          <p:cNvPr id="229" name="Google Shape;229;p5"/>
           <p:cNvSpPr/>
           <p:nvPr/>
         </p:nvSpPr>
@@ -30755,7 +30997,7 @@
       </p:sp>
       <p:sp>
         <p:nvSpPr>
-          <p:cNvPr id="228" name="Google Shape;228;p5"/>
+          <p:cNvPr id="230" name="Google Shape;230;p5"/>
           <p:cNvSpPr txBox="1"/>
           <p:nvPr/>
         </p:nvSpPr>
@@ -30805,7 +31047,7 @@
       </p:sp>
       <p:sp>
         <p:nvSpPr>
-          <p:cNvPr id="229" name="Google Shape;229;p5"/>
+          <p:cNvPr id="231" name="Google Shape;231;p5"/>
           <p:cNvSpPr txBox="1"/>
           <p:nvPr/>
         </p:nvSpPr>
@@ -30866,7 +31108,7 @@
   <p:cSld>
     <p:spTree>
       <p:nvGrpSpPr>
-        <p:cNvPr id="233" name="Shape 233"/>
+        <p:cNvPr id="235" name="Shape 235"/>
         <p:cNvGrpSpPr/>
         <p:nvPr/>
       </p:nvGrpSpPr>
@@ -30880,7 +31122,7 @@
       </p:grpSpPr>
       <p:sp>
         <p:nvSpPr>
-          <p:cNvPr id="234" name="Google Shape;234;p6"/>
+          <p:cNvPr id="236" name="Google Shape;236;p6"/>
           <p:cNvSpPr/>
           <p:nvPr/>
         </p:nvSpPr>
@@ -30944,7 +31186,7 @@
       </p:sp>
       <p:sp>
         <p:nvSpPr>
-          <p:cNvPr id="235" name="Google Shape;235;p6"/>
+          <p:cNvPr id="237" name="Google Shape;237;p6"/>
           <p:cNvSpPr/>
           <p:nvPr/>
         </p:nvSpPr>
@@ -31008,7 +31250,7 @@
       </p:sp>
       <p:sp>
         <p:nvSpPr>
-          <p:cNvPr id="236" name="Google Shape;236;p6"/>
+          <p:cNvPr id="238" name="Google Shape;238;p6"/>
           <p:cNvSpPr txBox="1"/>
           <p:nvPr/>
         </p:nvSpPr>
@@ -31058,7 +31300,7 @@
       </p:sp>
       <p:sp>
         <p:nvSpPr>
-          <p:cNvPr id="237" name="Google Shape;237;p6"/>
+          <p:cNvPr id="239" name="Google Shape;239;p6"/>
           <p:cNvSpPr txBox="1"/>
           <p:nvPr/>
         </p:nvSpPr>
@@ -31108,7 +31350,7 @@
       </p:sp>
       <p:sp>
         <p:nvSpPr>
-          <p:cNvPr id="238" name="Google Shape;238;p6"/>
+          <p:cNvPr id="240" name="Google Shape;240;p6"/>
           <p:cNvSpPr txBox="1"/>
           <p:nvPr/>
         </p:nvSpPr>
@@ -31158,14 +31400,14 @@
       </p:sp>
       <p:sp>
         <p:nvSpPr>
-          <p:cNvPr id="239" name="Google Shape;239;p6"/>
+          <p:cNvPr id="241" name="Google Shape;241;p6"/>
           <p:cNvSpPr/>
           <p:nvPr/>
         </p:nvSpPr>
         <p:spPr>
           <a:xfrm>
-            <a:off x="457200" y="1143000"/>
-            <a:ext cx="3520440" cy="4572000"/>
+            <a:off x="649225" y="1734400"/>
+            <a:ext cx="3520500" cy="4572000"/>
           </a:xfrm>
           <a:prstGeom prst="rect">
             <a:avLst/>
@@ -31222,14 +31464,14 @@
       </p:sp>
       <p:sp>
         <p:nvSpPr>
-          <p:cNvPr id="240" name="Google Shape;240;p6"/>
+          <p:cNvPr id="242" name="Google Shape;242;p6"/>
           <p:cNvSpPr/>
           <p:nvPr/>
         </p:nvSpPr>
         <p:spPr>
           <a:xfrm>
-            <a:off x="457200" y="1143000"/>
-            <a:ext cx="3520440" cy="54864"/>
+            <a:off x="649225" y="1734400"/>
+            <a:ext cx="3520500" cy="54900"/>
           </a:xfrm>
           <a:prstGeom prst="rect">
             <a:avLst/>
@@ -31286,14 +31528,14 @@
       </p:sp>
       <p:sp>
         <p:nvSpPr>
-          <p:cNvPr id="241" name="Google Shape;241;p6"/>
+          <p:cNvPr id="243" name="Google Shape;243;p6"/>
           <p:cNvSpPr txBox="1"/>
           <p:nvPr/>
         </p:nvSpPr>
         <p:spPr>
           <a:xfrm>
-            <a:off x="621792" y="1289304"/>
-            <a:ext cx="3191256" cy="320040"/>
+            <a:off x="813817" y="1880704"/>
+            <a:ext cx="3191400" cy="276900"/>
           </a:xfrm>
           <a:prstGeom prst="rect">
             <a:avLst/>
@@ -31336,14 +31578,14 @@
       </p:sp>
       <p:sp>
         <p:nvSpPr>
-          <p:cNvPr id="242" name="Google Shape;242;p6"/>
+          <p:cNvPr id="244" name="Google Shape;244;p6"/>
           <p:cNvSpPr txBox="1"/>
           <p:nvPr/>
         </p:nvSpPr>
         <p:spPr>
           <a:xfrm>
-            <a:off x="621792" y="1645920"/>
-            <a:ext cx="3191256" cy="475488"/>
+            <a:off x="813817" y="2237320"/>
+            <a:ext cx="3191400" cy="323100"/>
           </a:xfrm>
           <a:prstGeom prst="rect">
             <a:avLst/>
@@ -31386,14 +31628,14 @@
       </p:sp>
       <p:sp>
         <p:nvSpPr>
-          <p:cNvPr id="243" name="Google Shape;243;p6"/>
+          <p:cNvPr id="245" name="Google Shape;245;p6"/>
           <p:cNvSpPr txBox="1"/>
           <p:nvPr/>
         </p:nvSpPr>
         <p:spPr>
           <a:xfrm>
-            <a:off x="621792" y="2167128"/>
-            <a:ext cx="3191256" cy="1828800"/>
+            <a:off x="813817" y="2758528"/>
+            <a:ext cx="3191400" cy="1785600"/>
           </a:xfrm>
           <a:prstGeom prst="rect">
             <a:avLst/>
@@ -31577,14 +31819,14 @@
       </p:sp>
       <p:sp>
         <p:nvSpPr>
-          <p:cNvPr id="244" name="Google Shape;244;p6"/>
+          <p:cNvPr id="246" name="Google Shape;246;p6"/>
           <p:cNvSpPr/>
           <p:nvPr/>
         </p:nvSpPr>
         <p:spPr>
           <a:xfrm>
-            <a:off x="621792" y="4069080"/>
-            <a:ext cx="3191256" cy="13716"/>
+            <a:off x="813817" y="4660480"/>
+            <a:ext cx="3191400" cy="13800"/>
           </a:xfrm>
           <a:prstGeom prst="rect">
             <a:avLst/>
@@ -31641,14 +31883,14 @@
       </p:sp>
       <p:sp>
         <p:nvSpPr>
-          <p:cNvPr id="245" name="Google Shape;245;p6"/>
+          <p:cNvPr id="247" name="Google Shape;247;p6"/>
           <p:cNvSpPr txBox="1"/>
           <p:nvPr/>
         </p:nvSpPr>
         <p:spPr>
           <a:xfrm>
-            <a:off x="621792" y="4197096"/>
-            <a:ext cx="3191256" cy="1389888"/>
+            <a:off x="813817" y="4788496"/>
+            <a:ext cx="3191400" cy="800400"/>
           </a:xfrm>
           <a:prstGeom prst="rect">
             <a:avLst/>
@@ -31763,14 +32005,14 @@
       </p:sp>
       <p:sp>
         <p:nvSpPr>
-          <p:cNvPr id="246" name="Google Shape;246;p6"/>
+          <p:cNvPr id="248" name="Google Shape;248;p6"/>
           <p:cNvSpPr/>
           <p:nvPr/>
         </p:nvSpPr>
         <p:spPr>
           <a:xfrm>
-            <a:off x="4142232" y="1143000"/>
-            <a:ext cx="3520440" cy="4572000"/>
+            <a:off x="4334257" y="1734400"/>
+            <a:ext cx="3520500" cy="4572000"/>
           </a:xfrm>
           <a:prstGeom prst="rect">
             <a:avLst/>
@@ -31827,14 +32069,14 @@
       </p:sp>
       <p:sp>
         <p:nvSpPr>
-          <p:cNvPr id="247" name="Google Shape;247;p6"/>
+          <p:cNvPr id="249" name="Google Shape;249;p6"/>
           <p:cNvSpPr/>
           <p:nvPr/>
         </p:nvSpPr>
         <p:spPr>
           <a:xfrm>
-            <a:off x="4142232" y="1143000"/>
-            <a:ext cx="3520440" cy="54864"/>
+            <a:off x="4334257" y="1734400"/>
+            <a:ext cx="3520500" cy="54900"/>
           </a:xfrm>
           <a:prstGeom prst="rect">
             <a:avLst/>
@@ -31891,14 +32133,14 @@
       </p:sp>
       <p:sp>
         <p:nvSpPr>
-          <p:cNvPr id="248" name="Google Shape;248;p6"/>
+          <p:cNvPr id="250" name="Google Shape;250;p6"/>
           <p:cNvSpPr txBox="1"/>
           <p:nvPr/>
         </p:nvSpPr>
         <p:spPr>
           <a:xfrm>
-            <a:off x="4306824" y="1289304"/>
-            <a:ext cx="3191256" cy="320040"/>
+            <a:off x="4498849" y="1880704"/>
+            <a:ext cx="3191400" cy="276900"/>
           </a:xfrm>
           <a:prstGeom prst="rect">
             <a:avLst/>
@@ -31941,14 +32183,14 @@
       </p:sp>
       <p:sp>
         <p:nvSpPr>
-          <p:cNvPr id="249" name="Google Shape;249;p6"/>
+          <p:cNvPr id="251" name="Google Shape;251;p6"/>
           <p:cNvSpPr txBox="1"/>
           <p:nvPr/>
         </p:nvSpPr>
         <p:spPr>
           <a:xfrm>
-            <a:off x="4306824" y="1645920"/>
-            <a:ext cx="3191256" cy="475488"/>
+            <a:off x="4498849" y="2237320"/>
+            <a:ext cx="3191400" cy="323100"/>
           </a:xfrm>
           <a:prstGeom prst="rect">
             <a:avLst/>
@@ -31991,14 +32233,14 @@
       </p:sp>
       <p:sp>
         <p:nvSpPr>
-          <p:cNvPr id="250" name="Google Shape;250;p6"/>
+          <p:cNvPr id="252" name="Google Shape;252;p6"/>
           <p:cNvSpPr txBox="1"/>
           <p:nvPr/>
         </p:nvSpPr>
         <p:spPr>
           <a:xfrm>
-            <a:off x="4306824" y="2167128"/>
-            <a:ext cx="3191256" cy="1828800"/>
+            <a:off x="4498849" y="2758528"/>
+            <a:ext cx="3191400" cy="1277400"/>
           </a:xfrm>
           <a:prstGeom prst="rect">
             <a:avLst/>
@@ -32088,14 +32330,14 @@
       </p:sp>
       <p:sp>
         <p:nvSpPr>
-          <p:cNvPr id="251" name="Google Shape;251;p6"/>
+          <p:cNvPr id="253" name="Google Shape;253;p6"/>
           <p:cNvSpPr/>
           <p:nvPr/>
         </p:nvSpPr>
         <p:spPr>
           <a:xfrm>
-            <a:off x="4306824" y="4069080"/>
-            <a:ext cx="3191256" cy="13716"/>
+            <a:off x="4498849" y="4660480"/>
+            <a:ext cx="3191400" cy="13800"/>
           </a:xfrm>
           <a:prstGeom prst="rect">
             <a:avLst/>
@@ -32152,14 +32394,14 @@
       </p:sp>
       <p:sp>
         <p:nvSpPr>
-          <p:cNvPr id="252" name="Google Shape;252;p6"/>
+          <p:cNvPr id="254" name="Google Shape;254;p6"/>
           <p:cNvSpPr txBox="1"/>
           <p:nvPr/>
         </p:nvSpPr>
         <p:spPr>
           <a:xfrm>
-            <a:off x="4306824" y="4197096"/>
-            <a:ext cx="3191256" cy="1389888"/>
+            <a:off x="4498849" y="4788496"/>
+            <a:ext cx="3191400" cy="800400"/>
           </a:xfrm>
           <a:prstGeom prst="rect">
             <a:avLst/>
@@ -32274,14 +32516,14 @@
       </p:sp>
       <p:sp>
         <p:nvSpPr>
-          <p:cNvPr id="253" name="Google Shape;253;p6"/>
+          <p:cNvPr id="255" name="Google Shape;255;p6"/>
           <p:cNvSpPr/>
           <p:nvPr/>
         </p:nvSpPr>
         <p:spPr>
           <a:xfrm>
-            <a:off x="7827264" y="1143000"/>
-            <a:ext cx="3520440" cy="4572000"/>
+            <a:off x="8019289" y="1734400"/>
+            <a:ext cx="3520500" cy="4572000"/>
           </a:xfrm>
           <a:prstGeom prst="rect">
             <a:avLst/>
@@ -32338,14 +32580,14 @@
       </p:sp>
       <p:sp>
         <p:nvSpPr>
-          <p:cNvPr id="254" name="Google Shape;254;p6"/>
+          <p:cNvPr id="256" name="Google Shape;256;p6"/>
           <p:cNvSpPr/>
           <p:nvPr/>
         </p:nvSpPr>
         <p:spPr>
           <a:xfrm>
-            <a:off x="7827264" y="1143000"/>
-            <a:ext cx="3520440" cy="54864"/>
+            <a:off x="8019289" y="1734400"/>
+            <a:ext cx="3520500" cy="54900"/>
           </a:xfrm>
           <a:prstGeom prst="rect">
             <a:avLst/>
@@ -32402,14 +32644,14 @@
       </p:sp>
       <p:sp>
         <p:nvSpPr>
-          <p:cNvPr id="255" name="Google Shape;255;p6"/>
+          <p:cNvPr id="257" name="Google Shape;257;p6"/>
           <p:cNvSpPr txBox="1"/>
           <p:nvPr/>
         </p:nvSpPr>
         <p:spPr>
           <a:xfrm>
-            <a:off x="7991856" y="1289304"/>
-            <a:ext cx="3191256" cy="320040"/>
+            <a:off x="8183881" y="1880704"/>
+            <a:ext cx="3191400" cy="276900"/>
           </a:xfrm>
           <a:prstGeom prst="rect">
             <a:avLst/>
@@ -32452,14 +32694,14 @@
       </p:sp>
       <p:sp>
         <p:nvSpPr>
-          <p:cNvPr id="256" name="Google Shape;256;p6"/>
+          <p:cNvPr id="258" name="Google Shape;258;p6"/>
           <p:cNvSpPr txBox="1"/>
           <p:nvPr/>
         </p:nvSpPr>
         <p:spPr>
           <a:xfrm>
-            <a:off x="7991856" y="1645920"/>
-            <a:ext cx="3191256" cy="475488"/>
+            <a:off x="8183881" y="2237320"/>
+            <a:ext cx="3191400" cy="323100"/>
           </a:xfrm>
           <a:prstGeom prst="rect">
             <a:avLst/>
@@ -32502,14 +32744,14 @@
       </p:sp>
       <p:sp>
         <p:nvSpPr>
-          <p:cNvPr id="257" name="Google Shape;257;p6"/>
+          <p:cNvPr id="259" name="Google Shape;259;p6"/>
           <p:cNvSpPr txBox="1"/>
           <p:nvPr/>
         </p:nvSpPr>
         <p:spPr>
           <a:xfrm>
-            <a:off x="7991856" y="2167128"/>
-            <a:ext cx="3191256" cy="1828800"/>
+            <a:off x="8183881" y="2758528"/>
+            <a:ext cx="3191400" cy="1446900"/>
           </a:xfrm>
           <a:prstGeom prst="rect">
             <a:avLst/>
@@ -32646,14 +32888,14 @@
       </p:sp>
       <p:sp>
         <p:nvSpPr>
-          <p:cNvPr id="258" name="Google Shape;258;p6"/>
+          <p:cNvPr id="260" name="Google Shape;260;p6"/>
           <p:cNvSpPr/>
           <p:nvPr/>
         </p:nvSpPr>
         <p:spPr>
           <a:xfrm>
-            <a:off x="7991856" y="4069080"/>
-            <a:ext cx="3191256" cy="13716"/>
+            <a:off x="8183881" y="4660480"/>
+            <a:ext cx="3191400" cy="13800"/>
           </a:xfrm>
           <a:prstGeom prst="rect">
             <a:avLst/>
@@ -32710,14 +32952,14 @@
       </p:sp>
       <p:sp>
         <p:nvSpPr>
-          <p:cNvPr id="259" name="Google Shape;259;p6"/>
+          <p:cNvPr id="261" name="Google Shape;261;p6"/>
           <p:cNvSpPr txBox="1"/>
           <p:nvPr/>
         </p:nvSpPr>
         <p:spPr>
           <a:xfrm>
-            <a:off x="7991856" y="4197096"/>
-            <a:ext cx="3191256" cy="1389888"/>
+            <a:off x="8183881" y="4788496"/>
+            <a:ext cx="3191400" cy="800400"/>
           </a:xfrm>
           <a:prstGeom prst="rect">
             <a:avLst/>
@@ -32843,7 +33085,7 @@
   <p:cSld>
     <p:spTree>
       <p:nvGrpSpPr>
-        <p:cNvPr id="263" name="Shape 263"/>
+        <p:cNvPr id="265" name="Shape 265"/>
         <p:cNvGrpSpPr/>
         <p:nvPr/>
       </p:nvGrpSpPr>
@@ -32857,7 +33099,7 @@
       </p:grpSpPr>
       <p:sp>
         <p:nvSpPr>
-          <p:cNvPr id="264" name="Google Shape;264;p7"/>
+          <p:cNvPr id="266" name="Google Shape;266;p7"/>
           <p:cNvSpPr/>
           <p:nvPr/>
         </p:nvSpPr>
@@ -32921,7 +33163,7 @@
       </p:sp>
       <p:sp>
         <p:nvSpPr>
-          <p:cNvPr id="265" name="Google Shape;265;p7"/>
+          <p:cNvPr id="267" name="Google Shape;267;p7"/>
           <p:cNvSpPr/>
           <p:nvPr/>
         </p:nvSpPr>
@@ -32985,7 +33227,7 @@
       </p:sp>
       <p:sp>
         <p:nvSpPr>
-          <p:cNvPr id="266" name="Google Shape;266;p7"/>
+          <p:cNvPr id="268" name="Google Shape;268;p7"/>
           <p:cNvSpPr txBox="1"/>
           <p:nvPr/>
         </p:nvSpPr>
@@ -33035,7 +33277,7 @@
       </p:sp>
       <p:sp>
         <p:nvSpPr>
-          <p:cNvPr id="267" name="Google Shape;267;p7"/>
+          <p:cNvPr id="269" name="Google Shape;269;p7"/>
           <p:cNvSpPr txBox="1"/>
           <p:nvPr/>
         </p:nvSpPr>
@@ -33085,7 +33327,7 @@
       </p:sp>
       <p:sp>
         <p:nvSpPr>
-          <p:cNvPr id="268" name="Google Shape;268;p7"/>
+          <p:cNvPr id="270" name="Google Shape;270;p7"/>
           <p:cNvSpPr txBox="1"/>
           <p:nvPr/>
         </p:nvSpPr>
@@ -33135,7 +33377,7 @@
       </p:sp>
       <p:pic>
         <p:nvPicPr>
-          <p:cNvPr descr="phase1.png" id="269" name="Google Shape;269;p7"/>
+          <p:cNvPr descr="phase1.png" id="271" name="Google Shape;271;p7"/>
           <p:cNvPicPr preferRelativeResize="0"/>
           <p:nvPr/>
         </p:nvPicPr>
@@ -33148,7 +33390,7 @@
         </p:blipFill>
         <p:spPr>
           <a:xfrm>
-            <a:off x="457200" y="1097280"/>
+            <a:off x="457200" y="1325530"/>
             <a:ext cx="7589520" cy="4251960"/>
           </a:xfrm>
           <a:prstGeom prst="rect">
@@ -33162,14 +33404,14 @@
       </p:pic>
       <p:sp>
         <p:nvSpPr>
-          <p:cNvPr id="270" name="Google Shape;270;p7"/>
+          <p:cNvPr id="272" name="Google Shape;272;p7"/>
           <p:cNvSpPr/>
           <p:nvPr/>
         </p:nvSpPr>
         <p:spPr>
           <a:xfrm>
-            <a:off x="8183879" y="1097280"/>
-            <a:ext cx="3685033" cy="1965960"/>
+            <a:off x="8183875" y="1325524"/>
+            <a:ext cx="3684900" cy="2196900"/>
           </a:xfrm>
           <a:prstGeom prst="rect">
             <a:avLst/>
@@ -33226,14 +33468,14 @@
       </p:sp>
       <p:sp>
         <p:nvSpPr>
-          <p:cNvPr id="271" name="Google Shape;271;p7"/>
+          <p:cNvPr id="273" name="Google Shape;273;p7"/>
           <p:cNvSpPr/>
           <p:nvPr/>
         </p:nvSpPr>
         <p:spPr>
           <a:xfrm>
-            <a:off x="8183879" y="1097280"/>
-            <a:ext cx="3685033" cy="45720"/>
+            <a:off x="8183879" y="1325530"/>
+            <a:ext cx="3684900" cy="45600"/>
           </a:xfrm>
           <a:prstGeom prst="rect">
             <a:avLst/>
@@ -33290,14 +33532,14 @@
       </p:sp>
       <p:sp>
         <p:nvSpPr>
-          <p:cNvPr id="272" name="Google Shape;272;p7"/>
+          <p:cNvPr id="274" name="Google Shape;274;p7"/>
           <p:cNvSpPr txBox="1"/>
           <p:nvPr/>
         </p:nvSpPr>
         <p:spPr>
           <a:xfrm>
-            <a:off x="8348471" y="1207008"/>
-            <a:ext cx="3429001" cy="347472"/>
+            <a:off x="8348471" y="1435258"/>
+            <a:ext cx="3429000" cy="292500"/>
           </a:xfrm>
           <a:prstGeom prst="rect">
             <a:avLst/>
@@ -33340,14 +33582,14 @@
       </p:sp>
       <p:sp>
         <p:nvSpPr>
-          <p:cNvPr id="273" name="Google Shape;273;p7"/>
+          <p:cNvPr id="275" name="Google Shape;275;p7"/>
           <p:cNvSpPr txBox="1"/>
           <p:nvPr/>
         </p:nvSpPr>
         <p:spPr>
           <a:xfrm>
-            <a:off x="8348471" y="1600200"/>
-            <a:ext cx="3429001" cy="1371600"/>
+            <a:off x="8348471" y="1828450"/>
+            <a:ext cx="3429000" cy="1569900"/>
           </a:xfrm>
           <a:prstGeom prst="rect">
             <a:avLst/>
@@ -33556,14 +33798,14 @@
       </p:sp>
       <p:sp>
         <p:nvSpPr>
-          <p:cNvPr id="274" name="Google Shape;274;p7"/>
+          <p:cNvPr id="276" name="Google Shape;276;p7"/>
           <p:cNvSpPr/>
           <p:nvPr/>
         </p:nvSpPr>
         <p:spPr>
           <a:xfrm>
-            <a:off x="8183879" y="3227832"/>
-            <a:ext cx="3685033" cy="2121408"/>
+            <a:off x="8183875" y="3657249"/>
+            <a:ext cx="3684900" cy="1920300"/>
           </a:xfrm>
           <a:prstGeom prst="rect">
             <a:avLst/>
@@ -33620,14 +33862,14 @@
       </p:sp>
       <p:sp>
         <p:nvSpPr>
-          <p:cNvPr id="275" name="Google Shape;275;p7"/>
+          <p:cNvPr id="277" name="Google Shape;277;p7"/>
           <p:cNvSpPr/>
           <p:nvPr/>
         </p:nvSpPr>
         <p:spPr>
           <a:xfrm>
-            <a:off x="8183879" y="3227832"/>
-            <a:ext cx="64008" cy="2121408"/>
+            <a:off x="8183877" y="3657199"/>
+            <a:ext cx="63900" cy="1920300"/>
           </a:xfrm>
           <a:prstGeom prst="rect">
             <a:avLst/>
@@ -33684,14 +33926,14 @@
       </p:sp>
       <p:sp>
         <p:nvSpPr>
-          <p:cNvPr id="276" name="Google Shape;276;p7"/>
+          <p:cNvPr id="278" name="Google Shape;278;p7"/>
           <p:cNvSpPr txBox="1"/>
           <p:nvPr/>
         </p:nvSpPr>
         <p:spPr>
           <a:xfrm>
-            <a:off x="8366759" y="3319272"/>
-            <a:ext cx="3410713" cy="347472"/>
+            <a:off x="8385034" y="4024772"/>
+            <a:ext cx="3410700" cy="269400"/>
           </a:xfrm>
           <a:prstGeom prst="rect">
             <a:avLst/>
@@ -33734,14 +33976,14 @@
       </p:sp>
       <p:sp>
         <p:nvSpPr>
-          <p:cNvPr id="277" name="Google Shape;277;p7"/>
+          <p:cNvPr id="279" name="Google Shape;279;p7"/>
           <p:cNvSpPr txBox="1"/>
           <p:nvPr/>
         </p:nvSpPr>
         <p:spPr>
           <a:xfrm>
-            <a:off x="8366759" y="3730752"/>
-            <a:ext cx="3410713" cy="1527048"/>
+            <a:off x="8385025" y="4522738"/>
+            <a:ext cx="3410700" cy="939000"/>
           </a:xfrm>
           <a:prstGeom prst="rect">
             <a:avLst/>
@@ -33784,14 +34026,14 @@
       </p:sp>
       <p:sp>
         <p:nvSpPr>
-          <p:cNvPr id="278" name="Google Shape;278;p7"/>
+          <p:cNvPr id="280" name="Google Shape;280;p7"/>
           <p:cNvSpPr/>
           <p:nvPr/>
         </p:nvSpPr>
         <p:spPr>
           <a:xfrm>
-            <a:off x="457200" y="5486400"/>
-            <a:ext cx="11274552" cy="804672"/>
+            <a:off x="457200" y="5714650"/>
+            <a:ext cx="11411700" cy="804600"/>
           </a:xfrm>
           <a:prstGeom prst="rect">
             <a:avLst/>
@@ -33848,14 +34090,14 @@
       </p:sp>
       <p:sp>
         <p:nvSpPr>
-          <p:cNvPr id="279" name="Google Shape;279;p7"/>
+          <p:cNvPr id="281" name="Google Shape;281;p7"/>
           <p:cNvSpPr/>
           <p:nvPr/>
         </p:nvSpPr>
         <p:spPr>
           <a:xfrm>
-            <a:off x="457200" y="5486400"/>
-            <a:ext cx="64008" cy="804672"/>
+            <a:off x="457200" y="5714650"/>
+            <a:ext cx="63900" cy="804600"/>
           </a:xfrm>
           <a:prstGeom prst="rect">
             <a:avLst/>
@@ -33912,14 +34154,14 @@
       </p:sp>
       <p:sp>
         <p:nvSpPr>
-          <p:cNvPr id="280" name="Google Shape;280;p7"/>
+          <p:cNvPr id="282" name="Google Shape;282;p7"/>
           <p:cNvSpPr txBox="1"/>
           <p:nvPr/>
         </p:nvSpPr>
         <p:spPr>
           <a:xfrm>
-            <a:off x="640080" y="5687568"/>
-            <a:ext cx="11000232" cy="502920"/>
+            <a:off x="662943" y="6034743"/>
+            <a:ext cx="11000100" cy="276900"/>
           </a:xfrm>
           <a:prstGeom prst="rect">
             <a:avLst/>
@@ -33973,7 +34215,7 @@
   <p:cSld>
     <p:spTree>
       <p:nvGrpSpPr>
-        <p:cNvPr id="284" name="Shape 284"/>
+        <p:cNvPr id="286" name="Shape 286"/>
         <p:cNvGrpSpPr/>
         <p:nvPr/>
       </p:nvGrpSpPr>
@@ -33987,7 +34229,7 @@
       </p:grpSpPr>
       <p:sp>
         <p:nvSpPr>
-          <p:cNvPr id="285" name="Google Shape;285;p8"/>
+          <p:cNvPr id="287" name="Google Shape;287;p8"/>
           <p:cNvSpPr/>
           <p:nvPr/>
         </p:nvSpPr>
@@ -34051,7 +34293,7 @@
       </p:sp>
       <p:sp>
         <p:nvSpPr>
-          <p:cNvPr id="286" name="Google Shape;286;p8"/>
+          <p:cNvPr id="288" name="Google Shape;288;p8"/>
           <p:cNvSpPr/>
           <p:nvPr/>
         </p:nvSpPr>
@@ -34115,14 +34357,14 @@
       </p:sp>
       <p:sp>
         <p:nvSpPr>
-          <p:cNvPr id="287" name="Google Shape;287;p8"/>
+          <p:cNvPr id="289" name="Google Shape;289;p8"/>
           <p:cNvSpPr txBox="1"/>
           <p:nvPr/>
         </p:nvSpPr>
         <p:spPr>
           <a:xfrm>
             <a:off x="457200" y="128016"/>
-            <a:ext cx="9628632" cy="594360"/>
+            <a:ext cx="9628500" cy="430800"/>
           </a:xfrm>
           <a:prstGeom prst="rect">
             <a:avLst/>
@@ -34147,6 +34389,18 @@
               </a:spcAft>
               <a:buNone/>
             </a:pPr>
+            <a:r>
+              <a:rPr b="1" lang="en-US" sz="2200">
+                <a:solidFill>
+                  <a:srgbClr val="FFFFFF"/>
+                </a:solidFill>
+                <a:latin typeface="Calibri"/>
+                <a:ea typeface="Calibri"/>
+                <a:cs typeface="Calibri"/>
+                <a:sym typeface="Calibri"/>
+              </a:rPr>
+              <a:t>Phase-2: </a:t>
+            </a:r>
             <a:r>
               <a:rPr b="1" i="0" lang="en-US" sz="2200" u="none" cap="none" strike="noStrike">
                 <a:solidFill>
@@ -34165,7 +34419,7 @@
       </p:sp>
       <p:sp>
         <p:nvSpPr>
-          <p:cNvPr id="288" name="Google Shape;288;p8"/>
+          <p:cNvPr id="290" name="Google Shape;290;p8"/>
           <p:cNvSpPr txBox="1"/>
           <p:nvPr/>
         </p:nvSpPr>
@@ -34215,7 +34469,7 @@
       </p:sp>
       <p:sp>
         <p:nvSpPr>
-          <p:cNvPr id="289" name="Google Shape;289;p8"/>
+          <p:cNvPr id="291" name="Google Shape;291;p8"/>
           <p:cNvSpPr txBox="1"/>
           <p:nvPr/>
         </p:nvSpPr>
@@ -34265,7 +34519,7 @@
       </p:sp>
       <p:sp>
         <p:nvSpPr>
-          <p:cNvPr id="290" name="Google Shape;290;p8"/>
+          <p:cNvPr id="292" name="Google Shape;292;p8"/>
           <p:cNvSpPr/>
           <p:nvPr/>
         </p:nvSpPr>
@@ -34329,7 +34583,7 @@
       </p:sp>
       <p:sp>
         <p:nvSpPr>
-          <p:cNvPr id="291" name="Google Shape;291;p8"/>
+          <p:cNvPr id="293" name="Google Shape;293;p8"/>
           <p:cNvSpPr/>
           <p:nvPr/>
         </p:nvSpPr>
@@ -34393,7 +34647,7 @@
       </p:sp>
       <p:sp>
         <p:nvSpPr>
-          <p:cNvPr id="292" name="Google Shape;292;p8"/>
+          <p:cNvPr id="294" name="Google Shape;294;p8"/>
           <p:cNvSpPr txBox="1"/>
           <p:nvPr/>
         </p:nvSpPr>
@@ -34443,7 +34697,7 @@
       </p:sp>
       <p:sp>
         <p:nvSpPr>
-          <p:cNvPr id="293" name="Google Shape;293;p8"/>
+          <p:cNvPr id="295" name="Google Shape;295;p8"/>
           <p:cNvSpPr txBox="1"/>
           <p:nvPr/>
         </p:nvSpPr>
@@ -34517,7 +34771,7 @@
       </p:sp>
       <p:sp>
         <p:nvSpPr>
-          <p:cNvPr id="294" name="Google Shape;294;p8"/>
+          <p:cNvPr id="296" name="Google Shape;296;p8"/>
           <p:cNvSpPr txBox="1"/>
           <p:nvPr/>
         </p:nvSpPr>
@@ -34567,7 +34821,7 @@
       </p:sp>
       <p:sp>
         <p:nvSpPr>
-          <p:cNvPr id="295" name="Google Shape;295;p8"/>
+          <p:cNvPr id="297" name="Google Shape;297;p8"/>
           <p:cNvSpPr/>
           <p:nvPr/>
         </p:nvSpPr>
@@ -34631,7 +34885,7 @@
       </p:sp>
       <p:sp>
         <p:nvSpPr>
-          <p:cNvPr id="296" name="Google Shape;296;p8"/>
+          <p:cNvPr id="298" name="Google Shape;298;p8"/>
           <p:cNvSpPr/>
           <p:nvPr/>
         </p:nvSpPr>
@@ -34695,7 +34949,7 @@
       </p:sp>
       <p:sp>
         <p:nvSpPr>
-          <p:cNvPr id="297" name="Google Shape;297;p8"/>
+          <p:cNvPr id="299" name="Google Shape;299;p8"/>
           <p:cNvSpPr txBox="1"/>
           <p:nvPr/>
         </p:nvSpPr>
@@ -34745,7 +34999,7 @@
       </p:sp>
       <p:sp>
         <p:nvSpPr>
-          <p:cNvPr id="298" name="Google Shape;298;p8"/>
+          <p:cNvPr id="300" name="Google Shape;300;p8"/>
           <p:cNvSpPr txBox="1"/>
           <p:nvPr/>
         </p:nvSpPr>
@@ -34819,7 +35073,7 @@
       </p:sp>
       <p:sp>
         <p:nvSpPr>
-          <p:cNvPr id="299" name="Google Shape;299;p8"/>
+          <p:cNvPr id="301" name="Google Shape;301;p8"/>
           <p:cNvSpPr/>
           <p:nvPr/>
         </p:nvSpPr>
@@ -34883,7 +35137,7 @@
       </p:sp>
       <p:sp>
         <p:nvSpPr>
-          <p:cNvPr id="300" name="Google Shape;300;p8"/>
+          <p:cNvPr id="302" name="Google Shape;302;p8"/>
           <p:cNvSpPr txBox="1"/>
           <p:nvPr/>
         </p:nvSpPr>
@@ -34933,7 +35187,7 @@
       </p:sp>
       <p:sp>
         <p:nvSpPr>
-          <p:cNvPr id="301" name="Google Shape;301;p8"/>
+          <p:cNvPr id="303" name="Google Shape;303;p8"/>
           <p:cNvSpPr txBox="1"/>
           <p:nvPr/>
         </p:nvSpPr>
@@ -34983,7 +35237,7 @@
       </p:sp>
       <p:sp>
         <p:nvSpPr>
-          <p:cNvPr id="302" name="Google Shape;302;p8"/>
+          <p:cNvPr id="304" name="Google Shape;304;p8"/>
           <p:cNvSpPr/>
           <p:nvPr/>
         </p:nvSpPr>
@@ -35047,7 +35301,7 @@
       </p:sp>
       <p:sp>
         <p:nvSpPr>
-          <p:cNvPr id="303" name="Google Shape;303;p8"/>
+          <p:cNvPr id="305" name="Google Shape;305;p8"/>
           <p:cNvSpPr txBox="1"/>
           <p:nvPr/>
         </p:nvSpPr>
@@ -35191,7 +35445,7 @@
       </p:sp>
       <p:sp>
         <p:nvSpPr>
-          <p:cNvPr id="304" name="Google Shape;304;p8"/>
+          <p:cNvPr id="306" name="Google Shape;306;p8"/>
           <p:cNvSpPr/>
           <p:nvPr/>
         </p:nvSpPr>
@@ -35255,7 +35509,7 @@
       </p:sp>
       <p:sp>
         <p:nvSpPr>
-          <p:cNvPr id="305" name="Google Shape;305;p8"/>
+          <p:cNvPr id="307" name="Google Shape;307;p8"/>
           <p:cNvSpPr txBox="1"/>
           <p:nvPr/>
         </p:nvSpPr>
@@ -35305,7 +35559,7 @@
       </p:sp>
       <p:sp>
         <p:nvSpPr>
-          <p:cNvPr id="306" name="Google Shape;306;p8"/>
+          <p:cNvPr id="308" name="Google Shape;308;p8"/>
           <p:cNvSpPr txBox="1"/>
           <p:nvPr/>
         </p:nvSpPr>
@@ -35355,7 +35609,7 @@
       </p:sp>
       <p:sp>
         <p:nvSpPr>
-          <p:cNvPr id="307" name="Google Shape;307;p8"/>
+          <p:cNvPr id="309" name="Google Shape;309;p8"/>
           <p:cNvSpPr/>
           <p:nvPr/>
         </p:nvSpPr>
@@ -35419,7 +35673,7 @@
       </p:sp>
       <p:sp>
         <p:nvSpPr>
-          <p:cNvPr id="308" name="Google Shape;308;p8"/>
+          <p:cNvPr id="310" name="Google Shape;310;p8"/>
           <p:cNvSpPr txBox="1"/>
           <p:nvPr/>
         </p:nvSpPr>
@@ -35469,7 +35723,7 @@
       </p:sp>
       <p:sp>
         <p:nvSpPr>
-          <p:cNvPr id="309" name="Google Shape;309;p8"/>
+          <p:cNvPr id="311" name="Google Shape;311;p8"/>
           <p:cNvSpPr txBox="1"/>
           <p:nvPr/>
         </p:nvSpPr>
@@ -35519,7 +35773,7 @@
       </p:sp>
       <p:sp>
         <p:nvSpPr>
-          <p:cNvPr id="310" name="Google Shape;310;p8"/>
+          <p:cNvPr id="312" name="Google Shape;312;p8"/>
           <p:cNvSpPr/>
           <p:nvPr/>
         </p:nvSpPr>
@@ -35583,7 +35837,7 @@
       </p:sp>
       <p:sp>
         <p:nvSpPr>
-          <p:cNvPr id="311" name="Google Shape;311;p8"/>
+          <p:cNvPr id="313" name="Google Shape;313;p8"/>
           <p:cNvSpPr txBox="1"/>
           <p:nvPr/>
         </p:nvSpPr>
@@ -35633,7 +35887,7 @@
       </p:sp>
       <p:sp>
         <p:nvSpPr>
-          <p:cNvPr id="312" name="Google Shape;312;p8"/>
+          <p:cNvPr id="314" name="Google Shape;314;p8"/>
           <p:cNvSpPr txBox="1"/>
           <p:nvPr/>
         </p:nvSpPr>
@@ -35694,7 +35948,7 @@
   <p:cSld>
     <p:spTree>
       <p:nvGrpSpPr>
-        <p:cNvPr id="316" name="Shape 316"/>
+        <p:cNvPr id="318" name="Shape 318"/>
         <p:cNvGrpSpPr/>
         <p:nvPr/>
       </p:nvGrpSpPr>
@@ -35708,7 +35962,7 @@
       </p:grpSpPr>
       <p:sp>
         <p:nvSpPr>
-          <p:cNvPr id="317" name="Google Shape;317;p9"/>
+          <p:cNvPr id="319" name="Google Shape;319;p9"/>
           <p:cNvSpPr/>
           <p:nvPr/>
         </p:nvSpPr>
@@ -35772,7 +36026,7 @@
       </p:sp>
       <p:sp>
         <p:nvSpPr>
-          <p:cNvPr id="318" name="Google Shape;318;p9"/>
+          <p:cNvPr id="320" name="Google Shape;320;p9"/>
           <p:cNvSpPr/>
           <p:nvPr/>
         </p:nvSpPr>
@@ -35836,7 +36090,7 @@
       </p:sp>
       <p:sp>
         <p:nvSpPr>
-          <p:cNvPr id="319" name="Google Shape;319;p9"/>
+          <p:cNvPr id="321" name="Google Shape;321;p9"/>
           <p:cNvSpPr txBox="1"/>
           <p:nvPr/>
         </p:nvSpPr>
@@ -35886,7 +36140,7 @@
       </p:sp>
       <p:sp>
         <p:nvSpPr>
-          <p:cNvPr id="320" name="Google Shape;320;p9"/>
+          <p:cNvPr id="322" name="Google Shape;322;p9"/>
           <p:cNvSpPr txBox="1"/>
           <p:nvPr/>
         </p:nvSpPr>
@@ -35936,7 +36190,7 @@
       </p:sp>
       <p:sp>
         <p:nvSpPr>
-          <p:cNvPr id="321" name="Google Shape;321;p9"/>
+          <p:cNvPr id="323" name="Google Shape;323;p9"/>
           <p:cNvSpPr txBox="1"/>
           <p:nvPr/>
         </p:nvSpPr>
@@ -35986,7 +36240,7 @@
       </p:sp>
       <p:pic>
         <p:nvPicPr>
-          <p:cNvPr descr="phase3.png" id="322" name="Google Shape;322;p9"/>
+          <p:cNvPr descr="phase3.png" id="324" name="Google Shape;324;p9"/>
           <p:cNvPicPr preferRelativeResize="0"/>
           <p:nvPr/>
         </p:nvPicPr>
@@ -36013,7 +36267,7 @@
       </p:pic>
       <p:sp>
         <p:nvSpPr>
-          <p:cNvPr id="323" name="Google Shape;323;p9"/>
+          <p:cNvPr id="325" name="Google Shape;325;p9"/>
           <p:cNvSpPr/>
           <p:nvPr/>
         </p:nvSpPr>
@@ -36077,7 +36331,7 @@
       </p:sp>
       <p:sp>
         <p:nvSpPr>
-          <p:cNvPr id="324" name="Google Shape;324;p9"/>
+          <p:cNvPr id="326" name="Google Shape;326;p9"/>
           <p:cNvSpPr/>
           <p:nvPr/>
         </p:nvSpPr>
@@ -36141,7 +36395,7 @@
       </p:sp>
       <p:sp>
         <p:nvSpPr>
-          <p:cNvPr id="325" name="Google Shape;325;p9"/>
+          <p:cNvPr id="327" name="Google Shape;327;p9"/>
           <p:cNvSpPr txBox="1"/>
           <p:nvPr/>
         </p:nvSpPr>
@@ -36191,7 +36445,7 @@
       </p:sp>
       <p:sp>
         <p:nvSpPr>
-          <p:cNvPr id="326" name="Google Shape;326;p9"/>
+          <p:cNvPr id="328" name="Google Shape;328;p9"/>
           <p:cNvSpPr txBox="1"/>
           <p:nvPr/>
         </p:nvSpPr>
@@ -36383,7 +36637,7 @@
       </p:sp>
       <p:sp>
         <p:nvSpPr>
-          <p:cNvPr id="327" name="Google Shape;327;p9"/>
+          <p:cNvPr id="329" name="Google Shape;329;p9"/>
           <p:cNvSpPr/>
           <p:nvPr/>
         </p:nvSpPr>
@@ -36447,7 +36701,7 @@
       </p:sp>
       <p:sp>
         <p:nvSpPr>
-          <p:cNvPr id="328" name="Google Shape;328;p9"/>
+          <p:cNvPr id="330" name="Google Shape;330;p9"/>
           <p:cNvSpPr/>
           <p:nvPr/>
         </p:nvSpPr>
@@ -36511,7 +36765,7 @@
       </p:sp>
       <p:sp>
         <p:nvSpPr>
-          <p:cNvPr id="329" name="Google Shape;329;p9"/>
+          <p:cNvPr id="331" name="Google Shape;331;p9"/>
           <p:cNvSpPr txBox="1"/>
           <p:nvPr/>
         </p:nvSpPr>
@@ -36561,7 +36815,7 @@
       </p:sp>
       <p:sp>
         <p:nvSpPr>
-          <p:cNvPr id="330" name="Google Shape;330;p9"/>
+          <p:cNvPr id="332" name="Google Shape;332;p9"/>
           <p:cNvSpPr txBox="1"/>
           <p:nvPr/>
         </p:nvSpPr>
@@ -36682,7 +36936,7 @@
       </p:sp>
       <p:sp>
         <p:nvSpPr>
-          <p:cNvPr id="331" name="Google Shape;331;p9"/>
+          <p:cNvPr id="333" name="Google Shape;333;p9"/>
           <p:cNvSpPr/>
           <p:nvPr/>
         </p:nvSpPr>
@@ -36746,7 +37000,7 @@
       </p:sp>
       <p:sp>
         <p:nvSpPr>
-          <p:cNvPr id="332" name="Google Shape;332;p9"/>
+          <p:cNvPr id="334" name="Google Shape;334;p9"/>
           <p:cNvSpPr/>
           <p:nvPr/>
         </p:nvSpPr>
@@ -36810,7 +37064,7 @@
       </p:sp>
       <p:sp>
         <p:nvSpPr>
-          <p:cNvPr id="333" name="Google Shape;333;p9"/>
+          <p:cNvPr id="335" name="Google Shape;335;p9"/>
           <p:cNvSpPr txBox="1"/>
           <p:nvPr/>
         </p:nvSpPr>
@@ -36867,6 +37121,285 @@
 </file>
 
 <file path=ppt/theme/theme1.xml><?xml version="1.0" encoding="utf-8"?>
+<a:theme xmlns:a="http://schemas.openxmlformats.org/drawingml/2006/main" xmlns:r="http://schemas.openxmlformats.org/officeDocument/2006/relationships" name="Office Theme">
+  <a:themeElements>
+    <a:clrScheme name="Office">
+      <a:dk1>
+        <a:srgbClr val="000000"/>
+      </a:dk1>
+      <a:lt1>
+        <a:srgbClr val="FFFFFF"/>
+      </a:lt1>
+      <a:dk2>
+        <a:srgbClr val="1F497D"/>
+      </a:dk2>
+      <a:lt2>
+        <a:srgbClr val="EEECE1"/>
+      </a:lt2>
+      <a:accent1>
+        <a:srgbClr val="4F81BD"/>
+      </a:accent1>
+      <a:accent2>
+        <a:srgbClr val="C0504D"/>
+      </a:accent2>
+      <a:accent3>
+        <a:srgbClr val="9BBB59"/>
+      </a:accent3>
+      <a:accent4>
+        <a:srgbClr val="8064A2"/>
+      </a:accent4>
+      <a:accent5>
+        <a:srgbClr val="4BACC6"/>
+      </a:accent5>
+      <a:accent6>
+        <a:srgbClr val="F79646"/>
+      </a:accent6>
+      <a:hlink>
+        <a:srgbClr val="0000FF"/>
+      </a:hlink>
+      <a:folHlink>
+        <a:srgbClr val="800080"/>
+      </a:folHlink>
+    </a:clrScheme>
+    <a:fontScheme name="Office">
+      <a:majorFont>
+        <a:latin typeface="Arial"/>
+        <a:ea typeface=""/>
+        <a:cs typeface=""/>
+        <a:font script="Jpan" typeface="ＭＳ Ｐゴシック"/>
+        <a:font script="Hang" typeface="맑은 고딕"/>
+        <a:font script="Hans" typeface="宋体"/>
+        <a:font script="Hant" typeface="新細明體"/>
+        <a:font script="Arab" typeface="Times New Roman"/>
+        <a:font script="Hebr" typeface="Times New Roman"/>
+        <a:font script="Thai" typeface="Angsana New"/>
+        <a:font script="Ethi" typeface="Nyala"/>
+        <a:font script="Beng" typeface="Vrinda"/>
+        <a:font script="Gujr" typeface="Shruti"/>
+        <a:font script="Khmr" typeface="MoolBoran"/>
+        <a:font script="Knda" typeface="Tunga"/>
+        <a:font script="Guru" typeface="Raavi"/>
+        <a:font script="Cans" typeface="Euphemia"/>
+        <a:font script="Cher" typeface="Plantagenet Cherokee"/>
+        <a:font script="Yiii" typeface="Microsoft Yi Baiti"/>
+        <a:font script="Tibt" typeface="Microsoft Himalaya"/>
+        <a:font script="Thaa" typeface="MV Boli"/>
+        <a:font script="Deva" typeface="Mangal"/>
+        <a:font script="Telu" typeface="Gautami"/>
+        <a:font script="Taml" typeface="Latha"/>
+        <a:font script="Syrc" typeface="Estrangelo Edessa"/>
+        <a:font script="Orya" typeface="Kalinga"/>
+        <a:font script="Mlym" typeface="Kartika"/>
+        <a:font script="Laoo" typeface="DokChampa"/>
+        <a:font script="Sinh" typeface="Iskoola Pota"/>
+        <a:font script="Mong" typeface="Mongolian Baiti"/>
+        <a:font script="Viet" typeface="Times New Roman"/>
+        <a:font script="Uigh" typeface="Microsoft Uighur"/>
+        <a:font script="Geor" typeface="Sylfaen"/>
+      </a:majorFont>
+      <a:minorFont>
+        <a:latin typeface="Arial"/>
+        <a:ea typeface=""/>
+        <a:cs typeface=""/>
+        <a:font script="Jpan" typeface="ＭＳ Ｐゴシック"/>
+        <a:font script="Hang" typeface="맑은 고딕"/>
+        <a:font script="Hans" typeface="宋体"/>
+        <a:font script="Hant" typeface="新細明體"/>
+        <a:font script="Arab" typeface="Arial"/>
+        <a:font script="Hebr" typeface="Arial"/>
+        <a:font script="Thai" typeface="Cordia New"/>
+        <a:font script="Ethi" typeface="Nyala"/>
+        <a:font script="Beng" typeface="Vrinda"/>
+        <a:font script="Gujr" typeface="Shruti"/>
+        <a:font script="Khmr" typeface="DaunPenh"/>
+        <a:font script="Knda" typeface="Tunga"/>
+        <a:font script="Guru" typeface="Raavi"/>
+        <a:font script="Cans" typeface="Euphemia"/>
+        <a:font script="Cher" typeface="Plantagenet Cherokee"/>
+        <a:font script="Yiii" typeface="Microsoft Yi Baiti"/>
+        <a:font script="Tibt" typeface="Microsoft Himalaya"/>
+        <a:font script="Thaa" typeface="MV Boli"/>
+        <a:font script="Deva" typeface="Mangal"/>
+        <a:font script="Telu" typeface="Gautami"/>
+        <a:font script="Taml" typeface="Latha"/>
+        <a:font script="Syrc" typeface="Estrangelo Edessa"/>
+        <a:font script="Orya" typeface="Kalinga"/>
+        <a:font script="Mlym" typeface="Kartika"/>
+        <a:font script="Laoo" typeface="DokChampa"/>
+        <a:font script="Sinh" typeface="Iskoola Pota"/>
+        <a:font script="Mong" typeface="Mongolian Baiti"/>
+        <a:font script="Viet" typeface="Arial"/>
+        <a:font script="Uigh" typeface="Microsoft Uighur"/>
+        <a:font script="Geor" typeface="Sylfaen"/>
+      </a:minorFont>
+    </a:fontScheme>
+    <a:fmtScheme name="Office">
+      <a:fillStyleLst>
+        <a:solidFill>
+          <a:schemeClr val="phClr"/>
+        </a:solidFill>
+        <a:gradFill rotWithShape="1">
+          <a:gsLst>
+            <a:gs pos="0">
+              <a:schemeClr val="phClr">
+                <a:tint val="50000"/>
+                <a:satMod val="300000"/>
+              </a:schemeClr>
+            </a:gs>
+            <a:gs pos="35000">
+              <a:schemeClr val="phClr">
+                <a:tint val="37000"/>
+                <a:satMod val="300000"/>
+              </a:schemeClr>
+            </a:gs>
+            <a:gs pos="100000">
+              <a:schemeClr val="phClr">
+                <a:tint val="15000"/>
+                <a:satMod val="350000"/>
+              </a:schemeClr>
+            </a:gs>
+          </a:gsLst>
+          <a:lin ang="16200000" scaled="1"/>
+        </a:gradFill>
+        <a:gradFill rotWithShape="1">
+          <a:gsLst>
+            <a:gs pos="0">
+              <a:schemeClr val="phClr">
+                <a:tint val="100000"/>
+                <a:shade val="100000"/>
+                <a:satMod val="130000"/>
+              </a:schemeClr>
+            </a:gs>
+            <a:gs pos="100000">
+              <a:schemeClr val="phClr">
+                <a:tint val="50000"/>
+                <a:shade val="100000"/>
+                <a:satMod val="350000"/>
+              </a:schemeClr>
+            </a:gs>
+          </a:gsLst>
+          <a:lin ang="16200000" scaled="0"/>
+        </a:gradFill>
+      </a:fillStyleLst>
+      <a:lnStyleLst>
+        <a:ln w="9525" cap="flat" cmpd="sng" algn="ctr">
+          <a:solidFill>
+            <a:schemeClr val="phClr">
+              <a:shade val="95000"/>
+              <a:satMod val="105000"/>
+            </a:schemeClr>
+          </a:solidFill>
+          <a:prstDash val="solid"/>
+        </a:ln>
+        <a:ln w="25400" cap="flat" cmpd="sng" algn="ctr">
+          <a:solidFill>
+            <a:schemeClr val="phClr"/>
+          </a:solidFill>
+          <a:prstDash val="solid"/>
+        </a:ln>
+        <a:ln w="38100" cap="flat" cmpd="sng" algn="ctr">
+          <a:solidFill>
+            <a:schemeClr val="phClr"/>
+          </a:solidFill>
+          <a:prstDash val="solid"/>
+        </a:ln>
+      </a:lnStyleLst>
+      <a:effectStyleLst>
+        <a:effectStyle>
+          <a:effectLst>
+            <a:outerShdw blurRad="40000" dist="20000" dir="5400000" rotWithShape="0">
+              <a:srgbClr val="000000">
+                <a:alpha val="38000"/>
+              </a:srgbClr>
+            </a:outerShdw>
+          </a:effectLst>
+        </a:effectStyle>
+        <a:effectStyle>
+          <a:effectLst>
+            <a:outerShdw blurRad="40000" dist="23000" dir="5400000" rotWithShape="0">
+              <a:srgbClr val="000000">
+                <a:alpha val="35000"/>
+              </a:srgbClr>
+            </a:outerShdw>
+          </a:effectLst>
+        </a:effectStyle>
+        <a:effectStyle>
+          <a:effectLst>
+            <a:outerShdw blurRad="40000" dist="23000" dir="5400000" rotWithShape="0">
+              <a:srgbClr val="000000">
+                <a:alpha val="35000"/>
+              </a:srgbClr>
+            </a:outerShdw>
+          </a:effectLst>
+          <a:scene3d>
+            <a:camera prst="orthographicFront">
+              <a:rot lat="0" lon="0" rev="0"/>
+            </a:camera>
+            <a:lightRig rig="threePt" dir="t">
+              <a:rot lat="0" lon="0" rev="1200000"/>
+            </a:lightRig>
+          </a:scene3d>
+          <a:sp3d>
+            <a:bevelT w="63500" h="25400"/>
+          </a:sp3d>
+        </a:effectStyle>
+      </a:effectStyleLst>
+      <a:bgFillStyleLst>
+        <a:solidFill>
+          <a:schemeClr val="phClr"/>
+        </a:solidFill>
+        <a:gradFill rotWithShape="1">
+          <a:gsLst>
+            <a:gs pos="0">
+              <a:schemeClr val="phClr">
+                <a:tint val="40000"/>
+                <a:satMod val="350000"/>
+              </a:schemeClr>
+            </a:gs>
+            <a:gs pos="40000">
+              <a:schemeClr val="phClr">
+                <a:tint val="45000"/>
+                <a:shade val="99000"/>
+                <a:satMod val="350000"/>
+              </a:schemeClr>
+            </a:gs>
+            <a:gs pos="100000">
+              <a:schemeClr val="phClr">
+                <a:shade val="20000"/>
+                <a:satMod val="255000"/>
+              </a:schemeClr>
+            </a:gs>
+          </a:gsLst>
+          <a:path path="circle">
+            <a:fillToRect l="50000" t="-80000" r="50000" b="180000"/>
+          </a:path>
+        </a:gradFill>
+        <a:gradFill rotWithShape="1">
+          <a:gsLst>
+            <a:gs pos="0">
+              <a:schemeClr val="phClr">
+                <a:tint val="80000"/>
+                <a:satMod val="300000"/>
+              </a:schemeClr>
+            </a:gs>
+            <a:gs pos="100000">
+              <a:schemeClr val="phClr">
+                <a:shade val="30000"/>
+                <a:satMod val="200000"/>
+              </a:schemeClr>
+            </a:gs>
+          </a:gsLst>
+          <a:path path="circle">
+            <a:fillToRect l="50000" t="50000" r="50000" b="50000"/>
+          </a:path>
+        </a:gradFill>
+      </a:bgFillStyleLst>
+    </a:fmtScheme>
+  </a:themeElements>
+</a:theme>
+</file>
+
+<file path=ppt/theme/theme2.xml><?xml version="1.0" encoding="utf-8"?>
 <a:theme xmlns:a="http://schemas.openxmlformats.org/drawingml/2006/main" xmlns:r="http://schemas.openxmlformats.org/officeDocument/2006/relationships">
   <a:themeElements>
     <a:clrScheme name="Default">
@@ -37143,283 +37676,4 @@
     </a:fmtScheme>
   </a:themeElements>
 </a:theme>
-</file>
-
-<file path=ppt/theme/theme2.xml><?xml version="1.0" encoding="utf-8"?>
-<a:theme xmlns:a="http://schemas.openxmlformats.org/drawingml/2006/main" xmlns:r="http://schemas.openxmlformats.org/officeDocument/2006/relationships" name="Office Theme">
-  <a:themeElements>
-    <a:clrScheme name="Office">
-      <a:dk1>
-        <a:srgbClr val="000000"/>
-      </a:dk1>
-      <a:lt1>
-        <a:srgbClr val="FFFFFF"/>
-      </a:lt1>
-      <a:dk2>
-        <a:srgbClr val="1F497D"/>
-      </a:dk2>
-      <a:lt2>
-        <a:srgbClr val="EEECE1"/>
-      </a:lt2>
-      <a:accent1>
-        <a:srgbClr val="4F81BD"/>
-      </a:accent1>
-      <a:accent2>
-        <a:srgbClr val="C0504D"/>
-      </a:accent2>
-      <a:accent3>
-        <a:srgbClr val="9BBB59"/>
-      </a:accent3>
-      <a:accent4>
-        <a:srgbClr val="8064A2"/>
-      </a:accent4>
-      <a:accent5>
-        <a:srgbClr val="4BACC6"/>
-      </a:accent5>
-      <a:accent6>
-        <a:srgbClr val="F79646"/>
-      </a:accent6>
-      <a:hlink>
-        <a:srgbClr val="0000FF"/>
-      </a:hlink>
-      <a:folHlink>
-        <a:srgbClr val="800080"/>
-      </a:folHlink>
-    </a:clrScheme>
-    <a:fontScheme name="Office">
-      <a:majorFont>
-        <a:latin typeface="Arial"/>
-        <a:ea typeface=""/>
-        <a:cs typeface=""/>
-        <a:font script="Jpan" typeface="ＭＳ Ｐゴシック"/>
-        <a:font script="Hang" typeface="맑은 고딕"/>
-        <a:font script="Hans" typeface="宋体"/>
-        <a:font script="Hant" typeface="新細明體"/>
-        <a:font script="Arab" typeface="Times New Roman"/>
-        <a:font script="Hebr" typeface="Times New Roman"/>
-        <a:font script="Thai" typeface="Angsana New"/>
-        <a:font script="Ethi" typeface="Nyala"/>
-        <a:font script="Beng" typeface="Vrinda"/>
-        <a:font script="Gujr" typeface="Shruti"/>
-        <a:font script="Khmr" typeface="MoolBoran"/>
-        <a:font script="Knda" typeface="Tunga"/>
-        <a:font script="Guru" typeface="Raavi"/>
-        <a:font script="Cans" typeface="Euphemia"/>
-        <a:font script="Cher" typeface="Plantagenet Cherokee"/>
-        <a:font script="Yiii" typeface="Microsoft Yi Baiti"/>
-        <a:font script="Tibt" typeface="Microsoft Himalaya"/>
-        <a:font script="Thaa" typeface="MV Boli"/>
-        <a:font script="Deva" typeface="Mangal"/>
-        <a:font script="Telu" typeface="Gautami"/>
-        <a:font script="Taml" typeface="Latha"/>
-        <a:font script="Syrc" typeface="Estrangelo Edessa"/>
-        <a:font script="Orya" typeface="Kalinga"/>
-        <a:font script="Mlym" typeface="Kartika"/>
-        <a:font script="Laoo" typeface="DokChampa"/>
-        <a:font script="Sinh" typeface="Iskoola Pota"/>
-        <a:font script="Mong" typeface="Mongolian Baiti"/>
-        <a:font script="Viet" typeface="Times New Roman"/>
-        <a:font script="Uigh" typeface="Microsoft Uighur"/>
-        <a:font script="Geor" typeface="Sylfaen"/>
-      </a:majorFont>
-      <a:minorFont>
-        <a:latin typeface="Arial"/>
-        <a:ea typeface=""/>
-        <a:cs typeface=""/>
-        <a:font script="Jpan" typeface="ＭＳ Ｐゴシック"/>
-        <a:font script="Hang" typeface="맑은 고딕"/>
-        <a:font script="Hans" typeface="宋体"/>
-        <a:font script="Hant" typeface="新細明體"/>
-        <a:font script="Arab" typeface="Arial"/>
-        <a:font script="Hebr" typeface="Arial"/>
-        <a:font script="Thai" typeface="Cordia New"/>
-        <a:font script="Ethi" typeface="Nyala"/>
-        <a:font script="Beng" typeface="Vrinda"/>
-        <a:font script="Gujr" typeface="Shruti"/>
-        <a:font script="Khmr" typeface="DaunPenh"/>
-        <a:font script="Knda" typeface="Tunga"/>
-        <a:font script="Guru" typeface="Raavi"/>
-        <a:font script="Cans" typeface="Euphemia"/>
-        <a:font script="Cher" typeface="Plantagenet Cherokee"/>
-        <a:font script="Yiii" typeface="Microsoft Yi Baiti"/>
-        <a:font script="Tibt" typeface="Microsoft Himalaya"/>
-        <a:font script="Thaa" typeface="MV Boli"/>
-        <a:font script="Deva" typeface="Mangal"/>
-        <a:font script="Telu" typeface="Gautami"/>
-        <a:font script="Taml" typeface="Latha"/>
-        <a:font script="Syrc" typeface="Estrangelo Edessa"/>
-        <a:font script="Orya" typeface="Kalinga"/>
-        <a:font script="Mlym" typeface="Kartika"/>
-        <a:font script="Laoo" typeface="DokChampa"/>
-        <a:font script="Sinh" typeface="Iskoola Pota"/>
-        <a:font script="Mong" typeface="Mongolian Baiti"/>
-        <a:font script="Viet" typeface="Arial"/>
-        <a:font script="Uigh" typeface="Microsoft Uighur"/>
-        <a:font script="Geor" typeface="Sylfaen"/>
-      </a:minorFont>
-    </a:fontScheme>
-    <a:fmtScheme name="Office">
-      <a:fillStyleLst>
-        <a:solidFill>
-          <a:schemeClr val="phClr"/>
-        </a:solidFill>
-        <a:gradFill rotWithShape="1">
-          <a:gsLst>
-            <a:gs pos="0">
-              <a:schemeClr val="phClr">
-                <a:tint val="50000"/>
-                <a:satMod val="300000"/>
-              </a:schemeClr>
-            </a:gs>
-            <a:gs pos="35000">
-              <a:schemeClr val="phClr">
-                <a:tint val="37000"/>
-                <a:satMod val="300000"/>
-              </a:schemeClr>
-            </a:gs>
-            <a:gs pos="100000">
-              <a:schemeClr val="phClr">
-                <a:tint val="15000"/>
-                <a:satMod val="350000"/>
-              </a:schemeClr>
-            </a:gs>
-          </a:gsLst>
-          <a:lin ang="16200000" scaled="1"/>
-        </a:gradFill>
-        <a:gradFill rotWithShape="1">
-          <a:gsLst>
-            <a:gs pos="0">
-              <a:schemeClr val="phClr">
-                <a:tint val="100000"/>
-                <a:shade val="100000"/>
-                <a:satMod val="130000"/>
-              </a:schemeClr>
-            </a:gs>
-            <a:gs pos="100000">
-              <a:schemeClr val="phClr">
-                <a:tint val="50000"/>
-                <a:shade val="100000"/>
-                <a:satMod val="350000"/>
-              </a:schemeClr>
-            </a:gs>
-          </a:gsLst>
-          <a:lin ang="16200000" scaled="0"/>
-        </a:gradFill>
-      </a:fillStyleLst>
-      <a:lnStyleLst>
-        <a:ln w="9525" cap="flat" cmpd="sng" algn="ctr">
-          <a:solidFill>
-            <a:schemeClr val="phClr">
-              <a:shade val="95000"/>
-              <a:satMod val="105000"/>
-            </a:schemeClr>
-          </a:solidFill>
-          <a:prstDash val="solid"/>
-        </a:ln>
-        <a:ln w="25400" cap="flat" cmpd="sng" algn="ctr">
-          <a:solidFill>
-            <a:schemeClr val="phClr"/>
-          </a:solidFill>
-          <a:prstDash val="solid"/>
-        </a:ln>
-        <a:ln w="38100" cap="flat" cmpd="sng" algn="ctr">
-          <a:solidFill>
-            <a:schemeClr val="phClr"/>
-          </a:solidFill>
-          <a:prstDash val="solid"/>
-        </a:ln>
-      </a:lnStyleLst>
-      <a:effectStyleLst>
-        <a:effectStyle>
-          <a:effectLst>
-            <a:outerShdw blurRad="40000" dist="20000" dir="5400000" rotWithShape="0">
-              <a:srgbClr val="000000">
-                <a:alpha val="38000"/>
-              </a:srgbClr>
-            </a:outerShdw>
-          </a:effectLst>
-        </a:effectStyle>
-        <a:effectStyle>
-          <a:effectLst>
-            <a:outerShdw blurRad="40000" dist="23000" dir="5400000" rotWithShape="0">
-              <a:srgbClr val="000000">
-                <a:alpha val="35000"/>
-              </a:srgbClr>
-            </a:outerShdw>
-          </a:effectLst>
-        </a:effectStyle>
-        <a:effectStyle>
-          <a:effectLst>
-            <a:outerShdw blurRad="40000" dist="23000" dir="5400000" rotWithShape="0">
-              <a:srgbClr val="000000">
-                <a:alpha val="35000"/>
-              </a:srgbClr>
-            </a:outerShdw>
-          </a:effectLst>
-          <a:scene3d>
-            <a:camera prst="orthographicFront">
-              <a:rot lat="0" lon="0" rev="0"/>
-            </a:camera>
-            <a:lightRig rig="threePt" dir="t">
-              <a:rot lat="0" lon="0" rev="1200000"/>
-            </a:lightRig>
-          </a:scene3d>
-          <a:sp3d>
-            <a:bevelT w="63500" h="25400"/>
-          </a:sp3d>
-        </a:effectStyle>
-      </a:effectStyleLst>
-      <a:bgFillStyleLst>
-        <a:solidFill>
-          <a:schemeClr val="phClr"/>
-        </a:solidFill>
-        <a:gradFill rotWithShape="1">
-          <a:gsLst>
-            <a:gs pos="0">
-              <a:schemeClr val="phClr">
-                <a:tint val="40000"/>
-                <a:satMod val="350000"/>
-              </a:schemeClr>
-            </a:gs>
-            <a:gs pos="40000">
-              <a:schemeClr val="phClr">
-                <a:tint val="45000"/>
-                <a:shade val="99000"/>
-                <a:satMod val="350000"/>
-              </a:schemeClr>
-            </a:gs>
-            <a:gs pos="100000">
-              <a:schemeClr val="phClr">
-                <a:shade val="20000"/>
-                <a:satMod val="255000"/>
-              </a:schemeClr>
-            </a:gs>
-          </a:gsLst>
-          <a:path path="circle">
-            <a:fillToRect l="50000" t="-80000" r="50000" b="180000"/>
-          </a:path>
-        </a:gradFill>
-        <a:gradFill rotWithShape="1">
-          <a:gsLst>
-            <a:gs pos="0">
-              <a:schemeClr val="phClr">
-                <a:tint val="80000"/>
-                <a:satMod val="300000"/>
-              </a:schemeClr>
-            </a:gs>
-            <a:gs pos="100000">
-              <a:schemeClr val="phClr">
-                <a:shade val="30000"/>
-                <a:satMod val="200000"/>
-              </a:schemeClr>
-            </a:gs>
-          </a:gsLst>
-          <a:path path="circle">
-            <a:fillToRect l="50000" t="50000" r="50000" b="50000"/>
-          </a:path>
-        </a:gradFill>
-      </a:bgFillStyleLst>
-    </a:fmtScheme>
-  </a:themeElements>
-</a:theme>
 </file>